--- a/Portofolio-Analisis-ISPA-Indonesia.pptx
+++ b/Portofolio-Analisis-ISPA-Indonesia.pptx
@@ -3093,7 +3093,7 @@
     <p:bg>
       <p:bgPr>
         <a:solidFill>
-          <a:srgbClr val="1E3A8A"/>
+          <a:srgbClr val="F0E8D8"/>
         </a:solidFill>
         <a:effectLst/>
       </p:bgPr>
@@ -3107,100 +3107,25 @@
       <p:grpSpPr/>
       <p:sp>
         <p:nvSpPr>
-          <p:cNvPr id="2" name="TextBox 1"/>
-          <p:cNvSpPr txBox="1"/>
-          <p:nvPr/>
-        </p:nvSpPr>
-        <p:spPr>
-          <a:xfrm>
-            <a:off x="822960" y="1188720"/>
-            <a:ext cx="10515600" cy="1463040"/>
-          </a:xfrm>
-          <a:prstGeom prst="rect">
-            <a:avLst/>
-          </a:prstGeom>
-          <a:noFill/>
-        </p:spPr>
-        <p:txBody>
-          <a:bodyPr wrap="square">
-            <a:spAutoFit/>
-          </a:bodyPr>
-          <a:lstStyle/>
-          <a:p>
-            <a:pPr>
-              <a:spcAft>
-                <a:spcPts val="800"/>
-              </a:spcAft>
-            </a:pPr>
-            <a:r>
-              <a:rPr sz="4400" b="1" i="0">
-                <a:solidFill>
-                  <a:srgbClr val="FFFFFF"/>
-                </a:solidFill>
-              </a:rPr>
-              <a:t>ISPA di Indonesia 2026</a:t>
-            </a:r>
-          </a:p>
-        </p:txBody>
-      </p:sp>
-      <p:sp>
-        <p:nvSpPr>
-          <p:cNvPr id="3" name="TextBox 2"/>
-          <p:cNvSpPr txBox="1"/>
-          <p:nvPr/>
-        </p:nvSpPr>
-        <p:spPr>
-          <a:xfrm>
-            <a:off x="822960" y="2651760"/>
-            <a:ext cx="10515600" cy="914400"/>
-          </a:xfrm>
-          <a:prstGeom prst="rect">
-            <a:avLst/>
-          </a:prstGeom>
-          <a:noFill/>
-        </p:spPr>
-        <p:txBody>
-          <a:bodyPr wrap="square">
-            <a:spAutoFit/>
-          </a:bodyPr>
-          <a:lstStyle/>
-          <a:p>
-            <a:pPr>
-              <a:spcAft>
-                <a:spcPts val="800"/>
-              </a:spcAft>
-            </a:pPr>
-            <a:r>
-              <a:rPr sz="2400" b="0" i="0">
-                <a:solidFill>
-                  <a:srgbClr val="FFFFFF"/>
-                </a:solidFill>
-              </a:rPr>
-              <a:t>Lonjakan Kasus, Sebaran Provinsi, dan Dampak Karhutla &amp; Kualitas Udara</a:t>
-            </a:r>
-          </a:p>
-        </p:txBody>
-      </p:sp>
-      <p:sp>
-        <p:nvSpPr>
-          <p:cNvPr id="4" name="Rectangle 3"/>
+          <p:cNvPr id="2" name="Rectangle 1"/>
           <p:cNvSpPr/>
           <p:nvPr/>
         </p:nvSpPr>
         <p:spPr>
           <a:xfrm>
-            <a:off x="822960" y="3749039"/>
-            <a:ext cx="1371600" cy="64008"/>
+            <a:off x="0" y="0"/>
+            <a:ext cx="201168" cy="6858000"/>
           </a:xfrm>
           <a:prstGeom prst="rect">
             <a:avLst/>
           </a:prstGeom>
           <a:solidFill>
-            <a:srgbClr val="0D9488"/>
+            <a:srgbClr val="5E2A72"/>
           </a:solidFill>
           <a:ln>
             <a:noFill/>
           </a:ln>
+          <a:effectLst/>
         </p:spPr>
         <p:style>
           <a:lnRef idx="1">
@@ -3226,14 +3151,14 @@
       </p:sp>
       <p:sp>
         <p:nvSpPr>
-          <p:cNvPr id="5" name="TextBox 4"/>
+          <p:cNvPr id="3" name="TextBox 2"/>
           <p:cNvSpPr txBox="1"/>
           <p:nvPr/>
         </p:nvSpPr>
         <p:spPr>
           <a:xfrm>
-            <a:off x="822960" y="4114800"/>
-            <a:ext cx="10515600" cy="1463040"/>
+            <a:off x="777240" y="1417320"/>
+            <a:ext cx="6309360" cy="2377440"/>
           </a:xfrm>
           <a:prstGeom prst="rect">
             <a:avLst/>
@@ -3247,46 +3172,54 @@
           <a:lstStyle/>
           <a:p>
             <a:pPr>
+              <a:lnSpc>
+                <a:spcPct val="105000"/>
+              </a:lnSpc>
+              <a:spcAft>
+                <a:spcPts val="1400"/>
+              </a:spcAft>
+            </a:pPr>
+            <a:r>
+              <a:rPr sz="4300" b="1" i="0">
+                <a:solidFill>
+                  <a:srgbClr val="2A1E33"/>
+                </a:solidFill>
+                <a:latin typeface="Noto Sans"/>
+              </a:rPr>
+              <a:t>ISPA di Indonesia 2026</a:t>
+            </a:r>
+          </a:p>
+          <a:p>
+            <a:pPr>
+              <a:lnSpc>
+                <a:spcPct val="120000"/>
+              </a:lnSpc>
               <a:spcAft>
                 <a:spcPts val="800"/>
               </a:spcAft>
             </a:pPr>
             <a:r>
-              <a:rPr sz="2000" b="1" i="0">
-                <a:solidFill>
-                  <a:srgbClr val="FFFFFF"/>
-                </a:solidFill>
-              </a:rPr>
-              <a:t>BAGHIZ ASSHIDDIQIE ARASYA</a:t>
-            </a:r>
-          </a:p>
-          <a:p>
-            <a:pPr>
-              <a:spcAft>
-                <a:spcPts val="800"/>
-              </a:spcAft>
-            </a:pPr>
-            <a:r>
-              <a:rPr sz="1600" b="0" i="0">
-                <a:solidFill>
-                  <a:srgbClr val="FFFFFF"/>
-                </a:solidFill>
-              </a:rPr>
-              <a:t>Analisis Data Kesehatan Masyarakat  •  SQL + Python  •  Oktober 2026</a:t>
-            </a:r>
-          </a:p>
-        </p:txBody>
-      </p:sp>
-      <p:sp>
-        <p:nvSpPr>
-          <p:cNvPr id="6" name="TextBox 5"/>
+              <a:rPr sz="2000" b="0" i="0">
+                <a:solidFill>
+                  <a:srgbClr val="5E2A72"/>
+                </a:solidFill>
+                <a:latin typeface="Noto Sans"/>
+              </a:rPr>
+              <a:t>Lonjakan Kasus, Sebaran Provinsi, dan Dampak Karhutla &amp; Kualitas Udara</a:t>
+            </a:r>
+          </a:p>
+        </p:txBody>
+      </p:sp>
+      <p:sp>
+        <p:nvSpPr>
+          <p:cNvPr id="4" name="TextBox 3"/>
           <p:cNvSpPr txBox="1"/>
           <p:nvPr/>
         </p:nvSpPr>
         <p:spPr>
           <a:xfrm>
-            <a:off x="822960" y="5943600"/>
-            <a:ext cx="10515600" cy="457200"/>
+            <a:off x="7269480" y="1554480"/>
+            <a:ext cx="4526280" cy="2651760"/>
           </a:xfrm>
           <a:prstGeom prst="rect">
             <a:avLst/>
@@ -3301,16 +3234,187 @@
           <a:p>
             <a:pPr>
               <a:spcAft>
-                <a:spcPts val="800"/>
+                <a:spcPts val="600"/>
+              </a:spcAft>
+            </a:pPr>
+            <a:r>
+              <a:rPr sz="5000" b="1" i="0">
+                <a:solidFill>
+                  <a:srgbClr val="5E2A72"/>
+                </a:solidFill>
+                <a:latin typeface="Noto Sans"/>
+              </a:rPr>
+              <a:t>14.088.945</a:t>
+            </a:r>
+          </a:p>
+          <a:p>
+            <a:pPr>
+              <a:spcAft>
+                <a:spcPts val="200"/>
+              </a:spcAft>
+            </a:pPr>
+            <a:r>
+              <a:rPr sz="1600" b="0" i="0">
+                <a:solidFill>
+                  <a:srgbClr val="2A1E33"/>
+                </a:solidFill>
+                <a:latin typeface="Noto Sans"/>
+              </a:rPr>
+              <a:t>laporan kasus ISPA nasional</a:t>
+            </a:r>
+          </a:p>
+          <a:p>
+            <a:pPr>
+              <a:spcAft>
+                <a:spcPts val="0"/>
+              </a:spcAft>
+            </a:pPr>
+            <a:r>
+              <a:rPr sz="1400" b="0" i="0">
+                <a:solidFill>
+                  <a:srgbClr val="6B5B74"/>
+                </a:solidFill>
+                <a:latin typeface="Noto Sans"/>
+              </a:rPr>
+              <a:t>SKDR, s.d. minggu ke-38</a:t>
+            </a:r>
+          </a:p>
+        </p:txBody>
+      </p:sp>
+      <p:sp>
+        <p:nvSpPr>
+          <p:cNvPr id="5" name="Rectangle 4"/>
+          <p:cNvSpPr/>
+          <p:nvPr/>
+        </p:nvSpPr>
+        <p:spPr>
+          <a:xfrm>
+            <a:off x="7269480" y="3977639"/>
+            <a:ext cx="1371600" cy="64008"/>
+          </a:xfrm>
+          <a:prstGeom prst="rect">
+            <a:avLst/>
+          </a:prstGeom>
+          <a:solidFill>
+            <a:srgbClr val="EF7D1A"/>
+          </a:solidFill>
+          <a:ln>
+            <a:noFill/>
+          </a:ln>
+          <a:effectLst/>
+        </p:spPr>
+        <p:style>
+          <a:lnRef idx="1">
+            <a:schemeClr val="accent1"/>
+          </a:lnRef>
+          <a:fillRef idx="3">
+            <a:schemeClr val="accent1"/>
+          </a:fillRef>
+          <a:effectRef idx="2">
+            <a:schemeClr val="accent1"/>
+          </a:effectRef>
+          <a:fontRef idx="minor">
+            <a:schemeClr val="lt1"/>
+          </a:fontRef>
+        </p:style>
+        <p:txBody>
+          <a:bodyPr rtlCol="0" anchor="ctr"/>
+          <a:lstStyle/>
+          <a:p>
+            <a:pPr algn="ctr"/>
+          </a:p>
+        </p:txBody>
+      </p:sp>
+      <p:sp>
+        <p:nvSpPr>
+          <p:cNvPr id="6" name="TextBox 5"/>
+          <p:cNvSpPr txBox="1"/>
+          <p:nvPr/>
+        </p:nvSpPr>
+        <p:spPr>
+          <a:xfrm>
+            <a:off x="777240" y="5120640"/>
+            <a:ext cx="10607040" cy="1097280"/>
+          </a:xfrm>
+          <a:prstGeom prst="rect">
+            <a:avLst/>
+          </a:prstGeom>
+          <a:noFill/>
+        </p:spPr>
+        <p:txBody>
+          <a:bodyPr wrap="square">
+            <a:spAutoFit/>
+          </a:bodyPr>
+          <a:lstStyle/>
+          <a:p>
+            <a:pPr>
+              <a:spcAft>
+                <a:spcPts val="500"/>
+              </a:spcAft>
+            </a:pPr>
+            <a:r>
+              <a:rPr sz="1900" b="1" i="0">
+                <a:solidFill>
+                  <a:srgbClr val="2A1E33"/>
+                </a:solidFill>
+                <a:latin typeface="Noto Sans"/>
+              </a:rPr>
+              <a:t>BAGHIZ ASSHIDDIQIE ARASYA</a:t>
+            </a:r>
+          </a:p>
+          <a:p>
+            <a:pPr>
+              <a:spcAft>
+                <a:spcPts val="0"/>
+              </a:spcAft>
+            </a:pPr>
+            <a:r>
+              <a:rPr sz="1500" b="0" i="0">
+                <a:solidFill>
+                  <a:srgbClr val="6B5B74"/>
+                </a:solidFill>
+                <a:latin typeface="Noto Sans"/>
+              </a:rPr>
+              <a:t>Analisis Data Kesehatan Masyarakat  •  SQL + Python  •  Oktober 2026</a:t>
+            </a:r>
+          </a:p>
+        </p:txBody>
+      </p:sp>
+      <p:sp>
+        <p:nvSpPr>
+          <p:cNvPr id="7" name="TextBox 6"/>
+          <p:cNvSpPr txBox="1"/>
+          <p:nvPr/>
+        </p:nvSpPr>
+        <p:spPr>
+          <a:xfrm>
+            <a:off x="777240" y="6263640"/>
+            <a:ext cx="10607040" cy="365760"/>
+          </a:xfrm>
+          <a:prstGeom prst="rect">
+            <a:avLst/>
+          </a:prstGeom>
+          <a:noFill/>
+        </p:spPr>
+        <p:txBody>
+          <a:bodyPr wrap="square">
+            <a:spAutoFit/>
+          </a:bodyPr>
+          <a:lstStyle/>
+          <a:p>
+            <a:pPr>
+              <a:spcAft>
+                <a:spcPts val="0"/>
               </a:spcAft>
             </a:pPr>
             <a:r>
               <a:rPr sz="1200" b="0" i="1">
                 <a:solidFill>
-                  <a:srgbClr val="BFDBFE"/>
-                </a:solidFill>
-              </a:rPr>
-              <a:t>Data kompilasi dari angka resmi Kemenkes / SKDR / ISPU — setiap angka bersumber.</a:t>
+                  <a:srgbClr val="6B5B74"/>
+                </a:solidFill>
+                <a:latin typeface="Noto Sans"/>
+              </a:rPr>
+              <a:t>Data kompilasi dari angka resmi Kemenkes / SKDR / ISPU - setiap angka bersumber.</a:t>
             </a:r>
           </a:p>
         </p:txBody>
@@ -3329,7 +3433,7 @@
     <p:bg>
       <p:bgPr>
         <a:solidFill>
-          <a:srgbClr val="1E3A8A"/>
+          <a:srgbClr val="5E2A72"/>
         </a:solidFill>
         <a:effectLst/>
       </p:bgPr>
@@ -3343,14 +3447,58 @@
       <p:grpSpPr/>
       <p:sp>
         <p:nvSpPr>
-          <p:cNvPr id="2" name="TextBox 1"/>
+          <p:cNvPr id="2" name="Rectangle 1"/>
+          <p:cNvSpPr/>
+          <p:nvPr/>
+        </p:nvSpPr>
+        <p:spPr>
+          <a:xfrm>
+            <a:off x="777240" y="914400"/>
+            <a:ext cx="1371600" cy="64008"/>
+          </a:xfrm>
+          <a:prstGeom prst="rect">
+            <a:avLst/>
+          </a:prstGeom>
+          <a:solidFill>
+            <a:srgbClr val="EF7D1A"/>
+          </a:solidFill>
+          <a:ln>
+            <a:noFill/>
+          </a:ln>
+          <a:effectLst/>
+        </p:spPr>
+        <p:style>
+          <a:lnRef idx="1">
+            <a:schemeClr val="accent1"/>
+          </a:lnRef>
+          <a:fillRef idx="3">
+            <a:schemeClr val="accent1"/>
+          </a:fillRef>
+          <a:effectRef idx="2">
+            <a:schemeClr val="accent1"/>
+          </a:effectRef>
+          <a:fontRef idx="minor">
+            <a:schemeClr val="lt1"/>
+          </a:fontRef>
+        </p:style>
+        <p:txBody>
+          <a:bodyPr rtlCol="0" anchor="ctr"/>
+          <a:lstStyle/>
+          <a:p>
+            <a:pPr algn="ctr"/>
+          </a:p>
+        </p:txBody>
+      </p:sp>
+      <p:sp>
+        <p:nvSpPr>
+          <p:cNvPr id="3" name="TextBox 2"/>
           <p:cNvSpPr txBox="1"/>
           <p:nvPr/>
         </p:nvSpPr>
         <p:spPr>
           <a:xfrm>
-            <a:off x="822960" y="1097280"/>
-            <a:ext cx="10515600" cy="1097280"/>
+            <a:off x="777240" y="1234440"/>
+            <a:ext cx="10607040" cy="731520"/>
           </a:xfrm>
           <a:prstGeom prst="rect">
             <a:avLst/>
@@ -3365,14 +3513,15 @@
           <a:p>
             <a:pPr>
               <a:spcAft>
-                <a:spcPts val="800"/>
-              </a:spcAft>
-            </a:pPr>
-            <a:r>
-              <a:rPr sz="4000" b="1" i="0">
-                <a:solidFill>
-                  <a:srgbClr val="FFFFFF"/>
-                </a:solidFill>
+                <a:spcPts val="0"/>
+              </a:spcAft>
+            </a:pPr>
+            <a:r>
+              <a:rPr sz="3600" b="1" i="0">
+                <a:solidFill>
+                  <a:srgbClr val="F8F2E4"/>
+                </a:solidFill>
+                <a:latin typeface="Noto Sans"/>
               </a:rPr>
               <a:t>Kesimpulan</a:t>
             </a:r>
@@ -3381,14 +3530,14 @@
       </p:sp>
       <p:sp>
         <p:nvSpPr>
-          <p:cNvPr id="3" name="TextBox 2"/>
+          <p:cNvPr id="4" name="TextBox 3"/>
           <p:cNvSpPr txBox="1"/>
           <p:nvPr/>
         </p:nvSpPr>
         <p:spPr>
           <a:xfrm>
-            <a:off x="822960" y="2377440"/>
-            <a:ext cx="10515600" cy="2011680"/>
+            <a:off x="777240" y="2148840"/>
+            <a:ext cx="10424160" cy="1737360"/>
           </a:xfrm>
           <a:prstGeom prst="rect">
             <a:avLst/>
@@ -3402,45 +3551,57 @@
           <a:lstStyle/>
           <a:p>
             <a:pPr>
-              <a:spcAft>
-                <a:spcPts val="800"/>
-              </a:spcAft>
-            </a:pPr>
-            <a:r>
-              <a:rPr sz="2200" b="0" i="0">
-                <a:solidFill>
-                  <a:srgbClr val="FFFFFF"/>
-                </a:solidFill>
+              <a:lnSpc>
+                <a:spcPct val="125000"/>
+              </a:lnSpc>
+              <a:spcAft>
+                <a:spcPts val="400"/>
+              </a:spcAft>
+            </a:pPr>
+            <a:r>
+              <a:rPr sz="2100" b="0" i="0">
+                <a:solidFill>
+                  <a:srgbClr val="F8F2E4"/>
+                </a:solidFill>
+                <a:latin typeface="Noto Sans"/>
               </a:rPr>
               <a:t>ISPA 2026 bukan sekadar musim batuk-pilek: 14,1 juta laporan nasional,</a:t>
             </a:r>
           </a:p>
           <a:p>
             <a:pPr>
-              <a:spcAft>
-                <a:spcPts val="800"/>
-              </a:spcAft>
-            </a:pPr>
-            <a:r>
-              <a:rPr sz="2200" b="0" i="0">
-                <a:solidFill>
-                  <a:srgbClr val="FFFFFF"/>
-                </a:solidFill>
+              <a:lnSpc>
+                <a:spcPct val="125000"/>
+              </a:lnSpc>
+              <a:spcAft>
+                <a:spcPts val="400"/>
+              </a:spcAft>
+            </a:pPr>
+            <a:r>
+              <a:rPr sz="2100" b="0" i="0">
+                <a:solidFill>
+                  <a:srgbClr val="F8F2E4"/>
+                </a:solidFill>
+                <a:latin typeface="Noto Sans"/>
               </a:rPr>
               <a:t>283 ribu kasus di wilayah karhutla, dan udara 6 kali ambang berbahaya.</a:t>
             </a:r>
           </a:p>
           <a:p>
             <a:pPr>
-              <a:spcAft>
-                <a:spcPts val="800"/>
-              </a:spcAft>
-            </a:pPr>
-            <a:r>
-              <a:rPr sz="2200" b="0" i="0">
-                <a:solidFill>
-                  <a:srgbClr val="FFFFFF"/>
-                </a:solidFill>
+              <a:lnSpc>
+                <a:spcPct val="125000"/>
+              </a:lnSpc>
+              <a:spcAft>
+                <a:spcPts val="0"/>
+              </a:spcAft>
+            </a:pPr>
+            <a:r>
+              <a:rPr sz="2100" b="0" i="0">
+                <a:solidFill>
+                  <a:srgbClr val="F8F2E4"/>
+                </a:solidFill>
+                <a:latin typeface="Noto Sans"/>
               </a:rPr>
               <a:t>Data yang transparan adalah langkah pertama penanganan yang tepat.</a:t>
             </a:r>
@@ -3449,14 +3610,14 @@
       </p:sp>
       <p:sp>
         <p:nvSpPr>
-          <p:cNvPr id="4" name="TextBox 3"/>
+          <p:cNvPr id="5" name="TextBox 4"/>
           <p:cNvSpPr txBox="1"/>
           <p:nvPr/>
         </p:nvSpPr>
         <p:spPr>
           <a:xfrm>
-            <a:off x="822960" y="4846320"/>
-            <a:ext cx="10515600" cy="914400"/>
+            <a:off x="777240" y="4343400"/>
+            <a:ext cx="10607040" cy="1371600"/>
           </a:xfrm>
           <a:prstGeom prst="rect">
             <a:avLst/>
@@ -3471,14 +3632,15 @@
           <a:p>
             <a:pPr>
               <a:spcAft>
-                <a:spcPts val="800"/>
-              </a:spcAft>
-            </a:pPr>
-            <a:r>
-              <a:rPr sz="1800" b="1" i="0">
-                <a:solidFill>
-                  <a:srgbClr val="FFFFFF"/>
-                </a:solidFill>
+                <a:spcPts val="600"/>
+              </a:spcAft>
+            </a:pPr>
+            <a:r>
+              <a:rPr sz="2800" b="1" i="0">
+                <a:solidFill>
+                  <a:srgbClr val="F8F2E4"/>
+                </a:solidFill>
+                <a:latin typeface="Noto Sans"/>
               </a:rPr>
               <a:t>BAGHIZ ASSHIDDIQIE ARASYA</a:t>
             </a:r>
@@ -3486,30 +3648,31 @@
           <a:p>
             <a:pPr>
               <a:spcAft>
-                <a:spcPts val="800"/>
-              </a:spcAft>
-            </a:pPr>
-            <a:r>
-              <a:rPr sz="1400" b="0" i="0">
-                <a:solidFill>
-                  <a:srgbClr val="BFDBFE"/>
-                </a:solidFill>
-              </a:rPr>
-              <a:t>Sumber lengkap: data/SOURCES.md  •  Repo: ispa-indonesia-2026-analysis</a:t>
-            </a:r>
-          </a:p>
-        </p:txBody>
-      </p:sp>
-      <p:sp>
-        <p:nvSpPr>
-          <p:cNvPr id="5" name="TextBox 4"/>
+                <a:spcPts val="0"/>
+              </a:spcAft>
+            </a:pPr>
+            <a:r>
+              <a:rPr sz="1600" b="0" i="0">
+                <a:solidFill>
+                  <a:srgbClr val="F8F2E4"/>
+                </a:solidFill>
+                <a:latin typeface="Noto Sans"/>
+              </a:rPr>
+              <a:t>github.com/baghizash/ispa-indonesia-2026-analysis</a:t>
+            </a:r>
+          </a:p>
+        </p:txBody>
+      </p:sp>
+      <p:sp>
+        <p:nvSpPr>
+          <p:cNvPr id="6" name="TextBox 5"/>
           <p:cNvSpPr txBox="1"/>
           <p:nvPr/>
         </p:nvSpPr>
         <p:spPr>
           <a:xfrm>
-            <a:off x="822960" y="6035040"/>
-            <a:ext cx="10515600" cy="457200"/>
+            <a:off x="777240" y="5806440"/>
+            <a:ext cx="10607040" cy="731520"/>
           </a:xfrm>
           <a:prstGeom prst="rect">
             <a:avLst/>
@@ -3524,16 +3687,33 @@
           <a:p>
             <a:pPr>
               <a:spcAft>
-                <a:spcPts val="800"/>
+                <a:spcPts val="300"/>
+              </a:spcAft>
+            </a:pPr>
+            <a:r>
+              <a:rPr sz="1400" b="0" i="0">
+                <a:solidFill>
+                  <a:srgbClr val="DDD0EC"/>
+                </a:solidFill>
+                <a:latin typeface="Noto Sans"/>
+              </a:rPr>
+              <a:t>Buka repo-nya untuk melihat analisis lengkap, query SQL, dan sumber data per angka.</a:t>
+            </a:r>
+          </a:p>
+          <a:p>
+            <a:pPr>
+              <a:spcAft>
+                <a:spcPts val="0"/>
               </a:spcAft>
             </a:pPr>
             <a:r>
               <a:rPr sz="1200" b="0" i="1">
                 <a:solidFill>
-                  <a:srgbClr val="BFDBFE"/>
-                </a:solidFill>
-              </a:rPr>
-              <a:t>Dataset kompilasi dari angka resmi yang dipublikasikan — lihat README untuk batasan dan caveat.</a:t>
+                  <a:srgbClr val="DDD0EC"/>
+                </a:solidFill>
+                <a:latin typeface="Noto Sans"/>
+              </a:rPr>
+              <a:t>Dataset kompilasi dari angka resmi yang dipublikasikan - lihat README untuk batasan dan caveat.</a:t>
             </a:r>
           </a:p>
         </p:txBody>
@@ -3552,7 +3732,7 @@
     <p:bg>
       <p:bgPr>
         <a:solidFill>
-          <a:srgbClr val="FFFFFF"/>
+          <a:srgbClr val="F0E8D8"/>
         </a:solidFill>
         <a:effectLst/>
       </p:bgPr>
@@ -3566,62 +3746,25 @@
       <p:grpSpPr/>
       <p:sp>
         <p:nvSpPr>
-          <p:cNvPr id="2" name="TextBox 1"/>
-          <p:cNvSpPr txBox="1"/>
-          <p:nvPr/>
-        </p:nvSpPr>
-        <p:spPr>
-          <a:xfrm>
-            <a:off x="640080" y="274320"/>
-            <a:ext cx="10881360" cy="822960"/>
-          </a:xfrm>
-          <a:prstGeom prst="rect">
-            <a:avLst/>
-          </a:prstGeom>
-          <a:noFill/>
-        </p:spPr>
-        <p:txBody>
-          <a:bodyPr wrap="square">
-            <a:spAutoFit/>
-          </a:bodyPr>
-          <a:lstStyle/>
-          <a:p>
-            <a:pPr>
-              <a:spcAft>
-                <a:spcPts val="800"/>
-              </a:spcAft>
-            </a:pPr>
-            <a:r>
-              <a:rPr sz="3000" b="1" i="0">
-                <a:solidFill>
-                  <a:srgbClr val="1E3A8A"/>
-                </a:solidFill>
-              </a:rPr>
-              <a:t>Mengapa ISPA 2026 Mendesak?</a:t>
-            </a:r>
-          </a:p>
-        </p:txBody>
-      </p:sp>
-      <p:sp>
-        <p:nvSpPr>
-          <p:cNvPr id="3" name="Rectangle 2"/>
+          <p:cNvPr id="2" name="Rectangle 1"/>
           <p:cNvSpPr/>
           <p:nvPr/>
         </p:nvSpPr>
         <p:spPr>
           <a:xfrm>
-            <a:off x="640080" y="1051560"/>
-            <a:ext cx="1371600" cy="54864"/>
+            <a:off x="685800" y="566928"/>
+            <a:ext cx="146304" cy="146304"/>
           </a:xfrm>
           <a:prstGeom prst="rect">
             <a:avLst/>
           </a:prstGeom>
           <a:solidFill>
-            <a:srgbClr val="0D9488"/>
+            <a:srgbClr val="EF7D1A"/>
           </a:solidFill>
           <a:ln>
             <a:noFill/>
           </a:ln>
+          <a:effectLst/>
         </p:spPr>
         <p:style>
           <a:lnRef idx="1">
@@ -3647,14 +3790,14 @@
       </p:sp>
       <p:sp>
         <p:nvSpPr>
-          <p:cNvPr id="4" name="TextBox 3"/>
+          <p:cNvPr id="3" name="TextBox 2"/>
           <p:cNvSpPr txBox="1"/>
           <p:nvPr/>
         </p:nvSpPr>
         <p:spPr>
           <a:xfrm>
-            <a:off x="640080" y="1371600"/>
-            <a:ext cx="5120640" cy="4754880"/>
+            <a:off x="1005840" y="347472"/>
+            <a:ext cx="10607040" cy="777240"/>
           </a:xfrm>
           <a:prstGeom prst="rect">
             <a:avLst/>
@@ -3667,7 +3810,49 @@
           </a:bodyPr>
           <a:lstStyle/>
           <a:p>
+            <a:pPr>
+              <a:spcAft>
+                <a:spcPts val="0"/>
+              </a:spcAft>
+            </a:pPr>
+            <a:r>
+              <a:rPr sz="3200" b="1" i="0">
+                <a:solidFill>
+                  <a:srgbClr val="2A1E33"/>
+                </a:solidFill>
+                <a:latin typeface="Noto Sans"/>
+              </a:rPr>
+              <a:t>Mengapa ISPA 2026 Mendesak?</a:t>
+            </a:r>
+          </a:p>
+        </p:txBody>
+      </p:sp>
+      <p:sp>
+        <p:nvSpPr>
+          <p:cNvPr id="4" name="TextBox 3"/>
+          <p:cNvSpPr txBox="1"/>
+          <p:nvPr/>
+        </p:nvSpPr>
+        <p:spPr>
+          <a:xfrm>
+            <a:off x="685800" y="1463040"/>
+            <a:ext cx="5166360" cy="4846320"/>
+          </a:xfrm>
+          <a:prstGeom prst="rect">
+            <a:avLst/>
+          </a:prstGeom>
+          <a:noFill/>
+        </p:spPr>
+        <p:txBody>
+          <a:bodyPr wrap="square">
+            <a:spAutoFit/>
+          </a:bodyPr>
+          <a:lstStyle/>
+          <a:p>
             <a:pPr marL="171450" indent="-171450">
+              <a:lnSpc>
+                <a:spcPct val="112000"/>
+              </a:lnSpc>
               <a:spcBef>
                 <a:spcPts val="200"/>
               </a:spcBef>
@@ -3677,16 +3862,20 @@
               <a:buChar char="•"/>
             </a:pPr>
             <a:r>
-              <a:rPr sz="1700" b="0" i="0">
-                <a:solidFill>
-                  <a:srgbClr val="1F2937"/>
-                </a:solidFill>
+              <a:rPr sz="1600" b="0" i="0">
+                <a:solidFill>
+                  <a:srgbClr val="2A1E33"/>
+                </a:solidFill>
+                <a:latin typeface="Noto Sans"/>
               </a:rPr>
               <a:t>ISPA adalah infeksi saluran pernapasan akut: batuk, pilek, sesak napas.</a:t>
             </a:r>
           </a:p>
           <a:p>
             <a:pPr marL="171450" indent="-171450">
+              <a:lnSpc>
+                <a:spcPct val="112000"/>
+              </a:lnSpc>
               <a:spcBef>
                 <a:spcPts val="200"/>
               </a:spcBef>
@@ -3696,16 +3885,20 @@
               <a:buChar char="•"/>
             </a:pPr>
             <a:r>
-              <a:rPr sz="1700" b="0" i="0">
-                <a:solidFill>
-                  <a:srgbClr val="1F2937"/>
-                </a:solidFill>
+              <a:rPr sz="1600" b="0" i="0">
+                <a:solidFill>
+                  <a:srgbClr val="2A1E33"/>
+                </a:solidFill>
+                <a:latin typeface="Noto Sans"/>
               </a:rPr>
               <a:t>Laporan nasional 2026 tembus 14.088.945 laporan (SKDR, s.d. minggu ke-38).</a:t>
             </a:r>
           </a:p>
           <a:p>
             <a:pPr marL="171450" indent="-171450">
+              <a:lnSpc>
+                <a:spcPct val="112000"/>
+              </a:lnSpc>
               <a:spcBef>
                 <a:spcPts val="200"/>
               </a:spcBef>
@@ -3715,16 +3908,20 @@
               <a:buChar char="•"/>
             </a:pPr>
             <a:r>
-              <a:rPr sz="1700" b="0" i="0">
-                <a:solidFill>
-                  <a:srgbClr val="1F2937"/>
-                </a:solidFill>
-              </a:rPr>
-              <a:t>Laporan mingguan di atas 400 ribu sejak minggu ke-27 — naik ke ~420 ribu pada puncak kemarau.</a:t>
+              <a:rPr sz="1600" b="0" i="0">
+                <a:solidFill>
+                  <a:srgbClr val="2A1E33"/>
+                </a:solidFill>
+                <a:latin typeface="Noto Sans"/>
+              </a:rPr>
+              <a:t>Laporan mingguan di atas 400 ribu sejak minggu ke-27 - naik ke ~420 ribu pada puncak kemarau.</a:t>
             </a:r>
           </a:p>
           <a:p>
             <a:pPr marL="171450" indent="-171450">
+              <a:lnSpc>
+                <a:spcPct val="112000"/>
+              </a:lnSpc>
               <a:spcBef>
                 <a:spcPts val="200"/>
               </a:spcBef>
@@ -3734,16 +3931,20 @@
               <a:buChar char="•"/>
             </a:pPr>
             <a:r>
-              <a:rPr sz="1700" b="0" i="0">
-                <a:solidFill>
-                  <a:srgbClr val="1F2937"/>
-                </a:solidFill>
+              <a:rPr sz="1600" b="0" i="0">
+                <a:solidFill>
+                  <a:srgbClr val="2A1E33"/>
+                </a:solidFill>
+                <a:latin typeface="Noto Sans"/>
               </a:rPr>
               <a:t>Bersamaan dengan karhutla dan kualitas udara yang memburuk di Sumatra dan Kalimantan.</a:t>
             </a:r>
           </a:p>
           <a:p>
             <a:pPr marL="171450" indent="-171450">
+              <a:lnSpc>
+                <a:spcPct val="112000"/>
+              </a:lnSpc>
               <a:spcBef>
                 <a:spcPts val="200"/>
               </a:spcBef>
@@ -3753,10 +3954,11 @@
               <a:buChar char="•"/>
             </a:pPr>
             <a:r>
-              <a:rPr sz="1700" b="0" i="0">
-                <a:solidFill>
-                  <a:srgbClr val="1F2937"/>
-                </a:solidFill>
+              <a:rPr sz="1600" b="0" i="0">
+                <a:solidFill>
+                  <a:srgbClr val="2A1E33"/>
+                </a:solidFill>
+                <a:latin typeface="Noto Sans"/>
               </a:rPr>
               <a:t>Pertanyaan: seberapa besar, di mana, siapa yang paling terdampak?</a:t>
             </a:r>
@@ -3779,8 +3981,8 @@
         </p:blipFill>
         <p:spPr>
           <a:xfrm>
-            <a:off x="6217920" y="1371600"/>
-            <a:ext cx="5303520" cy="3409406"/>
+            <a:off x="6126480" y="1600200"/>
+            <a:ext cx="5394960" cy="3465576"/>
           </a:xfrm>
           <a:prstGeom prst="rect">
             <a:avLst/>
@@ -3795,8 +3997,8 @@
         </p:nvSpPr>
         <p:spPr>
           <a:xfrm>
-            <a:off x="6217920" y="6035040"/>
-            <a:ext cx="5303520" cy="548640"/>
+            <a:off x="6126480" y="5230368"/>
+            <a:ext cx="5394960" cy="365760"/>
           </a:xfrm>
           <a:prstGeom prst="rect">
             <a:avLst/>
@@ -3811,14 +4013,15 @@
           <a:p>
             <a:pPr>
               <a:spcAft>
-                <a:spcPts val="800"/>
-              </a:spcAft>
-            </a:pPr>
-            <a:r>
-              <a:rPr sz="1100" b="0" i="1">
-                <a:solidFill>
-                  <a:srgbClr val="6B7280"/>
-                </a:solidFill>
+                <a:spcPts val="0"/>
+              </a:spcAft>
+            </a:pPr>
+            <a:r>
+              <a:rPr sz="1200" b="0" i="1">
+                <a:solidFill>
+                  <a:srgbClr val="6B5B74"/>
+                </a:solidFill>
+                <a:latin typeface="Noto Sans"/>
               </a:rPr>
               <a:t>Laporan mingguan nasional naik 5% ke puncak kemarau.</a:t>
             </a:r>
@@ -3839,7 +4042,7 @@
     <p:bg>
       <p:bgPr>
         <a:solidFill>
-          <a:srgbClr val="FFFFFF"/>
+          <a:srgbClr val="F0E8D8"/>
         </a:solidFill>
         <a:effectLst/>
       </p:bgPr>
@@ -3853,62 +4056,25 @@
       <p:grpSpPr/>
       <p:sp>
         <p:nvSpPr>
-          <p:cNvPr id="2" name="TextBox 1"/>
-          <p:cNvSpPr txBox="1"/>
-          <p:nvPr/>
-        </p:nvSpPr>
-        <p:spPr>
-          <a:xfrm>
-            <a:off x="640080" y="274320"/>
-            <a:ext cx="10881360" cy="822960"/>
-          </a:xfrm>
-          <a:prstGeom prst="rect">
-            <a:avLst/>
-          </a:prstGeom>
-          <a:noFill/>
-        </p:spPr>
-        <p:txBody>
-          <a:bodyPr wrap="square">
-            <a:spAutoFit/>
-          </a:bodyPr>
-          <a:lstStyle/>
-          <a:p>
-            <a:pPr>
-              <a:spcAft>
-                <a:spcPts val="800"/>
-              </a:spcAft>
-            </a:pPr>
-            <a:r>
-              <a:rPr sz="3000" b="1" i="0">
-                <a:solidFill>
-                  <a:srgbClr val="1E3A8A"/>
-                </a:solidFill>
-              </a:rPr>
-              <a:t>Data &amp; Metode</a:t>
-            </a:r>
-          </a:p>
-        </p:txBody>
-      </p:sp>
-      <p:sp>
-        <p:nvSpPr>
-          <p:cNvPr id="3" name="Rectangle 2"/>
+          <p:cNvPr id="2" name="Rectangle 1"/>
           <p:cNvSpPr/>
           <p:nvPr/>
         </p:nvSpPr>
         <p:spPr>
           <a:xfrm>
-            <a:off x="640080" y="1051560"/>
-            <a:ext cx="1371600" cy="54864"/>
+            <a:off x="685800" y="566928"/>
+            <a:ext cx="146304" cy="146304"/>
           </a:xfrm>
           <a:prstGeom prst="rect">
             <a:avLst/>
           </a:prstGeom>
           <a:solidFill>
-            <a:srgbClr val="0D9488"/>
+            <a:srgbClr val="EF7D1A"/>
           </a:solidFill>
           <a:ln>
             <a:noFill/>
           </a:ln>
+          <a:effectLst/>
         </p:spPr>
         <p:style>
           <a:lnRef idx="1">
@@ -3934,14 +4100,14 @@
       </p:sp>
       <p:sp>
         <p:nvSpPr>
-          <p:cNvPr id="4" name="TextBox 3"/>
+          <p:cNvPr id="3" name="TextBox 2"/>
           <p:cNvSpPr txBox="1"/>
           <p:nvPr/>
         </p:nvSpPr>
         <p:spPr>
           <a:xfrm>
-            <a:off x="640080" y="1371600"/>
-            <a:ext cx="5120640" cy="4754880"/>
+            <a:off x="1005840" y="347472"/>
+            <a:ext cx="10607040" cy="777240"/>
           </a:xfrm>
           <a:prstGeom prst="rect">
             <a:avLst/>
@@ -3954,7 +4120,49 @@
           </a:bodyPr>
           <a:lstStyle/>
           <a:p>
+            <a:pPr>
+              <a:spcAft>
+                <a:spcPts val="0"/>
+              </a:spcAft>
+            </a:pPr>
+            <a:r>
+              <a:rPr sz="3200" b="1" i="0">
+                <a:solidFill>
+                  <a:srgbClr val="2A1E33"/>
+                </a:solidFill>
+                <a:latin typeface="Noto Sans"/>
+              </a:rPr>
+              <a:t>Data &amp; Metode</a:t>
+            </a:r>
+          </a:p>
+        </p:txBody>
+      </p:sp>
+      <p:sp>
+        <p:nvSpPr>
+          <p:cNvPr id="4" name="TextBox 3"/>
+          <p:cNvSpPr txBox="1"/>
+          <p:nvPr/>
+        </p:nvSpPr>
+        <p:spPr>
+          <a:xfrm>
+            <a:off x="6355080" y="1463040"/>
+            <a:ext cx="5166360" cy="4846320"/>
+          </a:xfrm>
+          <a:prstGeom prst="rect">
+            <a:avLst/>
+          </a:prstGeom>
+          <a:noFill/>
+        </p:spPr>
+        <p:txBody>
+          <a:bodyPr wrap="square">
+            <a:spAutoFit/>
+          </a:bodyPr>
+          <a:lstStyle/>
+          <a:p>
             <a:pPr marL="171450" indent="-171450">
+              <a:lnSpc>
+                <a:spcPct val="112000"/>
+              </a:lnSpc>
               <a:spcBef>
                 <a:spcPts val="200"/>
               </a:spcBef>
@@ -3964,16 +4172,20 @@
               <a:buChar char="•"/>
             </a:pPr>
             <a:r>
-              <a:rPr sz="1700" b="0" i="0">
-                <a:solidFill>
-                  <a:srgbClr val="1F2937"/>
-                </a:solidFill>
+              <a:rPr sz="1600" b="0" i="0">
+                <a:solidFill>
+                  <a:srgbClr val="2A1E33"/>
+                </a:solidFill>
+                <a:latin typeface="Noto Sans"/>
               </a:rPr>
               <a:t>Dataset KOMPILASI dari angka resmi yang dipublikasikan (Kemenkes, SKDR, ISPU, Dinkes DKI, BPS).</a:t>
             </a:r>
           </a:p>
           <a:p>
             <a:pPr marL="171450" indent="-171450">
+              <a:lnSpc>
+                <a:spcPct val="112000"/>
+              </a:lnSpc>
               <a:spcBef>
                 <a:spcPts val="200"/>
               </a:spcBef>
@@ -3983,16 +4195,20 @@
               <a:buChar char="•"/>
             </a:pPr>
             <a:r>
-              <a:rPr sz="1700" b="0" i="0">
-                <a:solidFill>
-                  <a:srgbClr val="1F2937"/>
-                </a:solidFill>
-              </a:rPr>
-              <a:t>Tidak ada file CSV mentah ISPA di data.go.id / Jakarta Open Data — setiap angka dicatat sumber + tanggalnya.</a:t>
+              <a:rPr sz="1600" b="0" i="0">
+                <a:solidFill>
+                  <a:srgbClr val="2A1E33"/>
+                </a:solidFill>
+                <a:latin typeface="Noto Sans"/>
+              </a:rPr>
+              <a:t>Tidak ada file CSV mentah ISPA di data.go.id / Jakarta Open Data - setiap angka dicatat sumber + tanggalnya.</a:t>
             </a:r>
           </a:p>
           <a:p>
             <a:pPr marL="171450" indent="-171450">
+              <a:lnSpc>
+                <a:spcPct val="112000"/>
+              </a:lnSpc>
               <a:spcBef>
                 <a:spcPts val="200"/>
               </a:spcBef>
@@ -4002,16 +4218,20 @@
               <a:buChar char="•"/>
             </a:pPr>
             <a:r>
-              <a:rPr sz="1700" b="0" i="0">
-                <a:solidFill>
-                  <a:srgbClr val="1F2937"/>
-                </a:solidFill>
+              <a:rPr sz="1600" b="0" i="0">
+                <a:solidFill>
+                  <a:srgbClr val="2A1E33"/>
+                </a:solidFill>
+                <a:latin typeface="Noto Sans"/>
               </a:rPr>
               <a:t>Dua seri dipisah ketat: seri nasional SKDR vs seri pemantauan karhutla (cakupan dan tanggal berbeda).</a:t>
             </a:r>
           </a:p>
           <a:p>
             <a:pPr marL="171450" indent="-171450">
+              <a:lnSpc>
+                <a:spcPct val="112000"/>
+              </a:lnSpc>
               <a:spcBef>
                 <a:spcPts val="200"/>
               </a:spcBef>
@@ -4021,16 +4241,20 @@
               <a:buChar char="•"/>
             </a:pPr>
             <a:r>
-              <a:rPr sz="1700" b="0" i="0">
-                <a:solidFill>
-                  <a:srgbClr val="1F2937"/>
-                </a:solidFill>
+              <a:rPr sz="1600" b="0" i="0">
+                <a:solidFill>
+                  <a:srgbClr val="2A1E33"/>
+                </a:solidFill>
+                <a:latin typeface="Noto Sans"/>
               </a:rPr>
               <a:t>Pipeline: kompilasi CSV → SQLite → query SQL → chart Python → interpretasi.</a:t>
             </a:r>
           </a:p>
           <a:p>
             <a:pPr marL="171450" indent="-171450">
+              <a:lnSpc>
+                <a:spcPct val="112000"/>
+              </a:lnSpc>
               <a:spcBef>
                 <a:spcPts val="200"/>
               </a:spcBef>
@@ -4040,10 +4264,11 @@
               <a:buChar char="•"/>
             </a:pPr>
             <a:r>
-              <a:rPr sz="1700" b="0" i="0">
-                <a:solidFill>
-                  <a:srgbClr val="1F2937"/>
-                </a:solidFill>
+              <a:rPr sz="1600" b="0" i="0">
+                <a:solidFill>
+                  <a:srgbClr val="2A1E33"/>
+                </a:solidFill>
+                <a:latin typeface="Noto Sans"/>
               </a:rPr>
               <a:t>Perbandingan antarprovinsi dinormalisasi per 1.000 penduduk (BPS 2026).</a:t>
             </a:r>
@@ -4066,8 +4291,8 @@
         </p:blipFill>
         <p:spPr>
           <a:xfrm>
-            <a:off x="6217920" y="1371600"/>
-            <a:ext cx="5303520" cy="3788229"/>
+            <a:off x="685800" y="1600200"/>
+            <a:ext cx="4846320" cy="3465576"/>
           </a:xfrm>
           <a:prstGeom prst="rect">
             <a:avLst/>
@@ -4082,8 +4307,8 @@
         </p:nvSpPr>
         <p:spPr>
           <a:xfrm>
-            <a:off x="6217920" y="6035040"/>
-            <a:ext cx="5303520" cy="548640"/>
+            <a:off x="685800" y="5230368"/>
+            <a:ext cx="4846320" cy="365760"/>
           </a:xfrm>
           <a:prstGeom prst="rect">
             <a:avLst/>
@@ -4098,14 +4323,15 @@
           <a:p>
             <a:pPr>
               <a:spcAft>
-                <a:spcPts val="800"/>
-              </a:spcAft>
-            </a:pPr>
-            <a:r>
-              <a:rPr sz="1100" b="0" i="1">
-                <a:solidFill>
-                  <a:srgbClr val="6B7280"/>
-                </a:solidFill>
+                <a:spcPts val="0"/>
+              </a:spcAft>
+            </a:pPr>
+            <a:r>
+              <a:rPr sz="1200" b="0" i="1">
+                <a:solidFill>
+                  <a:srgbClr val="6B5B74"/>
+                </a:solidFill>
+                <a:latin typeface="Noto Sans"/>
               </a:rPr>
               <a:t>10 provinsi teratas = 74,7% laporan nasional.</a:t>
             </a:r>
@@ -4126,7 +4352,7 @@
     <p:bg>
       <p:bgPr>
         <a:solidFill>
-          <a:srgbClr val="FFFFFF"/>
+          <a:srgbClr val="F0E8D8"/>
         </a:solidFill>
         <a:effectLst/>
       </p:bgPr>
@@ -4140,62 +4366,25 @@
       <p:grpSpPr/>
       <p:sp>
         <p:nvSpPr>
-          <p:cNvPr id="2" name="TextBox 1"/>
-          <p:cNvSpPr txBox="1"/>
-          <p:nvPr/>
-        </p:nvSpPr>
-        <p:spPr>
-          <a:xfrm>
-            <a:off x="640080" y="274320"/>
-            <a:ext cx="10881360" cy="822960"/>
-          </a:xfrm>
-          <a:prstGeom prst="rect">
-            <a:avLst/>
-          </a:prstGeom>
-          <a:noFill/>
-        </p:spPr>
-        <p:txBody>
-          <a:bodyPr wrap="square">
-            <a:spAutoFit/>
-          </a:bodyPr>
-          <a:lstStyle/>
-          <a:p>
-            <a:pPr>
-              <a:spcAft>
-                <a:spcPts val="800"/>
-              </a:spcAft>
-            </a:pPr>
-            <a:r>
-              <a:rPr sz="3000" b="1" i="0">
-                <a:solidFill>
-                  <a:srgbClr val="1E3A8A"/>
-                </a:solidFill>
-              </a:rPr>
-              <a:t>Temuan 1: Kasus Sangat Terkonsentrasi</a:t>
-            </a:r>
-          </a:p>
-        </p:txBody>
-      </p:sp>
-      <p:sp>
-        <p:nvSpPr>
-          <p:cNvPr id="3" name="Rectangle 2"/>
+          <p:cNvPr id="2" name="Rectangle 1"/>
           <p:cNvSpPr/>
           <p:nvPr/>
         </p:nvSpPr>
         <p:spPr>
           <a:xfrm>
-            <a:off x="640080" y="1051560"/>
-            <a:ext cx="1371600" cy="54864"/>
+            <a:off x="685800" y="566928"/>
+            <a:ext cx="146304" cy="146304"/>
           </a:xfrm>
           <a:prstGeom prst="rect">
             <a:avLst/>
           </a:prstGeom>
           <a:solidFill>
-            <a:srgbClr val="0D9488"/>
+            <a:srgbClr val="EF7D1A"/>
           </a:solidFill>
           <a:ln>
             <a:noFill/>
           </a:ln>
+          <a:effectLst/>
         </p:spPr>
         <p:style>
           <a:lnRef idx="1">
@@ -4221,14 +4410,14 @@
       </p:sp>
       <p:sp>
         <p:nvSpPr>
-          <p:cNvPr id="4" name="TextBox 3"/>
+          <p:cNvPr id="3" name="TextBox 2"/>
           <p:cNvSpPr txBox="1"/>
           <p:nvPr/>
         </p:nvSpPr>
         <p:spPr>
           <a:xfrm>
-            <a:off x="640080" y="1371600"/>
-            <a:ext cx="5120640" cy="4754880"/>
+            <a:off x="1005840" y="347472"/>
+            <a:ext cx="10607040" cy="777240"/>
           </a:xfrm>
           <a:prstGeom prst="rect">
             <a:avLst/>
@@ -4241,7 +4430,49 @@
           </a:bodyPr>
           <a:lstStyle/>
           <a:p>
+            <a:pPr>
+              <a:spcAft>
+                <a:spcPts val="0"/>
+              </a:spcAft>
+            </a:pPr>
+            <a:r>
+              <a:rPr sz="3200" b="1" i="0">
+                <a:solidFill>
+                  <a:srgbClr val="2A1E33"/>
+                </a:solidFill>
+                <a:latin typeface="Noto Sans"/>
+              </a:rPr>
+              <a:t>Temuan 1: Kasus Sangat Terkonsentrasi</a:t>
+            </a:r>
+          </a:p>
+        </p:txBody>
+      </p:sp>
+      <p:sp>
+        <p:nvSpPr>
+          <p:cNvPr id="4" name="TextBox 3"/>
+          <p:cNvSpPr txBox="1"/>
+          <p:nvPr/>
+        </p:nvSpPr>
+        <p:spPr>
+          <a:xfrm>
+            <a:off x="685800" y="1371600"/>
+            <a:ext cx="5394960" cy="1691640"/>
+          </a:xfrm>
+          <a:prstGeom prst="rect">
+            <a:avLst/>
+          </a:prstGeom>
+          <a:noFill/>
+        </p:spPr>
+        <p:txBody>
+          <a:bodyPr wrap="square">
+            <a:spAutoFit/>
+          </a:bodyPr>
+          <a:lstStyle/>
+          <a:p>
             <a:pPr marL="171450" indent="-171450">
+              <a:lnSpc>
+                <a:spcPct val="112000"/>
+              </a:lnSpc>
               <a:spcBef>
                 <a:spcPts val="200"/>
               </a:spcBef>
@@ -4251,16 +4482,20 @@
               <a:buChar char="•"/>
             </a:pPr>
             <a:r>
-              <a:rPr sz="1700" b="0" i="0">
-                <a:solidFill>
-                  <a:srgbClr val="1F2937"/>
-                </a:solidFill>
+              <a:rPr sz="1500" b="0" i="0">
+                <a:solidFill>
+                  <a:srgbClr val="2A1E33"/>
+                </a:solidFill>
+                <a:latin typeface="Noto Sans"/>
               </a:rPr>
               <a:t>10 provinsi teratas mencatat 10.530.385 laporan = 74,7% total nasional.</a:t>
             </a:r>
           </a:p>
           <a:p>
             <a:pPr marL="171450" indent="-171450">
+              <a:lnSpc>
+                <a:spcPct val="112000"/>
+              </a:lnSpc>
               <a:spcBef>
                 <a:spcPts val="200"/>
               </a:spcBef>
@@ -4270,16 +4505,20 @@
               <a:buChar char="•"/>
             </a:pPr>
             <a:r>
-              <a:rPr sz="1700" b="0" i="0">
-                <a:solidFill>
-                  <a:srgbClr val="1F2937"/>
-                </a:solidFill>
+              <a:rPr sz="1500" b="0" i="0">
+                <a:solidFill>
+                  <a:srgbClr val="2A1E33"/>
+                </a:solidFill>
+                <a:latin typeface="Noto Sans"/>
               </a:rPr>
               <a:t>4 provinsi teratas saja (Jabar, Jateng, Jakarta, Jatim) = 55,8% nasional.</a:t>
             </a:r>
           </a:p>
           <a:p>
             <a:pPr marL="171450" indent="-171450">
+              <a:lnSpc>
+                <a:spcPct val="112000"/>
+              </a:lnSpc>
               <a:spcBef>
                 <a:spcPts val="200"/>
               </a:spcBef>
@@ -4289,16 +4528,43 @@
               <a:buChar char="•"/>
             </a:pPr>
             <a:r>
-              <a:rPr sz="1700" b="0" i="0">
-                <a:solidFill>
-                  <a:srgbClr val="1F2937"/>
-                </a:solidFill>
+              <a:rPr sz="1500" b="0" i="0">
+                <a:solidFill>
+                  <a:srgbClr val="2A1E33"/>
+                </a:solidFill>
+                <a:latin typeface="Noto Sans"/>
               </a:rPr>
               <a:t>Jawa Barat tertinggi: 2.533.888 laporan (17,98% nasional).</a:t>
             </a:r>
           </a:p>
+        </p:txBody>
+      </p:sp>
+      <p:sp>
+        <p:nvSpPr>
+          <p:cNvPr id="5" name="TextBox 4"/>
+          <p:cNvSpPr txBox="1"/>
+          <p:nvPr/>
+        </p:nvSpPr>
+        <p:spPr>
+          <a:xfrm>
+            <a:off x="6355080" y="1371600"/>
+            <a:ext cx="5166360" cy="1691640"/>
+          </a:xfrm>
+          <a:prstGeom prst="rect">
+            <a:avLst/>
+          </a:prstGeom>
+          <a:noFill/>
+        </p:spPr>
+        <p:txBody>
+          <a:bodyPr wrap="square">
+            <a:spAutoFit/>
+          </a:bodyPr>
+          <a:lstStyle/>
           <a:p>
             <a:pPr marL="171450" indent="-171450">
+              <a:lnSpc>
+                <a:spcPct val="112000"/>
+              </a:lnSpc>
               <a:spcBef>
                 <a:spcPts val="200"/>
               </a:spcBef>
@@ -4308,16 +4574,20 @@
               <a:buChar char="•"/>
             </a:pPr>
             <a:r>
-              <a:rPr sz="1700" b="0" i="0">
-                <a:solidFill>
-                  <a:srgbClr val="1F2937"/>
-                </a:solidFill>
+              <a:rPr sz="1500" b="0" i="0">
+                <a:solidFill>
+                  <a:srgbClr val="2A1E33"/>
+                </a:solidFill>
+                <a:latin typeface="Noto Sans"/>
               </a:rPr>
               <a:t>86,3% laporan top-10 berasal dari Pulau Jawa.</a:t>
             </a:r>
           </a:p>
           <a:p>
             <a:pPr marL="171450" indent="-171450">
+              <a:lnSpc>
+                <a:spcPct val="112000"/>
+              </a:lnSpc>
               <a:spcBef>
                 <a:spcPts val="200"/>
               </a:spcBef>
@@ -4327,10 +4597,11 @@
               <a:buChar char="•"/>
             </a:pPr>
             <a:r>
-              <a:rPr sz="1700" b="0" i="0">
-                <a:solidFill>
-                  <a:srgbClr val="1F2937"/>
-                </a:solidFill>
+              <a:rPr sz="1500" b="0" i="0">
+                <a:solidFill>
+                  <a:srgbClr val="2A1E33"/>
+                </a:solidFill>
+                <a:latin typeface="Noto Sans"/>
               </a:rPr>
               <a:t>Peringatan: dominasi Jawa ikut dipengaruhi jumlah penduduk dan kelengkapan pelaporan.</a:t>
             </a:r>
@@ -4339,7 +4610,7 @@
       </p:sp>
       <p:pic>
         <p:nvPicPr>
-          <p:cNvPr id="5" name="Picture 4" descr="01_top10_absolut.png"/>
+          <p:cNvPr id="6" name="Picture 5" descr="01_top10_absolut.png"/>
           <p:cNvPicPr>
             <a:picLocks noChangeAspect="1"/>
           </p:cNvPicPr>
@@ -4353,8 +4624,8 @@
         </p:blipFill>
         <p:spPr>
           <a:xfrm>
-            <a:off x="6217920" y="1371600"/>
-            <a:ext cx="5303520" cy="3241040"/>
+            <a:off x="685800" y="3063240"/>
+            <a:ext cx="6858000" cy="3520440"/>
           </a:xfrm>
           <a:prstGeom prst="rect">
             <a:avLst/>
@@ -4363,14 +4634,14 @@
       </p:pic>
       <p:sp>
         <p:nvSpPr>
-          <p:cNvPr id="6" name="TextBox 5"/>
+          <p:cNvPr id="7" name="TextBox 6"/>
           <p:cNvSpPr txBox="1"/>
           <p:nvPr/>
         </p:nvSpPr>
         <p:spPr>
           <a:xfrm>
-            <a:off x="6217920" y="6035040"/>
-            <a:ext cx="5303520" cy="548640"/>
+            <a:off x="7863840" y="3977639"/>
+            <a:ext cx="3657600" cy="1463040"/>
           </a:xfrm>
           <a:prstGeom prst="rect">
             <a:avLst/>
@@ -4385,14 +4656,73 @@
           <a:p>
             <a:pPr>
               <a:spcAft>
-                <a:spcPts val="800"/>
-              </a:spcAft>
-            </a:pPr>
-            <a:r>
-              <a:rPr sz="1100" b="0" i="1">
-                <a:solidFill>
-                  <a:srgbClr val="6B7280"/>
-                </a:solidFill>
+                <a:spcPts val="400"/>
+              </a:spcAft>
+            </a:pPr>
+            <a:r>
+              <a:rPr sz="4400" b="1" i="0">
+                <a:solidFill>
+                  <a:srgbClr val="5E2A72"/>
+                </a:solidFill>
+                <a:latin typeface="Noto Sans"/>
+              </a:rPr>
+              <a:t>74,7%</a:t>
+            </a:r>
+          </a:p>
+          <a:p>
+            <a:pPr>
+              <a:lnSpc>
+                <a:spcPct val="115000"/>
+              </a:lnSpc>
+              <a:spcAft>
+                <a:spcPts val="0"/>
+              </a:spcAft>
+            </a:pPr>
+            <a:r>
+              <a:rPr sz="1400" b="0" i="0">
+                <a:solidFill>
+                  <a:srgbClr val="6B5B74"/>
+                </a:solidFill>
+                <a:latin typeface="Noto Sans"/>
+              </a:rPr>
+              <a:t>dari seluruh laporan nasional terkumpul di 10 provinsi saja</a:t>
+            </a:r>
+          </a:p>
+        </p:txBody>
+      </p:sp>
+      <p:sp>
+        <p:nvSpPr>
+          <p:cNvPr id="8" name="TextBox 7"/>
+          <p:cNvSpPr txBox="1"/>
+          <p:nvPr/>
+        </p:nvSpPr>
+        <p:spPr>
+          <a:xfrm>
+            <a:off x="685800" y="6473952"/>
+            <a:ext cx="6858000" cy="365760"/>
+          </a:xfrm>
+          <a:prstGeom prst="rect">
+            <a:avLst/>
+          </a:prstGeom>
+          <a:noFill/>
+        </p:spPr>
+        <p:txBody>
+          <a:bodyPr wrap="square">
+            <a:spAutoFit/>
+          </a:bodyPr>
+          <a:lstStyle/>
+          <a:p>
+            <a:pPr>
+              <a:spcAft>
+                <a:spcPts val="0"/>
+              </a:spcAft>
+            </a:pPr>
+            <a:r>
+              <a:rPr sz="1200" b="0" i="1">
+                <a:solidFill>
+                  <a:srgbClr val="6B5B74"/>
+                </a:solidFill>
+                <a:latin typeface="Noto Sans"/>
               </a:rPr>
               <a:t>10 provinsi dengan kasus ISPA terbanyak, SKDR 2026.</a:t>
             </a:r>
@@ -4413,7 +4743,7 @@
     <p:bg>
       <p:bgPr>
         <a:solidFill>
-          <a:srgbClr val="FFFFFF"/>
+          <a:srgbClr val="F0E8D8"/>
         </a:solidFill>
         <a:effectLst/>
       </p:bgPr>
@@ -4427,62 +4757,25 @@
       <p:grpSpPr/>
       <p:sp>
         <p:nvSpPr>
-          <p:cNvPr id="2" name="TextBox 1"/>
-          <p:cNvSpPr txBox="1"/>
-          <p:nvPr/>
-        </p:nvSpPr>
-        <p:spPr>
-          <a:xfrm>
-            <a:off x="640080" y="274320"/>
-            <a:ext cx="10881360" cy="822960"/>
-          </a:xfrm>
-          <a:prstGeom prst="rect">
-            <a:avLst/>
-          </a:prstGeom>
-          <a:noFill/>
-        </p:spPr>
-        <p:txBody>
-          <a:bodyPr wrap="square">
-            <a:spAutoFit/>
-          </a:bodyPr>
-          <a:lstStyle/>
-          <a:p>
-            <a:pPr>
-              <a:spcAft>
-                <a:spcPts val="800"/>
-              </a:spcAft>
-            </a:pPr>
-            <a:r>
-              <a:rPr sz="3000" b="1" i="0">
-                <a:solidFill>
-                  <a:srgbClr val="1E3A8A"/>
-                </a:solidFill>
-              </a:rPr>
-              <a:t>Temuan 2: Per Kapita, Jakarta Beban Terberat</a:t>
-            </a:r>
-          </a:p>
-        </p:txBody>
-      </p:sp>
-      <p:sp>
-        <p:nvSpPr>
-          <p:cNvPr id="3" name="Rectangle 2"/>
+          <p:cNvPr id="2" name="Rectangle 1"/>
           <p:cNvSpPr/>
           <p:nvPr/>
         </p:nvSpPr>
         <p:spPr>
           <a:xfrm>
-            <a:off x="640080" y="1051560"/>
-            <a:ext cx="1371600" cy="54864"/>
+            <a:off x="685800" y="566928"/>
+            <a:ext cx="146304" cy="146304"/>
           </a:xfrm>
           <a:prstGeom prst="rect">
             <a:avLst/>
           </a:prstGeom>
           <a:solidFill>
-            <a:srgbClr val="0D9488"/>
+            <a:srgbClr val="EF7D1A"/>
           </a:solidFill>
           <a:ln>
             <a:noFill/>
           </a:ln>
+          <a:effectLst/>
         </p:spPr>
         <p:style>
           <a:lnRef idx="1">
@@ -4508,14 +4801,14 @@
       </p:sp>
       <p:sp>
         <p:nvSpPr>
-          <p:cNvPr id="4" name="TextBox 3"/>
+          <p:cNvPr id="3" name="TextBox 2"/>
           <p:cNvSpPr txBox="1"/>
           <p:nvPr/>
         </p:nvSpPr>
         <p:spPr>
           <a:xfrm>
-            <a:off x="640080" y="1371600"/>
-            <a:ext cx="5120640" cy="4754880"/>
+            <a:off x="1005840" y="347472"/>
+            <a:ext cx="10607040" cy="777240"/>
           </a:xfrm>
           <a:prstGeom prst="rect">
             <a:avLst/>
@@ -4528,7 +4821,49 @@
           </a:bodyPr>
           <a:lstStyle/>
           <a:p>
+            <a:pPr>
+              <a:spcAft>
+                <a:spcPts val="0"/>
+              </a:spcAft>
+            </a:pPr>
+            <a:r>
+              <a:rPr sz="3200" b="1" i="0">
+                <a:solidFill>
+                  <a:srgbClr val="2A1E33"/>
+                </a:solidFill>
+                <a:latin typeface="Noto Sans"/>
+              </a:rPr>
+              <a:t>Temuan 2: Per Kapita, Jakarta Beban Terberat</a:t>
+            </a:r>
+          </a:p>
+        </p:txBody>
+      </p:sp>
+      <p:sp>
+        <p:nvSpPr>
+          <p:cNvPr id="4" name="TextBox 3"/>
+          <p:cNvSpPr txBox="1"/>
+          <p:nvPr/>
+        </p:nvSpPr>
+        <p:spPr>
+          <a:xfrm>
+            <a:off x="6355080" y="1463040"/>
+            <a:ext cx="5166360" cy="4846320"/>
+          </a:xfrm>
+          <a:prstGeom prst="rect">
+            <a:avLst/>
+          </a:prstGeom>
+          <a:noFill/>
+        </p:spPr>
+        <p:txBody>
+          <a:bodyPr wrap="square">
+            <a:spAutoFit/>
+          </a:bodyPr>
+          <a:lstStyle/>
+          <a:p>
             <a:pPr marL="171450" indent="-171450">
+              <a:lnSpc>
+                <a:spcPct val="112000"/>
+              </a:lnSpc>
               <a:spcBef>
                 <a:spcPts val="200"/>
               </a:spcBef>
@@ -4538,16 +4873,20 @@
               <a:buChar char="•"/>
             </a:pPr>
             <a:r>
-              <a:rPr sz="1700" b="0" i="0">
-                <a:solidFill>
-                  <a:srgbClr val="1F2937"/>
-                </a:solidFill>
+              <a:rPr sz="1600" b="0" i="0">
+                <a:solidFill>
+                  <a:srgbClr val="2A1E33"/>
+                </a:solidFill>
+                <a:latin typeface="Noto Sans"/>
               </a:rPr>
               <a:t>Angka absolut menipu: provinsi besar otomatis mencatat kasus lebih banyak.</a:t>
             </a:r>
           </a:p>
           <a:p>
             <a:pPr marL="171450" indent="-171450">
+              <a:lnSpc>
+                <a:spcPct val="112000"/>
+              </a:lnSpc>
               <a:spcBef>
                 <a:spcPts val="200"/>
               </a:spcBef>
@@ -4557,16 +4896,20 @@
               <a:buChar char="•"/>
             </a:pPr>
             <a:r>
-              <a:rPr sz="1700" b="0" i="0">
-                <a:solidFill>
-                  <a:srgbClr val="1F2937"/>
-                </a:solidFill>
+              <a:rPr sz="1600" b="0" i="0">
+                <a:solidFill>
+                  <a:srgbClr val="2A1E33"/>
+                </a:solidFill>
+                <a:latin typeface="Noto Sans"/>
               </a:rPr>
               <a:t>Setelah dibagi populasi: Jakarta 150,0 kasus per 1.000 penduduk.</a:t>
             </a:r>
           </a:p>
           <a:p>
             <a:pPr marL="171450" indent="-171450">
+              <a:lnSpc>
+                <a:spcPct val="112000"/>
+              </a:lnSpc>
               <a:spcBef>
                 <a:spcPts val="200"/>
               </a:spcBef>
@@ -4576,16 +4919,20 @@
               <a:buChar char="•"/>
             </a:pPr>
             <a:r>
-              <a:rPr sz="1700" b="0" i="0">
-                <a:solidFill>
-                  <a:srgbClr val="1F2937"/>
-                </a:solidFill>
+              <a:rPr sz="1600" b="0" i="0">
+                <a:solidFill>
+                  <a:srgbClr val="2A1E33"/>
+                </a:solidFill>
+                <a:latin typeface="Noto Sans"/>
               </a:rPr>
               <a:t>Itu ~3x Jawa Barat (49,5) dan ~2,3x Banten (65,8).</a:t>
             </a:r>
           </a:p>
           <a:p>
             <a:pPr marL="171450" indent="-171450">
+              <a:lnSpc>
+                <a:spcPct val="112000"/>
+              </a:lnSpc>
               <a:spcBef>
                 <a:spcPts val="200"/>
               </a:spcBef>
@@ -4595,16 +4942,20 @@
               <a:buChar char="•"/>
             </a:pPr>
             <a:r>
-              <a:rPr sz="1700" b="0" i="0">
-                <a:solidFill>
-                  <a:srgbClr val="1F2937"/>
-                </a:solidFill>
+              <a:rPr sz="1600" b="0" i="0">
+                <a:solidFill>
+                  <a:srgbClr val="2A1E33"/>
+                </a:solidFill>
+                <a:latin typeface="Noto Sans"/>
               </a:rPr>
               <a:t>Jakarta mencatat kasus 1,16x Jawa Timur dengan penduduk hanya seperempatnya.</a:t>
             </a:r>
           </a:p>
           <a:p>
             <a:pPr marL="171450" indent="-171450">
+              <a:lnSpc>
+                <a:spcPct val="112000"/>
+              </a:lnSpc>
               <a:spcBef>
                 <a:spcPts val="200"/>
               </a:spcBef>
@@ -4614,10 +4965,11 @@
               <a:buChar char="•"/>
             </a:pPr>
             <a:r>
-              <a:rPr sz="1700" b="0" i="0">
-                <a:solidFill>
-                  <a:srgbClr val="1F2937"/>
-                </a:solidFill>
+              <a:rPr sz="1600" b="0" i="0">
+                <a:solidFill>
+                  <a:srgbClr val="2A1E33"/>
+                </a:solidFill>
+                <a:latin typeface="Noto Sans"/>
               </a:rPr>
               <a:t>Implikasi: surveilans dan kesiapan RS Jakarta perlu prioritas pada puncak kemarau.</a:t>
             </a:r>
@@ -4640,8 +4992,8 @@
         </p:blipFill>
         <p:spPr>
           <a:xfrm>
-            <a:off x="6217920" y="1371600"/>
-            <a:ext cx="5303520" cy="2946400"/>
+            <a:off x="685800" y="1600200"/>
+            <a:ext cx="5394960" cy="2999232"/>
           </a:xfrm>
           <a:prstGeom prst="rect">
             <a:avLst/>
@@ -4656,8 +5008,8 @@
         </p:nvSpPr>
         <p:spPr>
           <a:xfrm>
-            <a:off x="6217920" y="6035040"/>
-            <a:ext cx="5303520" cy="548640"/>
+            <a:off x="685800" y="4764023"/>
+            <a:ext cx="5394960" cy="365760"/>
           </a:xfrm>
           <a:prstGeom prst="rect">
             <a:avLst/>
@@ -4672,14 +5024,15 @@
           <a:p>
             <a:pPr>
               <a:spcAft>
-                <a:spcPts val="800"/>
-              </a:spcAft>
-            </a:pPr>
-            <a:r>
-              <a:rPr sz="1100" b="0" i="1">
-                <a:solidFill>
-                  <a:srgbClr val="6B7280"/>
-                </a:solidFill>
+                <a:spcPts val="0"/>
+              </a:spcAft>
+            </a:pPr>
+            <a:r>
+              <a:rPr sz="1200" b="0" i="1">
+                <a:solidFill>
+                  <a:srgbClr val="6B5B74"/>
+                </a:solidFill>
+                <a:latin typeface="Noto Sans"/>
               </a:rPr>
               <a:t>Kasus per 1.000 penduduk (populasi BPS 2026).</a:t>
             </a:r>
@@ -4700,7 +5053,7 @@
     <p:bg>
       <p:bgPr>
         <a:solidFill>
-          <a:srgbClr val="FFFFFF"/>
+          <a:srgbClr val="F0E8D8"/>
         </a:solidFill>
         <a:effectLst/>
       </p:bgPr>
@@ -4714,62 +5067,25 @@
       <p:grpSpPr/>
       <p:sp>
         <p:nvSpPr>
-          <p:cNvPr id="2" name="TextBox 1"/>
-          <p:cNvSpPr txBox="1"/>
-          <p:nvPr/>
-        </p:nvSpPr>
-        <p:spPr>
-          <a:xfrm>
-            <a:off x="640080" y="274320"/>
-            <a:ext cx="10881360" cy="822960"/>
-          </a:xfrm>
-          <a:prstGeom prst="rect">
-            <a:avLst/>
-          </a:prstGeom>
-          <a:noFill/>
-        </p:spPr>
-        <p:txBody>
-          <a:bodyPr wrap="square">
-            <a:spAutoFit/>
-          </a:bodyPr>
-          <a:lstStyle/>
-          <a:p>
-            <a:pPr>
-              <a:spcAft>
-                <a:spcPts val="800"/>
-              </a:spcAft>
-            </a:pPr>
-            <a:r>
-              <a:rPr sz="3000" b="1" i="0">
-                <a:solidFill>
-                  <a:srgbClr val="1E3A8A"/>
-                </a:solidFill>
-              </a:rPr>
-              <a:t>Temuan 3: 283.270 Kasus ISPA Karhutla</a:t>
-            </a:r>
-          </a:p>
-        </p:txBody>
-      </p:sp>
-      <p:sp>
-        <p:nvSpPr>
-          <p:cNvPr id="3" name="Rectangle 2"/>
+          <p:cNvPr id="2" name="Rectangle 1"/>
           <p:cNvSpPr/>
           <p:nvPr/>
         </p:nvSpPr>
         <p:spPr>
           <a:xfrm>
-            <a:off x="640080" y="1051560"/>
-            <a:ext cx="1371600" cy="54864"/>
+            <a:off x="685800" y="566928"/>
+            <a:ext cx="146304" cy="146304"/>
           </a:xfrm>
           <a:prstGeom prst="rect">
             <a:avLst/>
           </a:prstGeom>
           <a:solidFill>
-            <a:srgbClr val="0D9488"/>
+            <a:srgbClr val="EF7D1A"/>
           </a:solidFill>
           <a:ln>
             <a:noFill/>
           </a:ln>
+          <a:effectLst/>
         </p:spPr>
         <p:style>
           <a:lnRef idx="1">
@@ -4795,14 +5111,14 @@
       </p:sp>
       <p:sp>
         <p:nvSpPr>
-          <p:cNvPr id="4" name="TextBox 3"/>
+          <p:cNvPr id="3" name="TextBox 2"/>
           <p:cNvSpPr txBox="1"/>
           <p:nvPr/>
         </p:nvSpPr>
         <p:spPr>
           <a:xfrm>
-            <a:off x="640080" y="1371600"/>
-            <a:ext cx="5120640" cy="4754880"/>
+            <a:off x="1005840" y="347472"/>
+            <a:ext cx="10607040" cy="777240"/>
           </a:xfrm>
           <a:prstGeom prst="rect">
             <a:avLst/>
@@ -4815,7 +5131,127 @@
           </a:bodyPr>
           <a:lstStyle/>
           <a:p>
+            <a:pPr>
+              <a:spcAft>
+                <a:spcPts val="0"/>
+              </a:spcAft>
+            </a:pPr>
+            <a:r>
+              <a:rPr sz="3200" b="1" i="0">
+                <a:solidFill>
+                  <a:srgbClr val="2A1E33"/>
+                </a:solidFill>
+                <a:latin typeface="Noto Sans"/>
+              </a:rPr>
+              <a:t>Temuan 3: 283.270 Kasus ISPA Karhutla</a:t>
+            </a:r>
+          </a:p>
+        </p:txBody>
+      </p:sp>
+      <p:sp>
+        <p:nvSpPr>
+          <p:cNvPr id="4" name="TextBox 3"/>
+          <p:cNvSpPr txBox="1"/>
+          <p:nvPr/>
+        </p:nvSpPr>
+        <p:spPr>
+          <a:xfrm>
+            <a:off x="685800" y="1371600"/>
+            <a:ext cx="3291840" cy="731520"/>
+          </a:xfrm>
+          <a:prstGeom prst="rect">
+            <a:avLst/>
+          </a:prstGeom>
+          <a:noFill/>
+        </p:spPr>
+        <p:txBody>
+          <a:bodyPr wrap="square">
+            <a:spAutoFit/>
+          </a:bodyPr>
+          <a:lstStyle/>
+          <a:p>
+            <a:pPr>
+              <a:spcAft>
+                <a:spcPts val="0"/>
+              </a:spcAft>
+            </a:pPr>
+            <a:r>
+              <a:rPr sz="4400" b="1" i="0">
+                <a:solidFill>
+                  <a:srgbClr val="5E2A72"/>
+                </a:solidFill>
+                <a:latin typeface="Noto Sans"/>
+              </a:rPr>
+              <a:t>283.270</a:t>
+            </a:r>
+          </a:p>
+        </p:txBody>
+      </p:sp>
+      <p:sp>
+        <p:nvSpPr>
+          <p:cNvPr id="5" name="TextBox 4"/>
+          <p:cNvSpPr txBox="1"/>
+          <p:nvPr/>
+        </p:nvSpPr>
+        <p:spPr>
+          <a:xfrm>
+            <a:off x="3977639" y="1627632"/>
+            <a:ext cx="7223760" cy="457200"/>
+          </a:xfrm>
+          <a:prstGeom prst="rect">
+            <a:avLst/>
+          </a:prstGeom>
+          <a:noFill/>
+        </p:spPr>
+        <p:txBody>
+          <a:bodyPr wrap="square">
+            <a:spAutoFit/>
+          </a:bodyPr>
+          <a:lstStyle/>
+          <a:p>
+            <a:pPr>
+              <a:spcAft>
+                <a:spcPts val="0"/>
+              </a:spcAft>
+            </a:pPr>
+            <a:r>
+              <a:rPr sz="1500" b="0" i="0">
+                <a:solidFill>
+                  <a:srgbClr val="2A1E33"/>
+                </a:solidFill>
+                <a:latin typeface="Noto Sans"/>
+              </a:rPr>
+              <a:t>kasus pada seri pemantauan karhutla, terpisah dari seri nasional SKDR</a:t>
+            </a:r>
+          </a:p>
+        </p:txBody>
+      </p:sp>
+      <p:sp>
+        <p:nvSpPr>
+          <p:cNvPr id="6" name="TextBox 5"/>
+          <p:cNvSpPr txBox="1"/>
+          <p:nvPr/>
+        </p:nvSpPr>
+        <p:spPr>
+          <a:xfrm>
+            <a:off x="685800" y="2606040"/>
+            <a:ext cx="5166360" cy="3840480"/>
+          </a:xfrm>
+          <a:prstGeom prst="rect">
+            <a:avLst/>
+          </a:prstGeom>
+          <a:noFill/>
+        </p:spPr>
+        <p:txBody>
+          <a:bodyPr wrap="square">
+            <a:spAutoFit/>
+          </a:bodyPr>
+          <a:lstStyle/>
+          <a:p>
             <a:pPr marL="171450" indent="-171450">
+              <a:lnSpc>
+                <a:spcPct val="112000"/>
+              </a:lnSpc>
               <a:spcBef>
                 <a:spcPts val="200"/>
               </a:spcBef>
@@ -4825,16 +5261,20 @@
               <a:buChar char="•"/>
             </a:pPr>
             <a:r>
-              <a:rPr sz="1700" b="0" i="0">
-                <a:solidFill>
-                  <a:srgbClr val="1F2937"/>
-                </a:solidFill>
-              </a:rPr>
-              <a:t>Seri pemantauan karhutla (terpisah dari seri nasional): 283.270 kasus, 18 Agt–13 Okt 2026.</a:t>
+              <a:rPr sz="1600" b="0" i="0">
+                <a:solidFill>
+                  <a:srgbClr val="2A1E33"/>
+                </a:solidFill>
+                <a:latin typeface="Noto Sans"/>
+              </a:rPr>
+              <a:t>Seri pemantauan karhutla (terpisah dari seri nasional): 283.270 kasus, 18 Agt - 13 Okt 2026.</a:t>
             </a:r>
           </a:p>
           <a:p>
             <a:pPr marL="171450" indent="-171450">
+              <a:lnSpc>
+                <a:spcPct val="112000"/>
+              </a:lnSpc>
               <a:spcBef>
                 <a:spcPts val="200"/>
               </a:spcBef>
@@ -4844,16 +5284,20 @@
               <a:buChar char="•"/>
             </a:pPr>
             <a:r>
-              <a:rPr sz="1700" b="0" i="0">
-                <a:solidFill>
-                  <a:srgbClr val="1F2937"/>
-                </a:solidFill>
-              </a:rPr>
-              <a:t>Tercatat di 63 kabupaten/kota, 7 provinsi — rata-rata 4.496 kasus per kab/kota.</a:t>
+              <a:rPr sz="1600" b="0" i="0">
+                <a:solidFill>
+                  <a:srgbClr val="2A1E33"/>
+                </a:solidFill>
+                <a:latin typeface="Noto Sans"/>
+              </a:rPr>
+              <a:t>Tercatat di 63 kabupaten/kota, 7 provinsi - rata-rata 4.496 kasus per kab/kota.</a:t>
             </a:r>
           </a:p>
           <a:p>
             <a:pPr marL="171450" indent="-171450">
+              <a:lnSpc>
+                <a:spcPct val="112000"/>
+              </a:lnSpc>
               <a:spcBef>
                 <a:spcPts val="200"/>
               </a:spcBef>
@@ -4863,16 +5307,20 @@
               <a:buChar char="•"/>
             </a:pPr>
             <a:r>
-              <a:rPr sz="1700" b="0" i="0">
-                <a:solidFill>
-                  <a:srgbClr val="1F2937"/>
-                </a:solidFill>
+              <a:rPr sz="1600" b="0" i="0">
+                <a:solidFill>
+                  <a:srgbClr val="2A1E33"/>
+                </a:solidFill>
+                <a:latin typeface="Noto Sans"/>
               </a:rPr>
               <a:t>Kalsel (74.636) dan Sumsel (74.458) bersama = 52,6% kasus karhutla; selisih hanya 178 kasus.</a:t>
             </a:r>
           </a:p>
           <a:p>
             <a:pPr marL="171450" indent="-171450">
+              <a:lnSpc>
+                <a:spcPct val="112000"/>
+              </a:lnSpc>
               <a:spcBef>
                 <a:spcPts val="200"/>
               </a:spcBef>
@@ -4882,16 +5330,20 @@
               <a:buChar char="•"/>
             </a:pPr>
             <a:r>
-              <a:rPr sz="1700" b="0" i="0">
-                <a:solidFill>
-                  <a:srgbClr val="1F2937"/>
-                </a:solidFill>
+              <a:rPr sz="1600" b="0" i="0">
+                <a:solidFill>
+                  <a:srgbClr val="2A1E33"/>
+                </a:solidFill>
+                <a:latin typeface="Noto Sans"/>
               </a:rPr>
               <a:t>Kumulatif naik 21,1x dalam 7 minggu: 13.449 (27 Agt) → 283.270 (13 Okt).</a:t>
             </a:r>
           </a:p>
           <a:p>
             <a:pPr marL="171450" indent="-171450">
+              <a:lnSpc>
+                <a:spcPct val="112000"/>
+              </a:lnSpc>
               <a:spcBef>
                 <a:spcPts val="200"/>
               </a:spcBef>
@@ -4901,10 +5353,11 @@
               <a:buChar char="•"/>
             </a:pPr>
             <a:r>
-              <a:rPr sz="1700" b="0" i="0">
-                <a:solidFill>
-                  <a:srgbClr val="1F2937"/>
-                </a:solidFill>
+              <a:rPr sz="1600" b="0" i="0">
+                <a:solidFill>
+                  <a:srgbClr val="2A1E33"/>
+                </a:solidFill>
+                <a:latin typeface="Noto Sans"/>
               </a:rPr>
               <a:t>13 Oktober saja: 3.897 kasus baru harian.</a:t>
             </a:r>
@@ -4913,7 +5366,7 @@
       </p:sp>
       <p:pic>
         <p:nvPicPr>
-          <p:cNvPr id="5" name="Picture 4" descr="06_karhutla_pertumbuhan.png"/>
+          <p:cNvPr id="7" name="Picture 6" descr="06_karhutla_pertumbuhan.png"/>
           <p:cNvPicPr>
             <a:picLocks noChangeAspect="1"/>
           </p:cNvPicPr>
@@ -4927,8 +5380,8 @@
         </p:blipFill>
         <p:spPr>
           <a:xfrm>
-            <a:off x="6217920" y="1371600"/>
-            <a:ext cx="5303520" cy="3314700"/>
+            <a:off x="6126480" y="2606040"/>
+            <a:ext cx="5394960" cy="3374136"/>
           </a:xfrm>
           <a:prstGeom prst="rect">
             <a:avLst/>
@@ -4937,14 +5390,14 @@
       </p:pic>
       <p:sp>
         <p:nvSpPr>
-          <p:cNvPr id="6" name="TextBox 5"/>
+          <p:cNvPr id="8" name="TextBox 7"/>
           <p:cNvSpPr txBox="1"/>
           <p:nvPr/>
         </p:nvSpPr>
         <p:spPr>
           <a:xfrm>
-            <a:off x="6217920" y="6035040"/>
-            <a:ext cx="5303520" cy="548640"/>
+            <a:off x="6126480" y="6144768"/>
+            <a:ext cx="5394960" cy="365760"/>
           </a:xfrm>
           <a:prstGeom prst="rect">
             <a:avLst/>
@@ -4959,14 +5412,15 @@
           <a:p>
             <a:pPr>
               <a:spcAft>
-                <a:spcPts val="800"/>
-              </a:spcAft>
-            </a:pPr>
-            <a:r>
-              <a:rPr sz="1100" b="0" i="1">
-                <a:solidFill>
-                  <a:srgbClr val="6B7280"/>
-                </a:solidFill>
+                <a:spcPts val="0"/>
+              </a:spcAft>
+            </a:pPr>
+            <a:r>
+              <a:rPr sz="1200" b="0" i="1">
+                <a:solidFill>
+                  <a:srgbClr val="6B5B74"/>
+                </a:solidFill>
+                <a:latin typeface="Noto Sans"/>
               </a:rPr>
               <a:t>Pertumbuhan kumulatif seri karhutla.</a:t>
             </a:r>
@@ -4987,7 +5441,7 @@
     <p:bg>
       <p:bgPr>
         <a:solidFill>
-          <a:srgbClr val="FFFFFF"/>
+          <a:srgbClr val="F0E8D8"/>
         </a:solidFill>
         <a:effectLst/>
       </p:bgPr>
@@ -5001,62 +5455,25 @@
       <p:grpSpPr/>
       <p:sp>
         <p:nvSpPr>
-          <p:cNvPr id="2" name="TextBox 1"/>
-          <p:cNvSpPr txBox="1"/>
-          <p:nvPr/>
-        </p:nvSpPr>
-        <p:spPr>
-          <a:xfrm>
-            <a:off x="640080" y="274320"/>
-            <a:ext cx="10881360" cy="822960"/>
-          </a:xfrm>
-          <a:prstGeom prst="rect">
-            <a:avLst/>
-          </a:prstGeom>
-          <a:noFill/>
-        </p:spPr>
-        <p:txBody>
-          <a:bodyPr wrap="square">
-            <a:spAutoFit/>
-          </a:bodyPr>
-          <a:lstStyle/>
-          <a:p>
-            <a:pPr>
-              <a:spcAft>
-                <a:spcPts val="800"/>
-              </a:spcAft>
-            </a:pPr>
-            <a:r>
-              <a:rPr sz="3000" b="1" i="0">
-                <a:solidFill>
-                  <a:srgbClr val="1E3A8A"/>
-                </a:solidFill>
-              </a:rPr>
-              <a:t>Temuan 4: Hampir 1 dari 4 Kasus Karhutla adalah Balita</a:t>
-            </a:r>
-          </a:p>
-        </p:txBody>
-      </p:sp>
-      <p:sp>
-        <p:nvSpPr>
-          <p:cNvPr id="3" name="Rectangle 2"/>
+          <p:cNvPr id="2" name="Rectangle 1"/>
           <p:cNvSpPr/>
           <p:nvPr/>
         </p:nvSpPr>
         <p:spPr>
           <a:xfrm>
-            <a:off x="640080" y="1051560"/>
-            <a:ext cx="1371600" cy="54864"/>
+            <a:off x="685800" y="566928"/>
+            <a:ext cx="146304" cy="146304"/>
           </a:xfrm>
           <a:prstGeom prst="rect">
             <a:avLst/>
           </a:prstGeom>
           <a:solidFill>
-            <a:srgbClr val="0D9488"/>
+            <a:srgbClr val="EF7D1A"/>
           </a:solidFill>
           <a:ln>
             <a:noFill/>
           </a:ln>
+          <a:effectLst/>
         </p:spPr>
         <p:style>
           <a:lnRef idx="1">
@@ -5082,14 +5499,14 @@
       </p:sp>
       <p:sp>
         <p:nvSpPr>
-          <p:cNvPr id="4" name="TextBox 3"/>
+          <p:cNvPr id="3" name="TextBox 2"/>
           <p:cNvSpPr txBox="1"/>
           <p:nvPr/>
         </p:nvSpPr>
         <p:spPr>
           <a:xfrm>
-            <a:off x="640080" y="1371600"/>
-            <a:ext cx="5120640" cy="4754880"/>
+            <a:off x="1005840" y="347472"/>
+            <a:ext cx="10607040" cy="777240"/>
           </a:xfrm>
           <a:prstGeom prst="rect">
             <a:avLst/>
@@ -5102,7 +5519,49 @@
           </a:bodyPr>
           <a:lstStyle/>
           <a:p>
+            <a:pPr>
+              <a:spcAft>
+                <a:spcPts val="0"/>
+              </a:spcAft>
+            </a:pPr>
+            <a:r>
+              <a:rPr sz="3200" b="1" i="0">
+                <a:solidFill>
+                  <a:srgbClr val="2A1E33"/>
+                </a:solidFill>
+                <a:latin typeface="Noto Sans"/>
+              </a:rPr>
+              <a:t>Temuan 4: Hampir 1 dari 4 Kasus Karhutla adalah Balita</a:t>
+            </a:r>
+          </a:p>
+        </p:txBody>
+      </p:sp>
+      <p:sp>
+        <p:nvSpPr>
+          <p:cNvPr id="4" name="TextBox 3"/>
+          <p:cNvSpPr txBox="1"/>
+          <p:nvPr/>
+        </p:nvSpPr>
+        <p:spPr>
+          <a:xfrm>
+            <a:off x="6355080" y="1463040"/>
+            <a:ext cx="5166360" cy="4846320"/>
+          </a:xfrm>
+          <a:prstGeom prst="rect">
+            <a:avLst/>
+          </a:prstGeom>
+          <a:noFill/>
+        </p:spPr>
+        <p:txBody>
+          <a:bodyPr wrap="square">
+            <a:spAutoFit/>
+          </a:bodyPr>
+          <a:lstStyle/>
+          <a:p>
             <a:pPr marL="171450" indent="-171450">
+              <a:lnSpc>
+                <a:spcPct val="112000"/>
+              </a:lnSpc>
               <a:spcBef>
                 <a:spcPts val="200"/>
               </a:spcBef>
@@ -5112,16 +5571,20 @@
               <a:buChar char="•"/>
             </a:pPr>
             <a:r>
-              <a:rPr sz="1700" b="0" i="0">
-                <a:solidFill>
-                  <a:srgbClr val="1F2937"/>
-                </a:solidFill>
-              </a:rPr>
-              <a:t>Balita (0–5 tahun): 63.711 kasus = 22,5% dari total seri karhutla.</a:t>
+              <a:rPr sz="1600" b="0" i="0">
+                <a:solidFill>
+                  <a:srgbClr val="2A1E33"/>
+                </a:solidFill>
+                <a:latin typeface="Noto Sans"/>
+              </a:rPr>
+              <a:t>Balita (0-5 tahun): 63.711 kasus = 22,5% dari total seri karhutla.</a:t>
             </a:r>
           </a:p>
           <a:p>
             <a:pPr marL="171450" indent="-171450">
+              <a:lnSpc>
+                <a:spcPct val="112000"/>
+              </a:lnSpc>
               <a:spcBef>
                 <a:spcPts val="200"/>
               </a:spcBef>
@@ -5131,16 +5594,20 @@
               <a:buChar char="•"/>
             </a:pPr>
             <a:r>
-              <a:rPr sz="1700" b="0" i="0">
-                <a:solidFill>
-                  <a:srgbClr val="1F2937"/>
-                </a:solidFill>
+              <a:rPr sz="1600" b="0" i="0">
+                <a:solidFill>
+                  <a:srgbClr val="2A1E33"/>
+                </a:solidFill>
+                <a:latin typeface="Noto Sans"/>
               </a:rPr>
               <a:t>Usia di atas 5 tahun: 219.559 kasus (77,5%).</a:t>
             </a:r>
           </a:p>
           <a:p>
             <a:pPr marL="171450" indent="-171450">
+              <a:lnSpc>
+                <a:spcPct val="112000"/>
+              </a:lnSpc>
               <a:spcBef>
                 <a:spcPts val="200"/>
               </a:spcBef>
@@ -5150,16 +5617,20 @@
               <a:buChar char="•"/>
             </a:pPr>
             <a:r>
-              <a:rPr sz="1700" b="0" i="0">
-                <a:solidFill>
-                  <a:srgbClr val="1F2937"/>
-                </a:solidFill>
+              <a:rPr sz="1600" b="0" i="0">
+                <a:solidFill>
+                  <a:srgbClr val="2A1E33"/>
+                </a:solidFill>
+                <a:latin typeface="Noto Sans"/>
               </a:rPr>
               <a:t>Porsi balita stabil: 23,1% (21 Sep) → 22,5% (13 Okt).</a:t>
             </a:r>
           </a:p>
           <a:p>
             <a:pPr marL="171450" indent="-171450">
+              <a:lnSpc>
+                <a:spcPct val="112000"/>
+              </a:lnSpc>
               <a:spcBef>
                 <a:spcPts val="200"/>
               </a:spcBef>
@@ -5169,16 +5640,20 @@
               <a:buChar char="•"/>
             </a:pPr>
             <a:r>
-              <a:rPr sz="1700" b="0" i="0">
-                <a:solidFill>
-                  <a:srgbClr val="1F2937"/>
-                </a:solidFill>
+              <a:rPr sz="1600" b="0" i="0">
+                <a:solidFill>
+                  <a:srgbClr val="2A1E33"/>
+                </a:solidFill>
+                <a:latin typeface="Noto Sans"/>
               </a:rPr>
               <a:t>Anak adalah kelompok rentan utama paparan asap: saluran napas lebih kecil, frekuensi napas lebih tinggi.</a:t>
             </a:r>
           </a:p>
           <a:p>
             <a:pPr marL="171450" indent="-171450">
+              <a:lnSpc>
+                <a:spcPct val="112000"/>
+              </a:lnSpc>
               <a:spcBef>
                 <a:spcPts val="200"/>
               </a:spcBef>
@@ -5188,10 +5663,11 @@
               <a:buChar char="•"/>
             </a:pPr>
             <a:r>
-              <a:rPr sz="1700" b="0" i="0">
-                <a:solidFill>
-                  <a:srgbClr val="1F2937"/>
-                </a:solidFill>
+              <a:rPr sz="1600" b="0" i="0">
+                <a:solidFill>
+                  <a:srgbClr val="2A1E33"/>
+                </a:solidFill>
+                <a:latin typeface="Noto Sans"/>
               </a:rPr>
               <a:t>Respons: 2.106 tenaga kesehatan dimobilisasi; &gt;2,8 juta masker didistribusikan.</a:t>
             </a:r>
@@ -5214,8 +5690,8 @@
         </p:blipFill>
         <p:spPr>
           <a:xfrm>
-            <a:off x="6217920" y="1371600"/>
-            <a:ext cx="5303520" cy="3788229"/>
+            <a:off x="685800" y="1600200"/>
+            <a:ext cx="4846320" cy="3465576"/>
           </a:xfrm>
           <a:prstGeom prst="rect">
             <a:avLst/>
@@ -5230,8 +5706,8 @@
         </p:nvSpPr>
         <p:spPr>
           <a:xfrm>
-            <a:off x="6217920" y="6035040"/>
-            <a:ext cx="5303520" cy="548640"/>
+            <a:off x="685800" y="5230368"/>
+            <a:ext cx="4846320" cy="365760"/>
           </a:xfrm>
           <a:prstGeom prst="rect">
             <a:avLst/>
@@ -5246,14 +5722,15 @@
           <a:p>
             <a:pPr>
               <a:spcAft>
-                <a:spcPts val="800"/>
-              </a:spcAft>
-            </a:pPr>
-            <a:r>
-              <a:rPr sz="1100" b="0" i="1">
-                <a:solidFill>
-                  <a:srgbClr val="6B7280"/>
-                </a:solidFill>
+                <a:spcPts val="0"/>
+              </a:spcAft>
+            </a:pPr>
+            <a:r>
+              <a:rPr sz="1200" b="0" i="1">
+                <a:solidFill>
+                  <a:srgbClr val="6B5B74"/>
+                </a:solidFill>
+                <a:latin typeface="Noto Sans"/>
               </a:rPr>
               <a:t>Kasus ISPA karhutla menurut usia.</a:t>
             </a:r>
@@ -5274,7 +5751,7 @@
     <p:bg>
       <p:bgPr>
         <a:solidFill>
-          <a:srgbClr val="FFFFFF"/>
+          <a:srgbClr val="F0E8D8"/>
         </a:solidFill>
         <a:effectLst/>
       </p:bgPr>
@@ -5288,62 +5765,25 @@
       <p:grpSpPr/>
       <p:sp>
         <p:nvSpPr>
-          <p:cNvPr id="2" name="TextBox 1"/>
-          <p:cNvSpPr txBox="1"/>
-          <p:nvPr/>
-        </p:nvSpPr>
-        <p:spPr>
-          <a:xfrm>
-            <a:off x="640080" y="274320"/>
-            <a:ext cx="10881360" cy="822960"/>
-          </a:xfrm>
-          <a:prstGeom prst="rect">
-            <a:avLst/>
-          </a:prstGeom>
-          <a:noFill/>
-        </p:spPr>
-        <p:txBody>
-          <a:bodyPr wrap="square">
-            <a:spAutoFit/>
-          </a:bodyPr>
-          <a:lstStyle/>
-          <a:p>
-            <a:pPr>
-              <a:spcAft>
-                <a:spcPts val="800"/>
-              </a:spcAft>
-            </a:pPr>
-            <a:r>
-              <a:rPr sz="3000" b="1" i="0">
-                <a:solidFill>
-                  <a:srgbClr val="1E3A8A"/>
-                </a:solidFill>
-              </a:rPr>
-              <a:t>Temuan 5: Udara Jauh di Atas Ambang Berbahaya</a:t>
-            </a:r>
-          </a:p>
-        </p:txBody>
-      </p:sp>
-      <p:sp>
-        <p:nvSpPr>
-          <p:cNvPr id="3" name="Rectangle 2"/>
+          <p:cNvPr id="2" name="Rectangle 1"/>
           <p:cNvSpPr/>
           <p:nvPr/>
         </p:nvSpPr>
         <p:spPr>
           <a:xfrm>
-            <a:off x="640080" y="1051560"/>
-            <a:ext cx="1371600" cy="54864"/>
+            <a:off x="685800" y="566928"/>
+            <a:ext cx="146304" cy="146304"/>
           </a:xfrm>
           <a:prstGeom prst="rect">
             <a:avLst/>
           </a:prstGeom>
           <a:solidFill>
-            <a:srgbClr val="0D9488"/>
+            <a:srgbClr val="EF7D1A"/>
           </a:solidFill>
           <a:ln>
             <a:noFill/>
           </a:ln>
+          <a:effectLst/>
         </p:spPr>
         <p:style>
           <a:lnRef idx="1">
@@ -5369,14 +5809,14 @@
       </p:sp>
       <p:sp>
         <p:nvSpPr>
-          <p:cNvPr id="4" name="TextBox 3"/>
+          <p:cNvPr id="3" name="TextBox 2"/>
           <p:cNvSpPr txBox="1"/>
           <p:nvPr/>
         </p:nvSpPr>
         <p:spPr>
           <a:xfrm>
-            <a:off x="640080" y="1371600"/>
-            <a:ext cx="5120640" cy="4754880"/>
+            <a:off x="1005840" y="347472"/>
+            <a:ext cx="10607040" cy="777240"/>
           </a:xfrm>
           <a:prstGeom prst="rect">
             <a:avLst/>
@@ -5389,7 +5829,49 @@
           </a:bodyPr>
           <a:lstStyle/>
           <a:p>
+            <a:pPr>
+              <a:spcAft>
+                <a:spcPts val="0"/>
+              </a:spcAft>
+            </a:pPr>
+            <a:r>
+              <a:rPr sz="3200" b="1" i="0">
+                <a:solidFill>
+                  <a:srgbClr val="2A1E33"/>
+                </a:solidFill>
+                <a:latin typeface="Noto Sans"/>
+              </a:rPr>
+              <a:t>Temuan 5: Udara Jauh di Atas Ambang Berbahaya</a:t>
+            </a:r>
+          </a:p>
+        </p:txBody>
+      </p:sp>
+      <p:sp>
+        <p:nvSpPr>
+          <p:cNvPr id="4" name="TextBox 3"/>
+          <p:cNvSpPr txBox="1"/>
+          <p:nvPr/>
+        </p:nvSpPr>
+        <p:spPr>
+          <a:xfrm>
+            <a:off x="685800" y="1463040"/>
+            <a:ext cx="5166360" cy="4846320"/>
+          </a:xfrm>
+          <a:prstGeom prst="rect">
+            <a:avLst/>
+          </a:prstGeom>
+          <a:noFill/>
+        </p:spPr>
+        <p:txBody>
+          <a:bodyPr wrap="square">
+            <a:spAutoFit/>
+          </a:bodyPr>
+          <a:lstStyle/>
+          <a:p>
             <a:pPr marL="171450" indent="-171450">
+              <a:lnSpc>
+                <a:spcPct val="112000"/>
+              </a:lnSpc>
               <a:spcBef>
                 <a:spcPts val="200"/>
               </a:spcBef>
@@ -5399,16 +5881,20 @@
               <a:buChar char="•"/>
             </a:pPr>
             <a:r>
-              <a:rPr sz="1700" b="0" i="0">
-                <a:solidFill>
-                  <a:srgbClr val="1F2937"/>
-                </a:solidFill>
-              </a:rPr>
-              <a:t>PM2,5 di 10 wilayah terburuk: 507–1.837 (12 Okt 2026, 15:00 WIB).</a:t>
+              <a:rPr sz="1600" b="0" i="0">
+                <a:solidFill>
+                  <a:srgbClr val="2A1E33"/>
+                </a:solidFill>
+                <a:latin typeface="Noto Sans"/>
+              </a:rPr>
+              <a:t>PM2,5 di 10 wilayah terburuk: 507-1.837 (12 Okt 2026, 15:00 WIB).</a:t>
             </a:r>
           </a:p>
           <a:p>
             <a:pPr marL="171450" indent="-171450">
+              <a:lnSpc>
+                <a:spcPct val="112000"/>
+              </a:lnSpc>
               <a:spcBef>
                 <a:spcPts val="200"/>
               </a:spcBef>
@@ -5418,16 +5904,20 @@
               <a:buChar char="•"/>
             </a:pPr>
             <a:r>
-              <a:rPr sz="1700" b="0" i="0">
-                <a:solidFill>
-                  <a:srgbClr val="1F2937"/>
-                </a:solidFill>
+              <a:rPr sz="1600" b="0" i="0">
+                <a:solidFill>
+                  <a:srgbClr val="2A1E33"/>
+                </a:solidFill>
+                <a:latin typeface="Noto Sans"/>
               </a:rPr>
               <a:t>Barito Kuala 1.837 = 6,1 kali ambang ISPU 'berbahaya' (&gt;300).</a:t>
             </a:r>
           </a:p>
           <a:p>
             <a:pPr marL="171450" indent="-171450">
+              <a:lnSpc>
+                <a:spcPct val="112000"/>
+              </a:lnSpc>
               <a:spcBef>
                 <a:spcPts val="200"/>
               </a:spcBef>
@@ -5437,16 +5927,20 @@
               <a:buChar char="•"/>
             </a:pPr>
             <a:r>
-              <a:rPr sz="1700" b="0" i="0">
-                <a:solidFill>
-                  <a:srgbClr val="1F2937"/>
-                </a:solidFill>
+              <a:rPr sz="1600" b="0" i="0">
+                <a:solidFill>
+                  <a:srgbClr val="2A1E33"/>
+                </a:solidFill>
+                <a:latin typeface="Noto Sans"/>
               </a:rPr>
               <a:t>7 dari 10 wilayah terburuk berada di Kalimantan Tengah.</a:t>
             </a:r>
           </a:p>
           <a:p>
             <a:pPr marL="171450" indent="-171450">
+              <a:lnSpc>
+                <a:spcPct val="112000"/>
+              </a:lnSpc>
               <a:spcBef>
                 <a:spcPts val="200"/>
               </a:spcBef>
@@ -5456,16 +5950,20 @@
               <a:buChar char="•"/>
             </a:pPr>
             <a:r>
-              <a:rPr sz="1700" b="0" i="0">
-                <a:solidFill>
-                  <a:srgbClr val="1F2937"/>
-                </a:solidFill>
+              <a:rPr sz="1600" b="0" i="0">
+                <a:solidFill>
+                  <a:srgbClr val="2A1E33"/>
+                </a:solidFill>
+                <a:latin typeface="Noto Sans"/>
               </a:rPr>
               <a:t>Kemenkes: 12 kab/kota berkategori berbahaya, 9 wilayah sangat tidak sehat.</a:t>
             </a:r>
           </a:p>
           <a:p>
             <a:pPr marL="171450" indent="-171450">
+              <a:lnSpc>
+                <a:spcPct val="112000"/>
+              </a:lnSpc>
               <a:spcBef>
                 <a:spcPts val="200"/>
               </a:spcBef>
@@ -5475,10 +5973,11 @@
               <a:buChar char="•"/>
             </a:pPr>
             <a:r>
-              <a:rPr sz="1700" b="0" i="0">
-                <a:solidFill>
-                  <a:srgbClr val="1F2937"/>
-                </a:solidFill>
+              <a:rPr sz="1600" b="0" i="0">
+                <a:solidFill>
+                  <a:srgbClr val="2A1E33"/>
+                </a:solidFill>
+                <a:latin typeface="Noto Sans"/>
               </a:rPr>
               <a:t>Asap karhutla mengandung PM2,5 yang masuk jauh ke saluran pernapasan (WHO).</a:t>
             </a:r>
@@ -5501,8 +6000,8 @@
         </p:blipFill>
         <p:spPr>
           <a:xfrm>
-            <a:off x="6217920" y="1371600"/>
-            <a:ext cx="5303520" cy="3241040"/>
+            <a:off x="6126480" y="1600200"/>
+            <a:ext cx="5394960" cy="3300984"/>
           </a:xfrm>
           <a:prstGeom prst="rect">
             <a:avLst/>
@@ -5517,8 +6016,8 @@
         </p:nvSpPr>
         <p:spPr>
           <a:xfrm>
-            <a:off x="6217920" y="6035040"/>
-            <a:ext cx="5303520" cy="548640"/>
+            <a:off x="6126480" y="5065775"/>
+            <a:ext cx="5394960" cy="365760"/>
           </a:xfrm>
           <a:prstGeom prst="rect">
             <a:avLst/>
@@ -5533,14 +6032,15 @@
           <a:p>
             <a:pPr>
               <a:spcAft>
-                <a:spcPts val="800"/>
-              </a:spcAft>
-            </a:pPr>
-            <a:r>
-              <a:rPr sz="1100" b="0" i="1">
-                <a:solidFill>
-                  <a:srgbClr val="6B7280"/>
-                </a:solidFill>
+                <a:spcPts val="0"/>
+              </a:spcAft>
+            </a:pPr>
+            <a:r>
+              <a:rPr sz="1200" b="0" i="1">
+                <a:solidFill>
+                  <a:srgbClr val="6B5B74"/>
+                </a:solidFill>
+                <a:latin typeface="Noto Sans"/>
               </a:rPr>
               <a:t>Konsentrasi PM2,5, 10 wilayah terburuk.</a:t>
             </a:r>
@@ -5561,7 +6061,7 @@
     <p:bg>
       <p:bgPr>
         <a:solidFill>
-          <a:srgbClr val="FFFFFF"/>
+          <a:srgbClr val="F0E8D8"/>
         </a:solidFill>
         <a:effectLst/>
       </p:bgPr>
@@ -5575,62 +6075,25 @@
       <p:grpSpPr/>
       <p:sp>
         <p:nvSpPr>
-          <p:cNvPr id="2" name="TextBox 1"/>
-          <p:cNvSpPr txBox="1"/>
-          <p:nvPr/>
-        </p:nvSpPr>
-        <p:spPr>
-          <a:xfrm>
-            <a:off x="640080" y="274320"/>
-            <a:ext cx="10881360" cy="822960"/>
-          </a:xfrm>
-          <a:prstGeom prst="rect">
-            <a:avLst/>
-          </a:prstGeom>
-          <a:noFill/>
-        </p:spPr>
-        <p:txBody>
-          <a:bodyPr wrap="square">
-            <a:spAutoFit/>
-          </a:bodyPr>
-          <a:lstStyle/>
-          <a:p>
-            <a:pPr>
-              <a:spcAft>
-                <a:spcPts val="800"/>
-              </a:spcAft>
-            </a:pPr>
-            <a:r>
-              <a:rPr sz="3000" b="1" i="0">
-                <a:solidFill>
-                  <a:srgbClr val="1E3A8A"/>
-                </a:solidFill>
-              </a:rPr>
-              <a:t>Rekomendasi</a:t>
-            </a:r>
-          </a:p>
-        </p:txBody>
-      </p:sp>
-      <p:sp>
-        <p:nvSpPr>
-          <p:cNvPr id="3" name="Rectangle 2"/>
+          <p:cNvPr id="2" name="Rectangle 1"/>
           <p:cNvSpPr/>
           <p:nvPr/>
         </p:nvSpPr>
         <p:spPr>
           <a:xfrm>
-            <a:off x="640080" y="1051560"/>
-            <a:ext cx="1371600" cy="54864"/>
+            <a:off x="685800" y="566928"/>
+            <a:ext cx="146304" cy="146304"/>
           </a:xfrm>
           <a:prstGeom prst="rect">
             <a:avLst/>
           </a:prstGeom>
           <a:solidFill>
-            <a:srgbClr val="0D9488"/>
+            <a:srgbClr val="EF7D1A"/>
           </a:solidFill>
           <a:ln>
             <a:noFill/>
           </a:ln>
+          <a:effectLst/>
         </p:spPr>
         <p:style>
           <a:lnRef idx="1">
@@ -5656,14 +6119,14 @@
       </p:sp>
       <p:sp>
         <p:nvSpPr>
-          <p:cNvPr id="4" name="TextBox 3"/>
+          <p:cNvPr id="3" name="TextBox 2"/>
           <p:cNvSpPr txBox="1"/>
           <p:nvPr/>
         </p:nvSpPr>
         <p:spPr>
           <a:xfrm>
-            <a:off x="640080" y="1371600"/>
-            <a:ext cx="10881360" cy="4754880"/>
+            <a:off x="1005840" y="347472"/>
+            <a:ext cx="10607040" cy="777240"/>
           </a:xfrm>
           <a:prstGeom prst="rect">
             <a:avLst/>
@@ -5676,7 +6139,49 @@
           </a:bodyPr>
           <a:lstStyle/>
           <a:p>
+            <a:pPr>
+              <a:spcAft>
+                <a:spcPts val="0"/>
+              </a:spcAft>
+            </a:pPr>
+            <a:r>
+              <a:rPr sz="3200" b="1" i="0">
+                <a:solidFill>
+                  <a:srgbClr val="2A1E33"/>
+                </a:solidFill>
+                <a:latin typeface="Noto Sans"/>
+              </a:rPr>
+              <a:t>Rekomendasi</a:t>
+            </a:r>
+          </a:p>
+        </p:txBody>
+      </p:sp>
+      <p:sp>
+        <p:nvSpPr>
+          <p:cNvPr id="4" name="TextBox 3"/>
+          <p:cNvSpPr txBox="1"/>
+          <p:nvPr/>
+        </p:nvSpPr>
+        <p:spPr>
+          <a:xfrm>
+            <a:off x="685800" y="1554480"/>
+            <a:ext cx="5394960" cy="4754880"/>
+          </a:xfrm>
+          <a:prstGeom prst="rect">
+            <a:avLst/>
+          </a:prstGeom>
+          <a:noFill/>
+        </p:spPr>
+        <p:txBody>
+          <a:bodyPr wrap="square">
+            <a:spAutoFit/>
+          </a:bodyPr>
+          <a:lstStyle/>
+          <a:p>
             <a:pPr marL="171450" indent="-171450">
+              <a:lnSpc>
+                <a:spcPct val="112000"/>
+              </a:lnSpc>
               <a:spcBef>
                 <a:spcPts val="200"/>
               </a:spcBef>
@@ -5686,16 +6191,20 @@
               <a:buChar char="•"/>
             </a:pPr>
             <a:r>
-              <a:rPr sz="1700" b="0" i="0">
-                <a:solidFill>
-                  <a:srgbClr val="1F2937"/>
-                </a:solidFill>
+              <a:rPr sz="1600" b="0" i="0">
+                <a:solidFill>
+                  <a:srgbClr val="2A1E33"/>
+                </a:solidFill>
+                <a:latin typeface="Noto Sans"/>
               </a:rPr>
               <a:t>Lindungi balita di wilayah karhutla: masker anak, pembelajaran jarak jauh saat ISPU berbahaya, posko kesehatan.</a:t>
             </a:r>
           </a:p>
           <a:p>
             <a:pPr marL="171450" indent="-171450">
+              <a:lnSpc>
+                <a:spcPct val="112000"/>
+              </a:lnSpc>
               <a:spcBef>
                 <a:spcPts val="200"/>
               </a:spcBef>
@@ -5705,16 +6214,20 @@
               <a:buChar char="•"/>
             </a:pPr>
             <a:r>
-              <a:rPr sz="1700" b="0" i="0">
-                <a:solidFill>
-                  <a:srgbClr val="1F2937"/>
-                </a:solidFill>
-              </a:rPr>
-              <a:t>Fokus pada Kalsel dan Sumsel: 52,6% kasus karhutla — pertahankan distribusi masker dan tenaga kesehatan.</a:t>
+              <a:rPr sz="1600" b="0" i="0">
+                <a:solidFill>
+                  <a:srgbClr val="2A1E33"/>
+                </a:solidFill>
+                <a:latin typeface="Noto Sans"/>
+              </a:rPr>
+              <a:t>Fokus pada Kalsel dan Sumsel: 52,6% kasus karhutla - pertahankan distribusi masker dan tenaga kesehatan.</a:t>
             </a:r>
           </a:p>
           <a:p>
             <a:pPr marL="171450" indent="-171450">
+              <a:lnSpc>
+                <a:spcPct val="112000"/>
+              </a:lnSpc>
               <a:spcBef>
                 <a:spcPts val="200"/>
               </a:spcBef>
@@ -5724,16 +6237,43 @@
               <a:buChar char="•"/>
             </a:pPr>
             <a:r>
-              <a:rPr sz="1700" b="0" i="0">
-                <a:solidFill>
-                  <a:srgbClr val="1F2937"/>
-                </a:solidFill>
-              </a:rPr>
-              <a:t>Perhatikan Jakarta: beban per kapita 150,0/1.000 — perkuat surveilans puskesmas dan kesiapan RS saat puncak kemarau.</a:t>
-            </a:r>
-          </a:p>
+              <a:rPr sz="1600" b="0" i="0">
+                <a:solidFill>
+                  <a:srgbClr val="2A1E33"/>
+                </a:solidFill>
+                <a:latin typeface="Noto Sans"/>
+              </a:rPr>
+              <a:t>Perhatikan Jakarta: beban per kapita 150,0/1.000 - perkuat surveilans puskesmas dan kesiapan RS saat puncak kemarau.</a:t>
+            </a:r>
+          </a:p>
+        </p:txBody>
+      </p:sp>
+      <p:sp>
+        <p:nvSpPr>
+          <p:cNvPr id="5" name="TextBox 4"/>
+          <p:cNvSpPr txBox="1"/>
+          <p:nvPr/>
+        </p:nvSpPr>
+        <p:spPr>
+          <a:xfrm>
+            <a:off x="6355080" y="1554480"/>
+            <a:ext cx="5166360" cy="4754880"/>
+          </a:xfrm>
+          <a:prstGeom prst="rect">
+            <a:avLst/>
+          </a:prstGeom>
+          <a:noFill/>
+        </p:spPr>
+        <p:txBody>
+          <a:bodyPr wrap="square">
+            <a:spAutoFit/>
+          </a:bodyPr>
+          <a:lstStyle/>
           <a:p>
             <a:pPr marL="171450" indent="-171450">
+              <a:lnSpc>
+                <a:spcPct val="112000"/>
+              </a:lnSpc>
               <a:spcBef>
                 <a:spcPts val="200"/>
               </a:spcBef>
@@ -5743,16 +6283,20 @@
               <a:buChar char="•"/>
             </a:pPr>
             <a:r>
-              <a:rPr sz="1700" b="0" i="0">
-                <a:solidFill>
-                  <a:srgbClr val="1F2937"/>
-                </a:solidFill>
+              <a:rPr sz="1600" b="0" i="0">
+                <a:solidFill>
+                  <a:srgbClr val="2A1E33"/>
+                </a:solidFill>
+                <a:latin typeface="Noto Sans"/>
               </a:rPr>
               <a:t>Mulai sebelum kemarau: laporan sudah &gt;400 ribu/minggu sejak minggu ke-27.</a:t>
             </a:r>
           </a:p>
           <a:p>
             <a:pPr marL="171450" indent="-171450">
+              <a:lnSpc>
+                <a:spcPct val="112000"/>
+              </a:lnSpc>
               <a:spcBef>
                 <a:spcPts val="200"/>
               </a:spcBef>
@@ -5762,10 +6306,11 @@
               <a:buChar char="•"/>
             </a:pPr>
             <a:r>
-              <a:rPr sz="1700" b="0" i="0">
-                <a:solidFill>
-                  <a:srgbClr val="1F2937"/>
-                </a:solidFill>
+              <a:rPr sz="1600" b="0" i="0">
+                <a:solidFill>
+                  <a:srgbClr val="2A1E33"/>
+                </a:solidFill>
+                <a:latin typeface="Noto Sans"/>
               </a:rPr>
               <a:t>Perbaiki transparansi data: publikasikan tabel provinsi lengkap dan deret mingguan SKDR dalam format terbuka.</a:t>
             </a:r>

--- a/Portofolio-Analisis-ISPA-Indonesia.pptx
+++ b/Portofolio-Analisis-ISPA-Indonesia.pptx
@@ -3107,17 +3107,267 @@
       <p:grpSpPr/>
       <p:sp>
         <p:nvSpPr>
-          <p:cNvPr id="2" name="Rectangle 1"/>
-          <p:cNvSpPr/>
-          <p:nvPr/>
-        </p:nvSpPr>
-        <p:spPr>
-          <a:xfrm>
-            <a:off x="0" y="0"/>
-            <a:ext cx="201168" cy="6858000"/>
+          <p:cNvPr id="2" name="TextBox 1"/>
+          <p:cNvSpPr txBox="1"/>
+          <p:nvPr/>
+        </p:nvSpPr>
+        <p:spPr>
+          <a:xfrm>
+            <a:off x="502920" y="868680"/>
+            <a:ext cx="6400800" cy="2011680"/>
           </a:xfrm>
           <a:prstGeom prst="rect">
             <a:avLst/>
+          </a:prstGeom>
+          <a:noFill/>
+        </p:spPr>
+        <p:txBody>
+          <a:bodyPr wrap="square" anchor="t" lIns="0" rIns="0" tIns="0" bIns="0">
+            <a:spAutoFit/>
+          </a:bodyPr>
+          <a:lstStyle/>
+          <a:p>
+            <a:pPr>
+              <a:lnSpc>
+                <a:spcPct val="105000"/>
+              </a:lnSpc>
+              <a:spcBef>
+                <a:spcPts val="0"/>
+              </a:spcBef>
+              <a:spcAft>
+                <a:spcPts val="0"/>
+              </a:spcAft>
+            </a:pPr>
+            <a:r>
+              <a:rPr sz="3800" b="1">
+                <a:solidFill>
+                  <a:srgbClr val="2A1E33"/>
+                </a:solidFill>
+                <a:latin typeface="Noto Sans"/>
+              </a:rPr>
+              <a:t>Analisis ISPA</a:t>
+            </a:r>
+          </a:p>
+          <a:p>
+            <a:pPr>
+              <a:lnSpc>
+                <a:spcPct val="105000"/>
+              </a:lnSpc>
+              <a:spcBef>
+                <a:spcPts val="0"/>
+              </a:spcBef>
+              <a:spcAft>
+                <a:spcPts val="0"/>
+              </a:spcAft>
+            </a:pPr>
+            <a:r>
+              <a:rPr sz="3800" b="1">
+                <a:solidFill>
+                  <a:srgbClr val="5E2A72"/>
+                </a:solidFill>
+                <a:latin typeface="Noto Sans"/>
+              </a:rPr>
+              <a:t>Indonesia 2026</a:t>
+            </a:r>
+          </a:p>
+        </p:txBody>
+      </p:sp>
+      <p:sp>
+        <p:nvSpPr>
+          <p:cNvPr id="3" name="TextBox 2"/>
+          <p:cNvSpPr txBox="1"/>
+          <p:nvPr/>
+        </p:nvSpPr>
+        <p:spPr>
+          <a:xfrm>
+            <a:off x="502920" y="2606040"/>
+            <a:ext cx="5852160" cy="1188720"/>
+          </a:xfrm>
+          <a:prstGeom prst="rect">
+            <a:avLst/>
+          </a:prstGeom>
+          <a:noFill/>
+        </p:spPr>
+        <p:txBody>
+          <a:bodyPr wrap="square" anchor="t" lIns="0" rIns="0" tIns="0" bIns="0">
+            <a:spAutoFit/>
+          </a:bodyPr>
+          <a:lstStyle/>
+          <a:p>
+            <a:pPr>
+              <a:lnSpc>
+                <a:spcPct val="113000"/>
+              </a:lnSpc>
+              <a:spcBef>
+                <a:spcPts val="0"/>
+              </a:spcBef>
+              <a:spcAft>
+                <a:spcPts val="0"/>
+              </a:spcAft>
+            </a:pPr>
+            <a:r>
+              <a:rPr sz="1750" b="0">
+                <a:solidFill>
+                  <a:srgbClr val="2A1E33"/>
+                </a:solidFill>
+                <a:latin typeface="Noto Sans"/>
+              </a:rPr>
+              <a:t>Lonjakan kasus, sebaran provinsi, dan dampak karhutla dan kualitas udara.</a:t>
+            </a:r>
+          </a:p>
+        </p:txBody>
+      </p:sp>
+      <p:sp>
+        <p:nvSpPr>
+          <p:cNvPr id="4" name="TextBox 3"/>
+          <p:cNvSpPr txBox="1"/>
+          <p:nvPr/>
+        </p:nvSpPr>
+        <p:spPr>
+          <a:xfrm>
+            <a:off x="502920" y="4114800"/>
+            <a:ext cx="5943600" cy="914400"/>
+          </a:xfrm>
+          <a:prstGeom prst="rect">
+            <a:avLst/>
+          </a:prstGeom>
+          <a:noFill/>
+        </p:spPr>
+        <p:txBody>
+          <a:bodyPr wrap="square" anchor="t" lIns="0" rIns="0" tIns="0" bIns="0">
+            <a:spAutoFit/>
+          </a:bodyPr>
+          <a:lstStyle/>
+          <a:p>
+            <a:pPr>
+              <a:lnSpc>
+                <a:spcPct val="113000"/>
+              </a:lnSpc>
+              <a:spcBef>
+                <a:spcPts val="0"/>
+              </a:spcBef>
+              <a:spcAft>
+                <a:spcPts val="0"/>
+              </a:spcAft>
+            </a:pPr>
+            <a:r>
+              <a:rPr sz="1300" b="0">
+                <a:solidFill>
+                  <a:srgbClr val="2A1E33"/>
+                </a:solidFill>
+                <a:latin typeface="Noto Sans"/>
+              </a:rPr>
+              <a:t>Data kompilasi dari angka resmi Kemenkes, SKDR, dan ISPU: setiap angka dicatat sumber dan tanggal publikasinya.</a:t>
+            </a:r>
+          </a:p>
+        </p:txBody>
+      </p:sp>
+      <p:sp>
+        <p:nvSpPr>
+          <p:cNvPr id="5" name="TextBox 4"/>
+          <p:cNvSpPr txBox="1"/>
+          <p:nvPr/>
+        </p:nvSpPr>
+        <p:spPr>
+          <a:xfrm>
+            <a:off x="502920" y="5989320"/>
+            <a:ext cx="5943600" cy="457200"/>
+          </a:xfrm>
+          <a:prstGeom prst="rect">
+            <a:avLst/>
+          </a:prstGeom>
+          <a:noFill/>
+        </p:spPr>
+        <p:txBody>
+          <a:bodyPr wrap="square" anchor="t" lIns="0" rIns="0" tIns="0" bIns="0">
+            <a:spAutoFit/>
+          </a:bodyPr>
+          <a:lstStyle/>
+          <a:p>
+            <a:pPr>
+              <a:lnSpc>
+                <a:spcPct val="113000"/>
+              </a:lnSpc>
+              <a:spcBef>
+                <a:spcPts val="0"/>
+              </a:spcBef>
+              <a:spcAft>
+                <a:spcPts val="0"/>
+              </a:spcAft>
+            </a:pPr>
+            <a:r>
+              <a:rPr sz="1400" b="1">
+                <a:solidFill>
+                  <a:srgbClr val="5E2A72"/>
+                </a:solidFill>
+                <a:latin typeface="Noto Sans"/>
+              </a:rPr>
+              <a:t>BAGHIZ ASSHIDDIQIE ARASYA</a:t>
+            </a:r>
+          </a:p>
+        </p:txBody>
+      </p:sp>
+      <p:sp>
+        <p:nvSpPr>
+          <p:cNvPr id="6" name="Rounded Rectangle 5"/>
+          <p:cNvSpPr/>
+          <p:nvPr/>
+        </p:nvSpPr>
+        <p:spPr>
+          <a:xfrm>
+            <a:off x="6885432" y="850392"/>
+            <a:ext cx="4892040" cy="4160520"/>
+          </a:xfrm>
+          <a:prstGeom prst="roundRect">
+            <a:avLst>
+              <a:gd name="adj" fmla="val 5500"/>
+            </a:avLst>
+          </a:prstGeom>
+          <a:solidFill>
+            <a:srgbClr val="8A5CA6"/>
+          </a:solidFill>
+          <a:ln>
+            <a:noFill/>
+          </a:ln>
+          <a:effectLst/>
+        </p:spPr>
+        <p:style>
+          <a:lnRef idx="1">
+            <a:schemeClr val="accent1"/>
+          </a:lnRef>
+          <a:fillRef idx="3">
+            <a:schemeClr val="accent1"/>
+          </a:fillRef>
+          <a:effectRef idx="2">
+            <a:schemeClr val="accent1"/>
+          </a:effectRef>
+          <a:fontRef idx="minor">
+            <a:schemeClr val="lt1"/>
+          </a:fontRef>
+        </p:style>
+        <p:txBody>
+          <a:bodyPr rtlCol="0" anchor="ctr"/>
+          <a:lstStyle/>
+          <a:p>
+            <a:pPr algn="ctr"/>
+          </a:p>
+        </p:txBody>
+      </p:sp>
+      <p:sp>
+        <p:nvSpPr>
+          <p:cNvPr id="7" name="Rounded Rectangle 6"/>
+          <p:cNvSpPr/>
+          <p:nvPr/>
+        </p:nvSpPr>
+        <p:spPr>
+          <a:xfrm>
+            <a:off x="6812280" y="777240"/>
+            <a:ext cx="4892040" cy="4160520"/>
+          </a:xfrm>
+          <a:prstGeom prst="roundRect">
+            <a:avLst>
+              <a:gd name="adj" fmla="val 5500"/>
+            </a:avLst>
           </a:prstGeom>
           <a:solidFill>
             <a:srgbClr val="5E2A72"/>
@@ -3151,14 +3401,14 @@
       </p:sp>
       <p:sp>
         <p:nvSpPr>
-          <p:cNvPr id="3" name="TextBox 2"/>
+          <p:cNvPr id="8" name="TextBox 7"/>
           <p:cNvSpPr txBox="1"/>
           <p:nvPr/>
         </p:nvSpPr>
         <p:spPr>
           <a:xfrm>
-            <a:off x="777240" y="1417320"/>
-            <a:ext cx="6309360" cy="2377440"/>
+            <a:off x="7269480" y="1234440"/>
+            <a:ext cx="4023360" cy="3474720"/>
           </a:xfrm>
           <a:prstGeom prst="rect">
             <a:avLst/>
@@ -3166,134 +3416,115 @@
           <a:noFill/>
         </p:spPr>
         <p:txBody>
-          <a:bodyPr wrap="square">
+          <a:bodyPr wrap="square" anchor="t" lIns="0" rIns="0" tIns="0" bIns="0">
             <a:spAutoFit/>
           </a:bodyPr>
           <a:lstStyle/>
           <a:p>
             <a:pPr>
               <a:lnSpc>
-                <a:spcPct val="105000"/>
+                <a:spcPct val="113000"/>
               </a:lnSpc>
+              <a:spcBef>
+                <a:spcPts val="0"/>
+              </a:spcBef>
               <a:spcAft>
-                <a:spcPts val="1400"/>
+                <a:spcPts val="600"/>
               </a:spcAft>
             </a:pPr>
             <a:r>
-              <a:rPr sz="4300" b="1" i="0">
-                <a:solidFill>
-                  <a:srgbClr val="2A1E33"/>
+              <a:rPr sz="1250" b="1">
+                <a:solidFill>
+                  <a:srgbClr val="F8F2E4"/>
                 </a:solidFill>
                 <a:latin typeface="Noto Sans"/>
               </a:rPr>
-              <a:t>ISPA di Indonesia 2026</a:t>
+              <a:t>TOTAL LAPORAN KASUS NASIONAL (SKDR)</a:t>
             </a:r>
           </a:p>
           <a:p>
             <a:pPr>
               <a:lnSpc>
-                <a:spcPct val="120000"/>
+                <a:spcPct val="113000"/>
               </a:lnSpc>
+              <a:spcBef>
+                <a:spcPts val="0"/>
+              </a:spcBef>
+              <a:spcAft>
+                <a:spcPts val="400"/>
+              </a:spcAft>
+            </a:pPr>
+            <a:r>
+              <a:rPr sz="5000" b="1">
+                <a:solidFill>
+                  <a:srgbClr val="EF7D1A"/>
+                </a:solidFill>
+                <a:latin typeface="Noto Sans"/>
+              </a:rPr>
+              <a:t>14.088.945</a:t>
+            </a:r>
+          </a:p>
+          <a:p>
+            <a:pPr>
+              <a:lnSpc>
+                <a:spcPct val="113000"/>
+              </a:lnSpc>
+              <a:spcBef>
+                <a:spcPts val="0"/>
+              </a:spcBef>
               <a:spcAft>
                 <a:spcPts val="800"/>
               </a:spcAft>
             </a:pPr>
             <a:r>
-              <a:rPr sz="2000" b="0" i="0">
-                <a:solidFill>
-                  <a:srgbClr val="5E2A72"/>
+              <a:rPr sz="1900" b="1">
+                <a:solidFill>
+                  <a:srgbClr val="FFFFFF"/>
                 </a:solidFill>
                 <a:latin typeface="Noto Sans"/>
               </a:rPr>
-              <a:t>Lonjakan Kasus, Sebaran Provinsi, dan Dampak Karhutla &amp; Kualitas Udara</a:t>
-            </a:r>
-          </a:p>
-        </p:txBody>
-      </p:sp>
-      <p:sp>
-        <p:nvSpPr>
-          <p:cNvPr id="4" name="TextBox 3"/>
-          <p:cNvSpPr txBox="1"/>
-          <p:nvPr/>
-        </p:nvSpPr>
-        <p:spPr>
-          <a:xfrm>
-            <a:off x="7269480" y="1554480"/>
-            <a:ext cx="4526280" cy="2651760"/>
-          </a:xfrm>
-          <a:prstGeom prst="rect">
-            <a:avLst/>
-          </a:prstGeom>
-          <a:noFill/>
-        </p:spPr>
-        <p:txBody>
-          <a:bodyPr wrap="square">
-            <a:spAutoFit/>
-          </a:bodyPr>
-          <a:lstStyle/>
+              <a:t>laporan s.d. minggu ke-38 tahun 2026</a:t>
+            </a:r>
+          </a:p>
           <a:p>
             <a:pPr>
+              <a:lnSpc>
+                <a:spcPct val="113000"/>
+              </a:lnSpc>
+              <a:spcBef>
+                <a:spcPts val="0"/>
+              </a:spcBef>
               <a:spcAft>
-                <a:spcPts val="600"/>
+                <a:spcPts val="0"/>
               </a:spcAft>
             </a:pPr>
             <a:r>
-              <a:rPr sz="5000" b="1" i="0">
-                <a:solidFill>
-                  <a:srgbClr val="5E2A72"/>
+              <a:rPr sz="1350" b="0">
+                <a:solidFill>
+                  <a:srgbClr val="F8F2E4"/>
                 </a:solidFill>
                 <a:latin typeface="Noto Sans"/>
               </a:rPr>
-              <a:t>14.088.945</a:t>
-            </a:r>
-          </a:p>
-          <a:p>
-            <a:pPr>
-              <a:spcAft>
-                <a:spcPts val="200"/>
-              </a:spcAft>
-            </a:pPr>
-            <a:r>
-              <a:rPr sz="1600" b="0" i="0">
-                <a:solidFill>
-                  <a:srgbClr val="2A1E33"/>
-                </a:solidFill>
-                <a:latin typeface="Noto Sans"/>
-              </a:rPr>
-              <a:t>laporan kasus ISPA nasional</a:t>
-            </a:r>
-          </a:p>
-          <a:p>
-            <a:pPr>
-              <a:spcAft>
-                <a:spcPts val="0"/>
-              </a:spcAft>
-            </a:pPr>
-            <a:r>
-              <a:rPr sz="1400" b="0" i="0">
-                <a:solidFill>
-                  <a:srgbClr val="6B5B74"/>
-                </a:solidFill>
-                <a:latin typeface="Noto Sans"/>
-              </a:rPr>
-              <a:t>SKDR, s.d. minggu ke-38</a:t>
-            </a:r>
-          </a:p>
-        </p:txBody>
-      </p:sp>
-      <p:sp>
-        <p:nvSpPr>
-          <p:cNvPr id="5" name="Rectangle 4"/>
+              <a:t>Laporan mingguan menembus 400 ribu sejak minggu ke-27, naik ke puncak kemarau sekitar 420 ribu per minggu.</a:t>
+            </a:r>
+          </a:p>
+        </p:txBody>
+      </p:sp>
+      <p:sp>
+        <p:nvSpPr>
+          <p:cNvPr id="9" name="Rounded Rectangle 8"/>
           <p:cNvSpPr/>
           <p:nvPr/>
         </p:nvSpPr>
         <p:spPr>
           <a:xfrm>
-            <a:off x="7269480" y="3977639"/>
-            <a:ext cx="1371600" cy="64008"/>
-          </a:xfrm>
-          <a:prstGeom prst="rect">
-            <a:avLst/>
+            <a:off x="6812280" y="5230368"/>
+            <a:ext cx="4892040" cy="713232"/>
+          </a:xfrm>
+          <a:prstGeom prst="roundRect">
+            <a:avLst>
+              <a:gd name="adj" fmla="val 5500"/>
+            </a:avLst>
           </a:prstGeom>
           <a:solidFill>
             <a:srgbClr val="EF7D1A"/>
@@ -3327,14 +3558,14 @@
       </p:sp>
       <p:sp>
         <p:nvSpPr>
-          <p:cNvPr id="6" name="TextBox 5"/>
+          <p:cNvPr id="10" name="TextBox 9"/>
           <p:cNvSpPr txBox="1"/>
           <p:nvPr/>
         </p:nvSpPr>
         <p:spPr>
           <a:xfrm>
-            <a:off x="777240" y="5120640"/>
-            <a:ext cx="10607040" cy="1097280"/>
+            <a:off x="7086600" y="5358384"/>
+            <a:ext cx="4434840" cy="502920"/>
           </a:xfrm>
           <a:prstGeom prst="rect">
             <a:avLst/>
@@ -3342,79 +3573,30 @@
           <a:noFill/>
         </p:spPr>
         <p:txBody>
-          <a:bodyPr wrap="square">
+          <a:bodyPr wrap="square" anchor="t" lIns="0" rIns="0" tIns="0" bIns="0">
             <a:spAutoFit/>
           </a:bodyPr>
           <a:lstStyle/>
           <a:p>
             <a:pPr>
+              <a:lnSpc>
+                <a:spcPct val="113000"/>
+              </a:lnSpc>
+              <a:spcBef>
+                <a:spcPts val="0"/>
+              </a:spcBef>
               <a:spcAft>
-                <a:spcPts val="500"/>
+                <a:spcPts val="0"/>
               </a:spcAft>
             </a:pPr>
             <a:r>
-              <a:rPr sz="1900" b="1" i="0">
-                <a:solidFill>
-                  <a:srgbClr val="2A1E33"/>
+              <a:rPr sz="1250" b="1">
+                <a:solidFill>
+                  <a:srgbClr val="FFFFFF"/>
                 </a:solidFill>
                 <a:latin typeface="Noto Sans"/>
               </a:rPr>
-              <a:t>BAGHIZ ASSHIDDIQIE ARASYA</a:t>
-            </a:r>
-          </a:p>
-          <a:p>
-            <a:pPr>
-              <a:spcAft>
-                <a:spcPts val="0"/>
-              </a:spcAft>
-            </a:pPr>
-            <a:r>
-              <a:rPr sz="1500" b="0" i="0">
-                <a:solidFill>
-                  <a:srgbClr val="6B5B74"/>
-                </a:solidFill>
-                <a:latin typeface="Noto Sans"/>
-              </a:rPr>
-              <a:t>Analisis Data Kesehatan Masyarakat  •  SQL + Python  •  Oktober 2026</a:t>
-            </a:r>
-          </a:p>
-        </p:txBody>
-      </p:sp>
-      <p:sp>
-        <p:nvSpPr>
-          <p:cNvPr id="7" name="TextBox 6"/>
-          <p:cNvSpPr txBox="1"/>
-          <p:nvPr/>
-        </p:nvSpPr>
-        <p:spPr>
-          <a:xfrm>
-            <a:off x="777240" y="6263640"/>
-            <a:ext cx="10607040" cy="365760"/>
-          </a:xfrm>
-          <a:prstGeom prst="rect">
-            <a:avLst/>
-          </a:prstGeom>
-          <a:noFill/>
-        </p:spPr>
-        <p:txBody>
-          <a:bodyPr wrap="square">
-            <a:spAutoFit/>
-          </a:bodyPr>
-          <a:lstStyle/>
-          <a:p>
-            <a:pPr>
-              <a:spcAft>
-                <a:spcPts val="0"/>
-              </a:spcAft>
-            </a:pPr>
-            <a:r>
-              <a:rPr sz="1200" b="0" i="1">
-                <a:solidFill>
-                  <a:srgbClr val="6B5B74"/>
-                </a:solidFill>
-                <a:latin typeface="Noto Sans"/>
-              </a:rPr>
-              <a:t>Data kompilasi dari angka resmi Kemenkes / SKDR / ISPU - setiap angka bersumber.</a:t>
+              <a:t>Plus paket dashboard Power BI: star schema, DAX, panduan rakit.</a:t>
             </a:r>
           </a:p>
         </p:txBody>
@@ -3433,7 +3615,7 @@
     <p:bg>
       <p:bgPr>
         <a:solidFill>
-          <a:srgbClr val="5E2A72"/>
+          <a:srgbClr val="F0E8D8"/>
         </a:solidFill>
         <a:effectLst/>
       </p:bgPr>
@@ -3447,17 +3629,64 @@
       <p:grpSpPr/>
       <p:sp>
         <p:nvSpPr>
-          <p:cNvPr id="2" name="Rectangle 1"/>
-          <p:cNvSpPr/>
-          <p:nvPr/>
-        </p:nvSpPr>
-        <p:spPr>
-          <a:xfrm>
-            <a:off x="777240" y="914400"/>
-            <a:ext cx="1371600" cy="64008"/>
+          <p:cNvPr id="2" name="TextBox 1"/>
+          <p:cNvSpPr txBox="1"/>
+          <p:nvPr/>
+        </p:nvSpPr>
+        <p:spPr>
+          <a:xfrm>
+            <a:off x="502920" y="384048"/>
+            <a:ext cx="11155680" cy="914400"/>
           </a:xfrm>
           <a:prstGeom prst="rect">
             <a:avLst/>
+          </a:prstGeom>
+          <a:noFill/>
+        </p:spPr>
+        <p:txBody>
+          <a:bodyPr wrap="square" anchor="t" lIns="0" rIns="0" tIns="0" bIns="0">
+            <a:spAutoFit/>
+          </a:bodyPr>
+          <a:lstStyle/>
+          <a:p>
+            <a:pPr>
+              <a:lnSpc>
+                <a:spcPct val="113000"/>
+              </a:lnSpc>
+              <a:spcBef>
+                <a:spcPts val="0"/>
+              </a:spcBef>
+              <a:spcAft>
+                <a:spcPts val="0"/>
+              </a:spcAft>
+            </a:pPr>
+            <a:r>
+              <a:rPr sz="3100" b="1">
+                <a:solidFill>
+                  <a:srgbClr val="2A1E33"/>
+                </a:solidFill>
+                <a:latin typeface="Noto Sans"/>
+              </a:rPr>
+              <a:t>Penutup</a:t>
+            </a:r>
+          </a:p>
+        </p:txBody>
+      </p:sp>
+      <p:sp>
+        <p:nvSpPr>
+          <p:cNvPr id="3" name="Rounded Rectangle 2"/>
+          <p:cNvSpPr/>
+          <p:nvPr/>
+        </p:nvSpPr>
+        <p:spPr>
+          <a:xfrm>
+            <a:off x="521207" y="1097280"/>
+            <a:ext cx="777240" cy="82296"/>
+          </a:xfrm>
+          <a:prstGeom prst="roundRect">
+            <a:avLst>
+              <a:gd name="adj" fmla="val 5500"/>
+            </a:avLst>
           </a:prstGeom>
           <a:solidFill>
             <a:srgbClr val="EF7D1A"/>
@@ -3491,14 +3720,106 @@
       </p:sp>
       <p:sp>
         <p:nvSpPr>
-          <p:cNvPr id="3" name="TextBox 2"/>
+          <p:cNvPr id="4" name="Rounded Rectangle 3"/>
+          <p:cNvSpPr/>
+          <p:nvPr/>
+        </p:nvSpPr>
+        <p:spPr>
+          <a:xfrm>
+            <a:off x="566928" y="1435608"/>
+            <a:ext cx="6720840" cy="3246120"/>
+          </a:xfrm>
+          <a:prstGeom prst="roundRect">
+            <a:avLst>
+              <a:gd name="adj" fmla="val 5500"/>
+            </a:avLst>
+          </a:prstGeom>
+          <a:solidFill>
+            <a:srgbClr val="DDCFB4"/>
+          </a:solidFill>
+          <a:ln>
+            <a:noFill/>
+          </a:ln>
+          <a:effectLst/>
+        </p:spPr>
+        <p:style>
+          <a:lnRef idx="1">
+            <a:schemeClr val="accent1"/>
+          </a:lnRef>
+          <a:fillRef idx="3">
+            <a:schemeClr val="accent1"/>
+          </a:fillRef>
+          <a:effectRef idx="2">
+            <a:schemeClr val="accent1"/>
+          </a:effectRef>
+          <a:fontRef idx="minor">
+            <a:schemeClr val="lt1"/>
+          </a:fontRef>
+        </p:style>
+        <p:txBody>
+          <a:bodyPr rtlCol="0" anchor="ctr"/>
+          <a:lstStyle/>
+          <a:p>
+            <a:pPr algn="ctr"/>
+          </a:p>
+        </p:txBody>
+      </p:sp>
+      <p:sp>
+        <p:nvSpPr>
+          <p:cNvPr id="5" name="Rounded Rectangle 4"/>
+          <p:cNvSpPr/>
+          <p:nvPr/>
+        </p:nvSpPr>
+        <p:spPr>
+          <a:xfrm>
+            <a:off x="502920" y="1371600"/>
+            <a:ext cx="6720840" cy="3246120"/>
+          </a:xfrm>
+          <a:prstGeom prst="roundRect">
+            <a:avLst>
+              <a:gd name="adj" fmla="val 5500"/>
+            </a:avLst>
+          </a:prstGeom>
+          <a:solidFill>
+            <a:srgbClr val="F8F2E4"/>
+          </a:solidFill>
+          <a:ln>
+            <a:noFill/>
+          </a:ln>
+          <a:effectLst/>
+        </p:spPr>
+        <p:style>
+          <a:lnRef idx="1">
+            <a:schemeClr val="accent1"/>
+          </a:lnRef>
+          <a:fillRef idx="3">
+            <a:schemeClr val="accent1"/>
+          </a:fillRef>
+          <a:effectRef idx="2">
+            <a:schemeClr val="accent1"/>
+          </a:effectRef>
+          <a:fontRef idx="minor">
+            <a:schemeClr val="lt1"/>
+          </a:fontRef>
+        </p:style>
+        <p:txBody>
+          <a:bodyPr rtlCol="0" anchor="ctr"/>
+          <a:lstStyle/>
+          <a:p>
+            <a:pPr algn="ctr"/>
+          </a:p>
+        </p:txBody>
+      </p:sp>
+      <p:sp>
+        <p:nvSpPr>
+          <p:cNvPr id="6" name="TextBox 5"/>
           <p:cNvSpPr txBox="1"/>
           <p:nvPr/>
         </p:nvSpPr>
         <p:spPr>
           <a:xfrm>
-            <a:off x="777240" y="1234440"/>
-            <a:ext cx="10607040" cy="731520"/>
+            <a:off x="868680" y="1691640"/>
+            <a:ext cx="6035040" cy="2697480"/>
           </a:xfrm>
           <a:prstGeom prst="rect">
             <a:avLst/>
@@ -3506,38 +3827,112 @@
           <a:noFill/>
         </p:spPr>
         <p:txBody>
-          <a:bodyPr wrap="square">
+          <a:bodyPr wrap="square" anchor="t" lIns="0" rIns="0" tIns="0" bIns="0">
             <a:spAutoFit/>
           </a:bodyPr>
           <a:lstStyle/>
           <a:p>
             <a:pPr>
+              <a:lnSpc>
+                <a:spcPct val="113000"/>
+              </a:lnSpc>
+              <a:spcBef>
+                <a:spcPts val="0"/>
+              </a:spcBef>
               <a:spcAft>
-                <a:spcPts val="0"/>
+                <a:spcPts val="800"/>
               </a:spcAft>
             </a:pPr>
             <a:r>
-              <a:rPr sz="3600" b="1" i="0">
-                <a:solidFill>
-                  <a:srgbClr val="F8F2E4"/>
+              <a:rPr sz="1600" b="1">
+                <a:solidFill>
+                  <a:srgbClr val="5E2A72"/>
                 </a:solidFill>
                 <a:latin typeface="Noto Sans"/>
               </a:rPr>
               <a:t>Kesimpulan</a:t>
             </a:r>
           </a:p>
-        </p:txBody>
-      </p:sp>
-      <p:sp>
-        <p:nvSpPr>
-          <p:cNvPr id="4" name="TextBox 3"/>
+          <a:p>
+            <a:pPr>
+              <a:lnSpc>
+                <a:spcPct val="113000"/>
+              </a:lnSpc>
+              <a:spcBef>
+                <a:spcPts val="0"/>
+              </a:spcBef>
+              <a:spcAft>
+                <a:spcPts val="0"/>
+              </a:spcAft>
+            </a:pPr>
+            <a:r>
+              <a:rPr sz="1500" b="0">
+                <a:solidFill>
+                  <a:srgbClr val="2A1E33"/>
+                </a:solidFill>
+                <a:latin typeface="Noto Sans"/>
+              </a:rPr>
+              <a:t>ISPA 2026 bukan sekadar musim batuk-pilek: 14,1 juta laporan nasional, 283.270 kasus di wilayah karhutla, dan udara sampai 6,1 kali ambang berbahaya. Data yang transparan adalah langkah pertama penanganan yang tepat.</a:t>
+            </a:r>
+          </a:p>
+        </p:txBody>
+      </p:sp>
+      <p:sp>
+        <p:nvSpPr>
+          <p:cNvPr id="7" name="Rounded Rectangle 6"/>
+          <p:cNvSpPr/>
+          <p:nvPr/>
+        </p:nvSpPr>
+        <p:spPr>
+          <a:xfrm>
+            <a:off x="7543800" y="1371600"/>
+            <a:ext cx="4142232" cy="1536192"/>
+          </a:xfrm>
+          <a:prstGeom prst="roundRect">
+            <a:avLst>
+              <a:gd name="adj" fmla="val 5500"/>
+            </a:avLst>
+          </a:prstGeom>
+          <a:solidFill>
+            <a:srgbClr val="5E2A72"/>
+          </a:solidFill>
+          <a:ln>
+            <a:noFill/>
+          </a:ln>
+          <a:effectLst/>
+        </p:spPr>
+        <p:style>
+          <a:lnRef idx="1">
+            <a:schemeClr val="accent1"/>
+          </a:lnRef>
+          <a:fillRef idx="3">
+            <a:schemeClr val="accent1"/>
+          </a:fillRef>
+          <a:effectRef idx="2">
+            <a:schemeClr val="accent1"/>
+          </a:effectRef>
+          <a:fontRef idx="minor">
+            <a:schemeClr val="lt1"/>
+          </a:fontRef>
+        </p:style>
+        <p:txBody>
+          <a:bodyPr rtlCol="0" anchor="ctr"/>
+          <a:lstStyle/>
+          <a:p>
+            <a:pPr algn="ctr"/>
+          </a:p>
+        </p:txBody>
+      </p:sp>
+      <p:sp>
+        <p:nvSpPr>
+          <p:cNvPr id="8" name="TextBox 7"/>
           <p:cNvSpPr txBox="1"/>
           <p:nvPr/>
         </p:nvSpPr>
         <p:spPr>
           <a:xfrm>
-            <a:off x="777240" y="2148840"/>
-            <a:ext cx="10424160" cy="1737360"/>
+            <a:off x="7863840" y="1572768"/>
+            <a:ext cx="3520440" cy="1188720"/>
           </a:xfrm>
           <a:prstGeom prst="rect">
             <a:avLst/>
@@ -3545,79 +3940,225 @@
           <a:noFill/>
         </p:spPr>
         <p:txBody>
-          <a:bodyPr wrap="square">
+          <a:bodyPr wrap="square" anchor="t" lIns="0" rIns="0" tIns="0" bIns="0">
             <a:spAutoFit/>
           </a:bodyPr>
           <a:lstStyle/>
           <a:p>
             <a:pPr>
               <a:lnSpc>
-                <a:spcPct val="125000"/>
+                <a:spcPct val="113000"/>
               </a:lnSpc>
+              <a:spcBef>
+                <a:spcPts val="0"/>
+              </a:spcBef>
               <a:spcAft>
                 <a:spcPts val="400"/>
               </a:spcAft>
             </a:pPr>
             <a:r>
-              <a:rPr sz="2100" b="0" i="0">
-                <a:solidFill>
-                  <a:srgbClr val="F8F2E4"/>
+              <a:rPr sz="1450" b="1">
+                <a:solidFill>
+                  <a:srgbClr val="EF7D1A"/>
                 </a:solidFill>
                 <a:latin typeface="Noto Sans"/>
               </a:rPr>
-              <a:t>ISPA 2026 bukan sekadar musim batuk-pilek: 14,1 juta laporan nasional,</a:t>
+              <a:t>Rekomendasi utama</a:t>
             </a:r>
           </a:p>
           <a:p>
             <a:pPr>
               <a:lnSpc>
-                <a:spcPct val="125000"/>
+                <a:spcPct val="113000"/>
               </a:lnSpc>
+              <a:spcBef>
+                <a:spcPts val="0"/>
+              </a:spcBef>
+              <a:spcAft>
+                <a:spcPts val="0"/>
+              </a:spcAft>
+            </a:pPr>
+            <a:r>
+              <a:rPr sz="1200" b="0">
+                <a:solidFill>
+                  <a:srgbClr val="F8F2E4"/>
+                </a:solidFill>
+                <a:latin typeface="Noto Sans"/>
+              </a:rPr>
+              <a:t>Lindungi balita di wilayah karhutla; fokus Kalsel dan Sumsel (52,6% kasus karhutla); perkuat surveilans Jakarta; mulai persiapan sebelum kemarau.</a:t>
+            </a:r>
+          </a:p>
+        </p:txBody>
+      </p:sp>
+      <p:sp>
+        <p:nvSpPr>
+          <p:cNvPr id="9" name="Rounded Rectangle 8"/>
+          <p:cNvSpPr/>
+          <p:nvPr/>
+        </p:nvSpPr>
+        <p:spPr>
+          <a:xfrm>
+            <a:off x="7543800" y="3081528"/>
+            <a:ext cx="4142232" cy="1536192"/>
+          </a:xfrm>
+          <a:prstGeom prst="roundRect">
+            <a:avLst>
+              <a:gd name="adj" fmla="val 5500"/>
+            </a:avLst>
+          </a:prstGeom>
+          <a:solidFill>
+            <a:srgbClr val="F8F2E4"/>
+          </a:solidFill>
+          <a:ln>
+            <a:noFill/>
+          </a:ln>
+          <a:effectLst/>
+        </p:spPr>
+        <p:style>
+          <a:lnRef idx="1">
+            <a:schemeClr val="accent1"/>
+          </a:lnRef>
+          <a:fillRef idx="3">
+            <a:schemeClr val="accent1"/>
+          </a:fillRef>
+          <a:effectRef idx="2">
+            <a:schemeClr val="accent1"/>
+          </a:effectRef>
+          <a:fontRef idx="minor">
+            <a:schemeClr val="lt1"/>
+          </a:fontRef>
+        </p:style>
+        <p:txBody>
+          <a:bodyPr rtlCol="0" anchor="ctr"/>
+          <a:lstStyle/>
+          <a:p>
+            <a:pPr algn="ctr"/>
+          </a:p>
+        </p:txBody>
+      </p:sp>
+      <p:sp>
+        <p:nvSpPr>
+          <p:cNvPr id="10" name="TextBox 9"/>
+          <p:cNvSpPr txBox="1"/>
+          <p:nvPr/>
+        </p:nvSpPr>
+        <p:spPr>
+          <a:xfrm>
+            <a:off x="7863840" y="3282696"/>
+            <a:ext cx="3520440" cy="1188720"/>
+          </a:xfrm>
+          <a:prstGeom prst="rect">
+            <a:avLst/>
+          </a:prstGeom>
+          <a:noFill/>
+        </p:spPr>
+        <p:txBody>
+          <a:bodyPr wrap="square" anchor="t" lIns="0" rIns="0" tIns="0" bIns="0">
+            <a:spAutoFit/>
+          </a:bodyPr>
+          <a:lstStyle/>
+          <a:p>
+            <a:pPr>
+              <a:lnSpc>
+                <a:spcPct val="113000"/>
+              </a:lnSpc>
+              <a:spcBef>
+                <a:spcPts val="0"/>
+              </a:spcBef>
               <a:spcAft>
                 <a:spcPts val="400"/>
               </a:spcAft>
             </a:pPr>
             <a:r>
-              <a:rPr sz="2100" b="0" i="0">
-                <a:solidFill>
-                  <a:srgbClr val="F8F2E4"/>
+              <a:rPr sz="1450" b="1">
+                <a:solidFill>
+                  <a:srgbClr val="5E2A72"/>
                 </a:solidFill>
                 <a:latin typeface="Noto Sans"/>
               </a:rPr>
-              <a:t>283 ribu kasus di wilayah karhutla, dan udara 6 kali ambang berbahaya.</a:t>
+              <a:t>Terbuka untuk direproduksi</a:t>
             </a:r>
           </a:p>
           <a:p>
             <a:pPr>
               <a:lnSpc>
-                <a:spcPct val="125000"/>
+                <a:spcPct val="113000"/>
               </a:lnSpc>
+              <a:spcBef>
+                <a:spcPts val="0"/>
+              </a:spcBef>
               <a:spcAft>
                 <a:spcPts val="0"/>
               </a:spcAft>
             </a:pPr>
             <a:r>
-              <a:rPr sz="2100" b="0" i="0">
-                <a:solidFill>
-                  <a:srgbClr val="F8F2E4"/>
+              <a:rPr sz="1200" b="0">
+                <a:solidFill>
+                  <a:srgbClr val="2A1E33"/>
                 </a:solidFill>
                 <a:latin typeface="Noto Sans"/>
               </a:rPr>
-              <a:t>Data yang transparan adalah langkah pertama penanganan yang tepat.</a:t>
-            </a:r>
-          </a:p>
-        </p:txBody>
-      </p:sp>
-      <p:sp>
-        <p:nvSpPr>
-          <p:cNvPr id="5" name="TextBox 4"/>
+              <a:t>Dataset kompilasi dan sumber per angka terbuka di repo, lengkap dengan notebook analisis dan query SQL.</a:t>
+            </a:r>
+          </a:p>
+        </p:txBody>
+      </p:sp>
+      <p:sp>
+        <p:nvSpPr>
+          <p:cNvPr id="11" name="Rounded Rectangle 10"/>
+          <p:cNvSpPr/>
+          <p:nvPr/>
+        </p:nvSpPr>
+        <p:spPr>
+          <a:xfrm>
+            <a:off x="502920" y="4892040"/>
+            <a:ext cx="11183112" cy="1463040"/>
+          </a:xfrm>
+          <a:prstGeom prst="roundRect">
+            <a:avLst>
+              <a:gd name="adj" fmla="val 5500"/>
+            </a:avLst>
+          </a:prstGeom>
+          <a:solidFill>
+            <a:srgbClr val="5E2A72"/>
+          </a:solidFill>
+          <a:ln>
+            <a:noFill/>
+          </a:ln>
+          <a:effectLst/>
+        </p:spPr>
+        <p:style>
+          <a:lnRef idx="1">
+            <a:schemeClr val="accent1"/>
+          </a:lnRef>
+          <a:fillRef idx="3">
+            <a:schemeClr val="accent1"/>
+          </a:fillRef>
+          <a:effectRef idx="2">
+            <a:schemeClr val="accent1"/>
+          </a:effectRef>
+          <a:fontRef idx="minor">
+            <a:schemeClr val="lt1"/>
+          </a:fontRef>
+        </p:style>
+        <p:txBody>
+          <a:bodyPr rtlCol="0" anchor="ctr"/>
+          <a:lstStyle/>
+          <a:p>
+            <a:pPr algn="ctr"/>
+          </a:p>
+        </p:txBody>
+      </p:sp>
+      <p:sp>
+        <p:nvSpPr>
+          <p:cNvPr id="12" name="TextBox 11"/>
           <p:cNvSpPr txBox="1"/>
           <p:nvPr/>
         </p:nvSpPr>
         <p:spPr>
           <a:xfrm>
-            <a:off x="777240" y="4343400"/>
-            <a:ext cx="10607040" cy="1371600"/>
+            <a:off x="914400" y="5193792"/>
+            <a:ext cx="6949440" cy="914400"/>
           </a:xfrm>
           <a:prstGeom prst="rect">
             <a:avLst/>
@@ -3625,95 +4166,97 @@
           <a:noFill/>
         </p:spPr>
         <p:txBody>
-          <a:bodyPr wrap="square">
+          <a:bodyPr wrap="square" anchor="t" lIns="0" rIns="0" tIns="0" bIns="0">
             <a:spAutoFit/>
           </a:bodyPr>
           <a:lstStyle/>
           <a:p>
             <a:pPr>
-              <a:spcAft>
-                <a:spcPts val="600"/>
-              </a:spcAft>
-            </a:pPr>
-            <a:r>
-              <a:rPr sz="2800" b="1" i="0">
-                <a:solidFill>
-                  <a:srgbClr val="F8F2E4"/>
-                </a:solidFill>
-                <a:latin typeface="Noto Sans"/>
-              </a:rPr>
-              <a:t>BAGHIZ ASSHIDDIQIE ARASYA</a:t>
-            </a:r>
-          </a:p>
-          <a:p>
-            <a:pPr>
-              <a:spcAft>
-                <a:spcPts val="0"/>
-              </a:spcAft>
-            </a:pPr>
-            <a:r>
-              <a:rPr sz="1600" b="0" i="0">
-                <a:solidFill>
-                  <a:srgbClr val="F8F2E4"/>
-                </a:solidFill>
-                <a:latin typeface="Noto Sans"/>
-              </a:rPr>
-              <a:t>github.com/baghizash/ispa-indonesia-2026-analysis</a:t>
-            </a:r>
-          </a:p>
-        </p:txBody>
-      </p:sp>
-      <p:sp>
-        <p:nvSpPr>
-          <p:cNvPr id="6" name="TextBox 5"/>
-          <p:cNvSpPr txBox="1"/>
-          <p:nvPr/>
-        </p:nvSpPr>
-        <p:spPr>
-          <a:xfrm>
-            <a:off x="777240" y="5806440"/>
-            <a:ext cx="10607040" cy="731520"/>
-          </a:xfrm>
-          <a:prstGeom prst="rect">
-            <a:avLst/>
-          </a:prstGeom>
-          <a:noFill/>
-        </p:spPr>
-        <p:txBody>
-          <a:bodyPr wrap="square">
-            <a:spAutoFit/>
-          </a:bodyPr>
-          <a:lstStyle/>
-          <a:p>
-            <a:pPr>
+              <a:lnSpc>
+                <a:spcPct val="113000"/>
+              </a:lnSpc>
+              <a:spcBef>
+                <a:spcPts val="0"/>
+              </a:spcBef>
               <a:spcAft>
                 <a:spcPts val="300"/>
               </a:spcAft>
             </a:pPr>
             <a:r>
-              <a:rPr sz="1400" b="0" i="0">
-                <a:solidFill>
-                  <a:srgbClr val="DDD0EC"/>
+              <a:rPr sz="2300" b="1">
+                <a:solidFill>
+                  <a:srgbClr val="FFFFFF"/>
                 </a:solidFill>
                 <a:latin typeface="Noto Sans"/>
               </a:rPr>
-              <a:t>Buka repo-nya untuk melihat analisis lengkap, query SQL, dan sumber data per angka.</a:t>
+              <a:t>BAGHIZ ASSHIDDIQIE ARASYA</a:t>
             </a:r>
           </a:p>
           <a:p>
             <a:pPr>
+              <a:lnSpc>
+                <a:spcPct val="113000"/>
+              </a:lnSpc>
+              <a:spcBef>
+                <a:spcPts val="0"/>
+              </a:spcBef>
               <a:spcAft>
                 <a:spcPts val="0"/>
               </a:spcAft>
             </a:pPr>
             <a:r>
-              <a:rPr sz="1200" b="0" i="1">
-                <a:solidFill>
-                  <a:srgbClr val="DDD0EC"/>
+              <a:rPr sz="1350" b="0">
+                <a:solidFill>
+                  <a:srgbClr val="EF7D1A"/>
                 </a:solidFill>
                 <a:latin typeface="Noto Sans"/>
               </a:rPr>
-              <a:t>Dataset kompilasi dari angka resmi yang dipublikasikan - lihat README untuk batasan dan caveat.</a:t>
+              <a:t>github.com/baghizash/ispa-indonesia-2026-analysis</a:t>
+            </a:r>
+          </a:p>
+        </p:txBody>
+      </p:sp>
+      <p:sp>
+        <p:nvSpPr>
+          <p:cNvPr id="13" name="TextBox 12"/>
+          <p:cNvSpPr txBox="1"/>
+          <p:nvPr/>
+        </p:nvSpPr>
+        <p:spPr>
+          <a:xfrm>
+            <a:off x="8138160" y="5321808"/>
+            <a:ext cx="3154680" cy="777240"/>
+          </a:xfrm>
+          <a:prstGeom prst="rect">
+            <a:avLst/>
+          </a:prstGeom>
+          <a:noFill/>
+        </p:spPr>
+        <p:txBody>
+          <a:bodyPr wrap="square" anchor="t" lIns="0" rIns="0" tIns="0" bIns="0">
+            <a:spAutoFit/>
+          </a:bodyPr>
+          <a:lstStyle/>
+          <a:p>
+            <a:pPr>
+              <a:lnSpc>
+                <a:spcPct val="113000"/>
+              </a:lnSpc>
+              <a:spcBef>
+                <a:spcPts val="0"/>
+              </a:spcBef>
+              <a:spcAft>
+                <a:spcPts val="0"/>
+              </a:spcAft>
+            </a:pPr>
+            <a:r>
+              <a:rPr sz="1250" b="0">
+                <a:solidFill>
+                  <a:srgbClr val="F8F2E4"/>
+                </a:solidFill>
+                <a:latin typeface="Noto Sans"/>
+              </a:rPr>
+              <a:t>Terima kasih. Silakan jelajahi repo dan dashboardnya, semua angka terbuka untuk dicek ulang.</a:t>
             </a:r>
           </a:p>
         </p:txBody>
@@ -3746,17 +4289,64 @@
       <p:grpSpPr/>
       <p:sp>
         <p:nvSpPr>
-          <p:cNvPr id="2" name="Rectangle 1"/>
-          <p:cNvSpPr/>
-          <p:nvPr/>
-        </p:nvSpPr>
-        <p:spPr>
-          <a:xfrm>
-            <a:off x="685800" y="566928"/>
-            <a:ext cx="146304" cy="146304"/>
+          <p:cNvPr id="2" name="TextBox 1"/>
+          <p:cNvSpPr txBox="1"/>
+          <p:nvPr/>
+        </p:nvSpPr>
+        <p:spPr>
+          <a:xfrm>
+            <a:off x="502920" y="384048"/>
+            <a:ext cx="11155680" cy="914400"/>
           </a:xfrm>
           <a:prstGeom prst="rect">
             <a:avLst/>
+          </a:prstGeom>
+          <a:noFill/>
+        </p:spPr>
+        <p:txBody>
+          <a:bodyPr wrap="square" anchor="t" lIns="0" rIns="0" tIns="0" bIns="0">
+            <a:spAutoFit/>
+          </a:bodyPr>
+          <a:lstStyle/>
+          <a:p>
+            <a:pPr>
+              <a:lnSpc>
+                <a:spcPct val="113000"/>
+              </a:lnSpc>
+              <a:spcBef>
+                <a:spcPts val="0"/>
+              </a:spcBef>
+              <a:spcAft>
+                <a:spcPts val="0"/>
+              </a:spcAft>
+            </a:pPr>
+            <a:r>
+              <a:rPr sz="3100" b="1">
+                <a:solidFill>
+                  <a:srgbClr val="2A1E33"/>
+                </a:solidFill>
+                <a:latin typeface="Noto Sans"/>
+              </a:rPr>
+              <a:t>Mengapa ISPA 2026 Mendesak?</a:t>
+            </a:r>
+          </a:p>
+        </p:txBody>
+      </p:sp>
+      <p:sp>
+        <p:nvSpPr>
+          <p:cNvPr id="3" name="Rounded Rectangle 2"/>
+          <p:cNvSpPr/>
+          <p:nvPr/>
+        </p:nvSpPr>
+        <p:spPr>
+          <a:xfrm>
+            <a:off x="521207" y="1097280"/>
+            <a:ext cx="777240" cy="82296"/>
+          </a:xfrm>
+          <a:prstGeom prst="roundRect">
+            <a:avLst>
+              <a:gd name="adj" fmla="val 5500"/>
+            </a:avLst>
           </a:prstGeom>
           <a:solidFill>
             <a:srgbClr val="EF7D1A"/>
@@ -3790,14 +4380,106 @@
       </p:sp>
       <p:sp>
         <p:nvSpPr>
-          <p:cNvPr id="3" name="TextBox 2"/>
+          <p:cNvPr id="4" name="Rounded Rectangle 3"/>
+          <p:cNvSpPr/>
+          <p:nvPr/>
+        </p:nvSpPr>
+        <p:spPr>
+          <a:xfrm>
+            <a:off x="566928" y="1481328"/>
+            <a:ext cx="6903720" cy="4206240"/>
+          </a:xfrm>
+          <a:prstGeom prst="roundRect">
+            <a:avLst>
+              <a:gd name="adj" fmla="val 5500"/>
+            </a:avLst>
+          </a:prstGeom>
+          <a:solidFill>
+            <a:srgbClr val="DDCFB4"/>
+          </a:solidFill>
+          <a:ln>
+            <a:noFill/>
+          </a:ln>
+          <a:effectLst/>
+        </p:spPr>
+        <p:style>
+          <a:lnRef idx="1">
+            <a:schemeClr val="accent1"/>
+          </a:lnRef>
+          <a:fillRef idx="3">
+            <a:schemeClr val="accent1"/>
+          </a:fillRef>
+          <a:effectRef idx="2">
+            <a:schemeClr val="accent1"/>
+          </a:effectRef>
+          <a:fontRef idx="minor">
+            <a:schemeClr val="lt1"/>
+          </a:fontRef>
+        </p:style>
+        <p:txBody>
+          <a:bodyPr rtlCol="0" anchor="ctr"/>
+          <a:lstStyle/>
+          <a:p>
+            <a:pPr algn="ctr"/>
+          </a:p>
+        </p:txBody>
+      </p:sp>
+      <p:sp>
+        <p:nvSpPr>
+          <p:cNvPr id="5" name="Rounded Rectangle 4"/>
+          <p:cNvSpPr/>
+          <p:nvPr/>
+        </p:nvSpPr>
+        <p:spPr>
+          <a:xfrm>
+            <a:off x="502920" y="1417320"/>
+            <a:ext cx="6903720" cy="4206240"/>
+          </a:xfrm>
+          <a:prstGeom prst="roundRect">
+            <a:avLst>
+              <a:gd name="adj" fmla="val 5500"/>
+            </a:avLst>
+          </a:prstGeom>
+          <a:solidFill>
+            <a:srgbClr val="F8F2E4"/>
+          </a:solidFill>
+          <a:ln>
+            <a:noFill/>
+          </a:ln>
+          <a:effectLst/>
+        </p:spPr>
+        <p:style>
+          <a:lnRef idx="1">
+            <a:schemeClr val="accent1"/>
+          </a:lnRef>
+          <a:fillRef idx="3">
+            <a:schemeClr val="accent1"/>
+          </a:fillRef>
+          <a:effectRef idx="2">
+            <a:schemeClr val="accent1"/>
+          </a:effectRef>
+          <a:fontRef idx="minor">
+            <a:schemeClr val="lt1"/>
+          </a:fontRef>
+        </p:style>
+        <p:txBody>
+          <a:bodyPr rtlCol="0" anchor="ctr"/>
+          <a:lstStyle/>
+          <a:p>
+            <a:pPr algn="ctr"/>
+          </a:p>
+        </p:txBody>
+      </p:sp>
+      <p:sp>
+        <p:nvSpPr>
+          <p:cNvPr id="6" name="TextBox 5"/>
           <p:cNvSpPr txBox="1"/>
           <p:nvPr/>
         </p:nvSpPr>
         <p:spPr>
           <a:xfrm>
-            <a:off x="1005840" y="347472"/>
-            <a:ext cx="10607040" cy="777240"/>
+            <a:off x="868680" y="1783080"/>
+            <a:ext cx="6217920" cy="3566160"/>
           </a:xfrm>
           <a:prstGeom prst="rect">
             <a:avLst/>
@@ -3805,200 +4487,360 @@
           <a:noFill/>
         </p:spPr>
         <p:txBody>
-          <a:bodyPr wrap="square">
+          <a:bodyPr wrap="square" anchor="t" lIns="0" rIns="0" tIns="0" bIns="0">
             <a:spAutoFit/>
           </a:bodyPr>
           <a:lstStyle/>
           <a:p>
             <a:pPr>
-              <a:spcAft>
-                <a:spcPts val="0"/>
-              </a:spcAft>
-            </a:pPr>
-            <a:r>
-              <a:rPr sz="3200" b="1" i="0">
-                <a:solidFill>
-                  <a:srgbClr val="2A1E33"/>
-                </a:solidFill>
-                <a:latin typeface="Noto Sans"/>
-              </a:rPr>
-              <a:t>Mengapa ISPA 2026 Mendesak?</a:t>
-            </a:r>
-          </a:p>
-        </p:txBody>
-      </p:sp>
-      <p:sp>
-        <p:nvSpPr>
-          <p:cNvPr id="4" name="TextBox 3"/>
-          <p:cNvSpPr txBox="1"/>
-          <p:nvPr/>
-        </p:nvSpPr>
-        <p:spPr>
-          <a:xfrm>
-            <a:off x="685800" y="1463040"/>
-            <a:ext cx="5166360" cy="4846320"/>
-          </a:xfrm>
-          <a:prstGeom prst="rect">
-            <a:avLst/>
-          </a:prstGeom>
-          <a:noFill/>
-        </p:spPr>
-        <p:txBody>
-          <a:bodyPr wrap="square">
-            <a:spAutoFit/>
-          </a:bodyPr>
-          <a:lstStyle/>
-          <a:p>
-            <a:pPr marL="171450" indent="-171450">
               <a:lnSpc>
-                <a:spcPct val="112000"/>
+                <a:spcPct val="113000"/>
               </a:lnSpc>
               <a:spcBef>
-                <a:spcPts val="200"/>
+                <a:spcPts val="0"/>
               </a:spcBef>
               <a:spcAft>
                 <a:spcPts val="1000"/>
               </a:spcAft>
-              <a:buChar char="•"/>
             </a:pPr>
             <a:r>
-              <a:rPr sz="1600" b="0" i="0">
+              <a:rPr sz="1550" b="0">
                 <a:solidFill>
                   <a:srgbClr val="2A1E33"/>
                 </a:solidFill>
                 <a:latin typeface="Noto Sans"/>
               </a:rPr>
-              <a:t>ISPA adalah infeksi saluran pernapasan akut: batuk, pilek, sesak napas.</a:t>
-            </a:r>
-          </a:p>
-          <a:p>
-            <a:pPr marL="171450" indent="-171450">
+              <a:t>ISPA adalah infeksi saluran pernapasan akut: batuk, pilek, sesak napas. Penyakit yang terdengar ringan, tetapi skalanya di 2026 luar biasa besar.</a:t>
+            </a:r>
+          </a:p>
+          <a:p>
+            <a:pPr>
               <a:lnSpc>
-                <a:spcPct val="112000"/>
+                <a:spcPct val="113000"/>
               </a:lnSpc>
               <a:spcBef>
-                <a:spcPts val="200"/>
+                <a:spcPts val="0"/>
               </a:spcBef>
               <a:spcAft>
                 <a:spcPts val="1000"/>
               </a:spcAft>
-              <a:buChar char="•"/>
             </a:pPr>
             <a:r>
-              <a:rPr sz="1600" b="0" i="0">
+              <a:rPr sz="1550" b="0">
                 <a:solidFill>
                   <a:srgbClr val="2A1E33"/>
                 </a:solidFill>
                 <a:latin typeface="Noto Sans"/>
               </a:rPr>
-              <a:t>Laporan nasional 2026 tembus 14.088.945 laporan (SKDR, s.d. minggu ke-38).</a:t>
-            </a:r>
-          </a:p>
-          <a:p>
-            <a:pPr marL="171450" indent="-171450">
+              <a:t>Laporan nasional menembus 14.088.945 laporan (SKDR, s.d. minggu ke-38), dengan laporan mingguan di atas 400 ribu sejak minggu ke-27 dan puncak sekitar 420 ribu pada musim kemarau.</a:t>
+            </a:r>
+          </a:p>
+          <a:p>
+            <a:pPr>
               <a:lnSpc>
-                <a:spcPct val="112000"/>
+                <a:spcPct val="113000"/>
               </a:lnSpc>
               <a:spcBef>
-                <a:spcPts val="200"/>
+                <a:spcPts val="0"/>
               </a:spcBef>
               <a:spcAft>
                 <a:spcPts val="1000"/>
               </a:spcAft>
-              <a:buChar char="•"/>
             </a:pPr>
             <a:r>
-              <a:rPr sz="1600" b="0" i="0">
+              <a:rPr sz="1550" b="0">
                 <a:solidFill>
                   <a:srgbClr val="2A1E33"/>
                 </a:solidFill>
                 <a:latin typeface="Noto Sans"/>
               </a:rPr>
-              <a:t>Laporan mingguan di atas 400 ribu sejak minggu ke-27 - naik ke ~420 ribu pada puncak kemarau.</a:t>
-            </a:r>
-          </a:p>
-          <a:p>
-            <a:pPr marL="171450" indent="-171450">
+              <a:t>Di saat yang sama, kebakaran hutan dan lahan (karhutla) memburuk dan kualitas udara banyak wilayah jatuh ke kategori berbahaya. Analisis ini memetakan tiga hal: seberapa besar kasusnya, di mana konsentrasinya, dan siapa yang paling terdampak.</a:t>
+            </a:r>
+          </a:p>
+        </p:txBody>
+      </p:sp>
+      <p:sp>
+        <p:nvSpPr>
+          <p:cNvPr id="7" name="Rounded Rectangle 6"/>
+          <p:cNvSpPr/>
+          <p:nvPr/>
+        </p:nvSpPr>
+        <p:spPr>
+          <a:xfrm>
+            <a:off x="7726679" y="1417320"/>
+            <a:ext cx="3959352" cy="1207008"/>
+          </a:xfrm>
+          <a:prstGeom prst="roundRect">
+            <a:avLst>
+              <a:gd name="adj" fmla="val 5500"/>
+            </a:avLst>
+          </a:prstGeom>
+          <a:solidFill>
+            <a:srgbClr val="F8F2E4"/>
+          </a:solidFill>
+          <a:ln>
+            <a:noFill/>
+          </a:ln>
+          <a:effectLst/>
+        </p:spPr>
+        <p:style>
+          <a:lnRef idx="1">
+            <a:schemeClr val="accent1"/>
+          </a:lnRef>
+          <a:fillRef idx="3">
+            <a:schemeClr val="accent1"/>
+          </a:fillRef>
+          <a:effectRef idx="2">
+            <a:schemeClr val="accent1"/>
+          </a:effectRef>
+          <a:fontRef idx="minor">
+            <a:schemeClr val="lt1"/>
+          </a:fontRef>
+        </p:style>
+        <p:txBody>
+          <a:bodyPr rtlCol="0" anchor="ctr"/>
+          <a:lstStyle/>
+          <a:p>
+            <a:pPr algn="ctr"/>
+          </a:p>
+        </p:txBody>
+      </p:sp>
+      <p:sp>
+        <p:nvSpPr>
+          <p:cNvPr id="8" name="TextBox 7"/>
+          <p:cNvSpPr txBox="1"/>
+          <p:nvPr/>
+        </p:nvSpPr>
+        <p:spPr>
+          <a:xfrm>
+            <a:off x="8046720" y="1581912"/>
+            <a:ext cx="3383280" cy="1024128"/>
+          </a:xfrm>
+          <a:prstGeom prst="rect">
+            <a:avLst/>
+          </a:prstGeom>
+          <a:noFill/>
+        </p:spPr>
+        <p:txBody>
+          <a:bodyPr wrap="square" anchor="t" lIns="0" rIns="0" tIns="0" bIns="0">
+            <a:spAutoFit/>
+          </a:bodyPr>
+          <a:lstStyle/>
+          <a:p>
+            <a:pPr>
               <a:lnSpc>
-                <a:spcPct val="112000"/>
+                <a:spcPct val="113000"/>
               </a:lnSpc>
               <a:spcBef>
-                <a:spcPts val="200"/>
+                <a:spcPts val="0"/>
               </a:spcBef>
               <a:spcAft>
-                <a:spcPts val="1000"/>
+                <a:spcPts val="200"/>
               </a:spcAft>
-              <a:buChar char="•"/>
             </a:pPr>
             <a:r>
-              <a:rPr sz="1600" b="0" i="0">
-                <a:solidFill>
-                  <a:srgbClr val="2A1E33"/>
+              <a:rPr sz="3200" b="1">
+                <a:solidFill>
+                  <a:srgbClr val="EF7D1A"/>
                 </a:solidFill>
                 <a:latin typeface="Noto Sans"/>
               </a:rPr>
-              <a:t>Bersamaan dengan karhutla dan kualitas udara yang memburuk di Sumatra dan Kalimantan.</a:t>
-            </a:r>
-          </a:p>
-          <a:p>
-            <a:pPr marL="171450" indent="-171450">
+              <a:t>14.088.945</a:t>
+            </a:r>
+          </a:p>
+          <a:p>
+            <a:pPr>
               <a:lnSpc>
-                <a:spcPct val="112000"/>
+                <a:spcPct val="113000"/>
               </a:lnSpc>
               <a:spcBef>
-                <a:spcPts val="200"/>
+                <a:spcPts val="0"/>
               </a:spcBef>
               <a:spcAft>
-                <a:spcPts val="1000"/>
+                <a:spcPts val="0"/>
               </a:spcAft>
-              <a:buChar char="•"/>
             </a:pPr>
             <a:r>
-              <a:rPr sz="1600" b="0" i="0">
+              <a:rPr sz="1250" b="0">
                 <a:solidFill>
                   <a:srgbClr val="2A1E33"/>
                 </a:solidFill>
                 <a:latin typeface="Noto Sans"/>
               </a:rPr>
-              <a:t>Pertanyaan: seberapa besar, di mana, siapa yang paling terdampak?</a:t>
-            </a:r>
-          </a:p>
-        </p:txBody>
-      </p:sp>
-      <p:pic>
-        <p:nvPicPr>
-          <p:cNvPr id="5" name="Picture 4" descr="09_mingguan_nasional.png"/>
-          <p:cNvPicPr>
-            <a:picLocks noChangeAspect="1"/>
-          </p:cNvPicPr>
-          <p:nvPr/>
-        </p:nvPicPr>
-        <p:blipFill>
-          <a:blip r:embed="rId2"/>
-          <a:stretch>
-            <a:fillRect/>
-          </a:stretch>
-        </p:blipFill>
-        <p:spPr>
-          <a:xfrm>
-            <a:off x="6126480" y="1600200"/>
-            <a:ext cx="5394960" cy="3465576"/>
+              <a:t>laporan nasional SKDR s.d. minggu ke-38</a:t>
+            </a:r>
+          </a:p>
+        </p:txBody>
+      </p:sp>
+      <p:sp>
+        <p:nvSpPr>
+          <p:cNvPr id="9" name="Rounded Rectangle 8"/>
+          <p:cNvSpPr/>
+          <p:nvPr/>
+        </p:nvSpPr>
+        <p:spPr>
+          <a:xfrm>
+            <a:off x="7726679" y="2770632"/>
+            <a:ext cx="3959352" cy="1207008"/>
+          </a:xfrm>
+          <a:prstGeom prst="roundRect">
+            <a:avLst>
+              <a:gd name="adj" fmla="val 5500"/>
+            </a:avLst>
+          </a:prstGeom>
+          <a:solidFill>
+            <a:srgbClr val="F8F2E4"/>
+          </a:solidFill>
+          <a:ln>
+            <a:noFill/>
+          </a:ln>
+          <a:effectLst/>
+        </p:spPr>
+        <p:style>
+          <a:lnRef idx="1">
+            <a:schemeClr val="accent1"/>
+          </a:lnRef>
+          <a:fillRef idx="3">
+            <a:schemeClr val="accent1"/>
+          </a:fillRef>
+          <a:effectRef idx="2">
+            <a:schemeClr val="accent1"/>
+          </a:effectRef>
+          <a:fontRef idx="minor">
+            <a:schemeClr val="lt1"/>
+          </a:fontRef>
+        </p:style>
+        <p:txBody>
+          <a:bodyPr rtlCol="0" anchor="ctr"/>
+          <a:lstStyle/>
+          <a:p>
+            <a:pPr algn="ctr"/>
+          </a:p>
+        </p:txBody>
+      </p:sp>
+      <p:sp>
+        <p:nvSpPr>
+          <p:cNvPr id="10" name="TextBox 9"/>
+          <p:cNvSpPr txBox="1"/>
+          <p:nvPr/>
+        </p:nvSpPr>
+        <p:spPr>
+          <a:xfrm>
+            <a:off x="8046720" y="2935224"/>
+            <a:ext cx="3383280" cy="1024128"/>
           </a:xfrm>
           <a:prstGeom prst="rect">
             <a:avLst/>
           </a:prstGeom>
-        </p:spPr>
-      </p:pic>
-      <p:sp>
-        <p:nvSpPr>
-          <p:cNvPr id="6" name="TextBox 5"/>
+          <a:noFill/>
+        </p:spPr>
+        <p:txBody>
+          <a:bodyPr wrap="square" anchor="t" lIns="0" rIns="0" tIns="0" bIns="0">
+            <a:spAutoFit/>
+          </a:bodyPr>
+          <a:lstStyle/>
+          <a:p>
+            <a:pPr>
+              <a:lnSpc>
+                <a:spcPct val="113000"/>
+              </a:lnSpc>
+              <a:spcBef>
+                <a:spcPts val="0"/>
+              </a:spcBef>
+              <a:spcAft>
+                <a:spcPts val="200"/>
+              </a:spcAft>
+            </a:pPr>
+            <a:r>
+              <a:rPr sz="3200" b="1">
+                <a:solidFill>
+                  <a:srgbClr val="EF7D1A"/>
+                </a:solidFill>
+                <a:latin typeface="Noto Sans"/>
+              </a:rPr>
+              <a:t>420 ribu</a:t>
+            </a:r>
+          </a:p>
+          <a:p>
+            <a:pPr>
+              <a:lnSpc>
+                <a:spcPct val="113000"/>
+              </a:lnSpc>
+              <a:spcBef>
+                <a:spcPts val="0"/>
+              </a:spcBef>
+              <a:spcAft>
+                <a:spcPts val="0"/>
+              </a:spcAft>
+            </a:pPr>
+            <a:r>
+              <a:rPr sz="1250" b="0">
+                <a:solidFill>
+                  <a:srgbClr val="2A1E33"/>
+                </a:solidFill>
+                <a:latin typeface="Noto Sans"/>
+              </a:rPr>
+              <a:t>laporan per minggu pada puncak kemarau</a:t>
+            </a:r>
+          </a:p>
+        </p:txBody>
+      </p:sp>
+      <p:sp>
+        <p:nvSpPr>
+          <p:cNvPr id="11" name="Rounded Rectangle 10"/>
+          <p:cNvSpPr/>
+          <p:nvPr/>
+        </p:nvSpPr>
+        <p:spPr>
+          <a:xfrm>
+            <a:off x="7726679" y="4123944"/>
+            <a:ext cx="3959352" cy="1499616"/>
+          </a:xfrm>
+          <a:prstGeom prst="roundRect">
+            <a:avLst>
+              <a:gd name="adj" fmla="val 5500"/>
+            </a:avLst>
+          </a:prstGeom>
+          <a:solidFill>
+            <a:srgbClr val="5E2A72"/>
+          </a:solidFill>
+          <a:ln>
+            <a:noFill/>
+          </a:ln>
+          <a:effectLst/>
+        </p:spPr>
+        <p:style>
+          <a:lnRef idx="1">
+            <a:schemeClr val="accent1"/>
+          </a:lnRef>
+          <a:fillRef idx="3">
+            <a:schemeClr val="accent1"/>
+          </a:fillRef>
+          <a:effectRef idx="2">
+            <a:schemeClr val="accent1"/>
+          </a:effectRef>
+          <a:fontRef idx="minor">
+            <a:schemeClr val="lt1"/>
+          </a:fontRef>
+        </p:style>
+        <p:txBody>
+          <a:bodyPr rtlCol="0" anchor="ctr"/>
+          <a:lstStyle/>
+          <a:p>
+            <a:pPr algn="ctr"/>
+          </a:p>
+        </p:txBody>
+      </p:sp>
+      <p:sp>
+        <p:nvSpPr>
+          <p:cNvPr id="12" name="TextBox 11"/>
           <p:cNvSpPr txBox="1"/>
           <p:nvPr/>
         </p:nvSpPr>
         <p:spPr>
           <a:xfrm>
-            <a:off x="6126480" y="5230368"/>
-            <a:ext cx="5394960" cy="365760"/>
+            <a:off x="8046720" y="4288536"/>
+            <a:ext cx="3383280" cy="1316736"/>
           </a:xfrm>
           <a:prstGeom prst="rect">
             <a:avLst/>
@@ -4006,24 +4848,97 @@
           <a:noFill/>
         </p:spPr>
         <p:txBody>
-          <a:bodyPr wrap="square">
+          <a:bodyPr wrap="square" anchor="t" lIns="0" rIns="0" tIns="0" bIns="0">
             <a:spAutoFit/>
           </a:bodyPr>
           <a:lstStyle/>
           <a:p>
             <a:pPr>
+              <a:lnSpc>
+                <a:spcPct val="113000"/>
+              </a:lnSpc>
+              <a:spcBef>
+                <a:spcPts val="0"/>
+              </a:spcBef>
               <a:spcAft>
-                <a:spcPts val="0"/>
+                <a:spcPts val="200"/>
               </a:spcAft>
             </a:pPr>
             <a:r>
-              <a:rPr sz="1200" b="0" i="1">
-                <a:solidFill>
-                  <a:srgbClr val="6B5B74"/>
+              <a:rPr sz="3200" b="1">
+                <a:solidFill>
+                  <a:srgbClr val="EF7D1A"/>
                 </a:solidFill>
                 <a:latin typeface="Noto Sans"/>
               </a:rPr>
-              <a:t>Laporan mingguan nasional naik 5% ke puncak kemarau.</a:t>
+              <a:t>283.270</a:t>
+            </a:r>
+          </a:p>
+          <a:p>
+            <a:pPr>
+              <a:lnSpc>
+                <a:spcPct val="113000"/>
+              </a:lnSpc>
+              <a:spcBef>
+                <a:spcPts val="0"/>
+              </a:spcBef>
+              <a:spcAft>
+                <a:spcPts val="0"/>
+              </a:spcAft>
+            </a:pPr>
+            <a:r>
+              <a:rPr sz="1250" b="0">
+                <a:solidFill>
+                  <a:srgbClr val="F8F2E4"/>
+                </a:solidFill>
+                <a:latin typeface="Noto Sans"/>
+              </a:rPr>
+              <a:t>kasus pada seri pemantauan karhutla, seri terpisah dari SKDR</a:t>
+            </a:r>
+          </a:p>
+        </p:txBody>
+      </p:sp>
+      <p:sp>
+        <p:nvSpPr>
+          <p:cNvPr id="13" name="TextBox 12"/>
+          <p:cNvSpPr txBox="1"/>
+          <p:nvPr/>
+        </p:nvSpPr>
+        <p:spPr>
+          <a:xfrm>
+            <a:off x="502920" y="6355080"/>
+            <a:ext cx="11155680" cy="365760"/>
+          </a:xfrm>
+          <a:prstGeom prst="rect">
+            <a:avLst/>
+          </a:prstGeom>
+          <a:noFill/>
+        </p:spPr>
+        <p:txBody>
+          <a:bodyPr wrap="square" anchor="t" lIns="0" rIns="0" tIns="0" bIns="0">
+            <a:spAutoFit/>
+          </a:bodyPr>
+          <a:lstStyle/>
+          <a:p>
+            <a:pPr>
+              <a:lnSpc>
+                <a:spcPct val="113000"/>
+              </a:lnSpc>
+              <a:spcBef>
+                <a:spcPts val="0"/>
+              </a:spcBef>
+              <a:spcAft>
+                <a:spcPts val="0"/>
+              </a:spcAft>
+            </a:pPr>
+            <a:r>
+              <a:rPr sz="1100" b="0">
+                <a:solidFill>
+                  <a:srgbClr val="8A5CA6"/>
+                </a:solidFill>
+                <a:latin typeface="Noto Sans"/>
+              </a:rPr>
+              <a:t>Sumber data: Kemenkes, SKDR, ISPU, Dinkes DKI, dan BPS. Rincian sumber per angka ada di data/SOURCES.md pada repo.</a:t>
             </a:r>
           </a:p>
         </p:txBody>
@@ -4056,17 +4971,64 @@
       <p:grpSpPr/>
       <p:sp>
         <p:nvSpPr>
-          <p:cNvPr id="2" name="Rectangle 1"/>
-          <p:cNvSpPr/>
-          <p:nvPr/>
-        </p:nvSpPr>
-        <p:spPr>
-          <a:xfrm>
-            <a:off x="685800" y="566928"/>
-            <a:ext cx="146304" cy="146304"/>
+          <p:cNvPr id="2" name="TextBox 1"/>
+          <p:cNvSpPr txBox="1"/>
+          <p:nvPr/>
+        </p:nvSpPr>
+        <p:spPr>
+          <a:xfrm>
+            <a:off x="502920" y="384048"/>
+            <a:ext cx="11155680" cy="914400"/>
           </a:xfrm>
           <a:prstGeom prst="rect">
             <a:avLst/>
+          </a:prstGeom>
+          <a:noFill/>
+        </p:spPr>
+        <p:txBody>
+          <a:bodyPr wrap="square" anchor="t" lIns="0" rIns="0" tIns="0" bIns="0">
+            <a:spAutoFit/>
+          </a:bodyPr>
+          <a:lstStyle/>
+          <a:p>
+            <a:pPr>
+              <a:lnSpc>
+                <a:spcPct val="113000"/>
+              </a:lnSpc>
+              <a:spcBef>
+                <a:spcPts val="0"/>
+              </a:spcBef>
+              <a:spcAft>
+                <a:spcPts val="0"/>
+              </a:spcAft>
+            </a:pPr>
+            <a:r>
+              <a:rPr sz="3100" b="1">
+                <a:solidFill>
+                  <a:srgbClr val="2A1E33"/>
+                </a:solidFill>
+                <a:latin typeface="Noto Sans"/>
+              </a:rPr>
+              <a:t>Data dan Metode</a:t>
+            </a:r>
+          </a:p>
+        </p:txBody>
+      </p:sp>
+      <p:sp>
+        <p:nvSpPr>
+          <p:cNvPr id="3" name="Rounded Rectangle 2"/>
+          <p:cNvSpPr/>
+          <p:nvPr/>
+        </p:nvSpPr>
+        <p:spPr>
+          <a:xfrm>
+            <a:off x="521207" y="1097280"/>
+            <a:ext cx="777240" cy="82296"/>
+          </a:xfrm>
+          <a:prstGeom prst="roundRect">
+            <a:avLst>
+              <a:gd name="adj" fmla="val 5500"/>
+            </a:avLst>
           </a:prstGeom>
           <a:solidFill>
             <a:srgbClr val="EF7D1A"/>
@@ -4100,14 +5062,60 @@
       </p:sp>
       <p:sp>
         <p:nvSpPr>
-          <p:cNvPr id="3" name="TextBox 2"/>
+          <p:cNvPr id="4" name="Rounded Rectangle 3"/>
+          <p:cNvSpPr/>
+          <p:nvPr/>
+        </p:nvSpPr>
+        <p:spPr>
+          <a:xfrm>
+            <a:off x="502920" y="1417320"/>
+            <a:ext cx="3291840" cy="2011680"/>
+          </a:xfrm>
+          <a:prstGeom prst="roundRect">
+            <a:avLst>
+              <a:gd name="adj" fmla="val 5500"/>
+            </a:avLst>
+          </a:prstGeom>
+          <a:solidFill>
+            <a:srgbClr val="5E2A72"/>
+          </a:solidFill>
+          <a:ln>
+            <a:noFill/>
+          </a:ln>
+          <a:effectLst/>
+        </p:spPr>
+        <p:style>
+          <a:lnRef idx="1">
+            <a:schemeClr val="accent1"/>
+          </a:lnRef>
+          <a:fillRef idx="3">
+            <a:schemeClr val="accent1"/>
+          </a:fillRef>
+          <a:effectRef idx="2">
+            <a:schemeClr val="accent1"/>
+          </a:effectRef>
+          <a:fontRef idx="minor">
+            <a:schemeClr val="lt1"/>
+          </a:fontRef>
+        </p:style>
+        <p:txBody>
+          <a:bodyPr rtlCol="0" anchor="ctr"/>
+          <a:lstStyle/>
+          <a:p>
+            <a:pPr algn="ctr"/>
+          </a:p>
+        </p:txBody>
+      </p:sp>
+      <p:sp>
+        <p:nvSpPr>
+          <p:cNvPr id="5" name="TextBox 4"/>
           <p:cNvSpPr txBox="1"/>
           <p:nvPr/>
         </p:nvSpPr>
         <p:spPr>
           <a:xfrm>
-            <a:off x="1005840" y="347472"/>
-            <a:ext cx="10607040" cy="777240"/>
+            <a:off x="822960" y="1664208"/>
+            <a:ext cx="2697480" cy="1737360"/>
           </a:xfrm>
           <a:prstGeom prst="rect">
             <a:avLst/>
@@ -4115,38 +5123,112 @@
           <a:noFill/>
         </p:spPr>
         <p:txBody>
-          <a:bodyPr wrap="square">
+          <a:bodyPr wrap="square" anchor="t" lIns="0" rIns="0" tIns="0" bIns="0">
             <a:spAutoFit/>
           </a:bodyPr>
           <a:lstStyle/>
           <a:p>
             <a:pPr>
+              <a:lnSpc>
+                <a:spcPct val="113000"/>
+              </a:lnSpc>
+              <a:spcBef>
+                <a:spcPts val="0"/>
+              </a:spcBef>
               <a:spcAft>
-                <a:spcPts val="0"/>
+                <a:spcPts val="300"/>
               </a:spcAft>
             </a:pPr>
             <a:r>
-              <a:rPr sz="3200" b="1" i="0">
-                <a:solidFill>
-                  <a:srgbClr val="2A1E33"/>
+              <a:rPr sz="2800" b="1">
+                <a:solidFill>
+                  <a:srgbClr val="EF7D1A"/>
                 </a:solidFill>
                 <a:latin typeface="Noto Sans"/>
               </a:rPr>
-              <a:t>Data &amp; Metode</a:t>
-            </a:r>
-          </a:p>
-        </p:txBody>
-      </p:sp>
-      <p:sp>
-        <p:nvSpPr>
-          <p:cNvPr id="4" name="TextBox 3"/>
+              <a:t>14.088.945</a:t>
+            </a:r>
+          </a:p>
+          <a:p>
+            <a:pPr>
+              <a:lnSpc>
+                <a:spcPct val="113000"/>
+              </a:lnSpc>
+              <a:spcBef>
+                <a:spcPts val="0"/>
+              </a:spcBef>
+              <a:spcAft>
+                <a:spcPts val="0"/>
+              </a:spcAft>
+            </a:pPr>
+            <a:r>
+              <a:rPr sz="1250" b="0">
+                <a:solidFill>
+                  <a:srgbClr val="F8F2E4"/>
+                </a:solidFill>
+                <a:latin typeface="Noto Sans"/>
+              </a:rPr>
+              <a:t>total laporan nasional SKDR, seri utama analisis ini</a:t>
+            </a:r>
+          </a:p>
+        </p:txBody>
+      </p:sp>
+      <p:sp>
+        <p:nvSpPr>
+          <p:cNvPr id="6" name="Rounded Rectangle 5"/>
+          <p:cNvSpPr/>
+          <p:nvPr/>
+        </p:nvSpPr>
+        <p:spPr>
+          <a:xfrm>
+            <a:off x="502920" y="3611880"/>
+            <a:ext cx="3291840" cy="2011680"/>
+          </a:xfrm>
+          <a:prstGeom prst="roundRect">
+            <a:avLst>
+              <a:gd name="adj" fmla="val 5500"/>
+            </a:avLst>
+          </a:prstGeom>
+          <a:solidFill>
+            <a:srgbClr val="F8F2E4"/>
+          </a:solidFill>
+          <a:ln>
+            <a:noFill/>
+          </a:ln>
+          <a:effectLst/>
+        </p:spPr>
+        <p:style>
+          <a:lnRef idx="1">
+            <a:schemeClr val="accent1"/>
+          </a:lnRef>
+          <a:fillRef idx="3">
+            <a:schemeClr val="accent1"/>
+          </a:fillRef>
+          <a:effectRef idx="2">
+            <a:schemeClr val="accent1"/>
+          </a:effectRef>
+          <a:fontRef idx="minor">
+            <a:schemeClr val="lt1"/>
+          </a:fontRef>
+        </p:style>
+        <p:txBody>
+          <a:bodyPr rtlCol="0" anchor="ctr"/>
+          <a:lstStyle/>
+          <a:p>
+            <a:pPr algn="ctr"/>
+          </a:p>
+        </p:txBody>
+      </p:sp>
+      <p:sp>
+        <p:nvSpPr>
+          <p:cNvPr id="7" name="TextBox 6"/>
           <p:cNvSpPr txBox="1"/>
           <p:nvPr/>
         </p:nvSpPr>
         <p:spPr>
           <a:xfrm>
-            <a:off x="6355080" y="1463040"/>
-            <a:ext cx="5166360" cy="4846320"/>
+            <a:off x="822960" y="3858768"/>
+            <a:ext cx="2697480" cy="1737360"/>
           </a:xfrm>
           <a:prstGeom prst="rect">
             <a:avLst/>
@@ -4154,186 +5236,255 @@
           <a:noFill/>
         </p:spPr>
         <p:txBody>
-          <a:bodyPr wrap="square">
+          <a:bodyPr wrap="square" anchor="t" lIns="0" rIns="0" tIns="0" bIns="0">
             <a:spAutoFit/>
           </a:bodyPr>
           <a:lstStyle/>
           <a:p>
-            <a:pPr marL="171450" indent="-171450">
+            <a:pPr>
               <a:lnSpc>
-                <a:spcPct val="112000"/>
+                <a:spcPct val="113000"/>
               </a:lnSpc>
               <a:spcBef>
-                <a:spcPts val="200"/>
+                <a:spcPts val="0"/>
+              </a:spcBef>
+              <a:spcAft>
+                <a:spcPts val="300"/>
+              </a:spcAft>
+            </a:pPr>
+            <a:r>
+              <a:rPr sz="2800" b="1">
+                <a:solidFill>
+                  <a:srgbClr val="EF7D1A"/>
+                </a:solidFill>
+                <a:latin typeface="Noto Sans"/>
+              </a:rPr>
+              <a:t>283.270</a:t>
+            </a:r>
+          </a:p>
+          <a:p>
+            <a:pPr>
+              <a:lnSpc>
+                <a:spcPct val="113000"/>
+              </a:lnSpc>
+              <a:spcBef>
+                <a:spcPts val="0"/>
+              </a:spcBef>
+              <a:spcAft>
+                <a:spcPts val="0"/>
+              </a:spcAft>
+            </a:pPr>
+            <a:r>
+              <a:rPr sz="1250" b="0">
+                <a:solidFill>
+                  <a:srgbClr val="2A1E33"/>
+                </a:solidFill>
+                <a:latin typeface="Noto Sans"/>
+              </a:rPr>
+              <a:t>kasus seri karhutla, disimpan dan dianalisis terpisah</a:t>
+            </a:r>
+          </a:p>
+        </p:txBody>
+      </p:sp>
+      <p:sp>
+        <p:nvSpPr>
+          <p:cNvPr id="8" name="Rounded Rectangle 7"/>
+          <p:cNvSpPr/>
+          <p:nvPr/>
+        </p:nvSpPr>
+        <p:spPr>
+          <a:xfrm>
+            <a:off x="4178808" y="1481328"/>
+            <a:ext cx="7571231" cy="4206240"/>
+          </a:xfrm>
+          <a:prstGeom prst="roundRect">
+            <a:avLst>
+              <a:gd name="adj" fmla="val 5500"/>
+            </a:avLst>
+          </a:prstGeom>
+          <a:solidFill>
+            <a:srgbClr val="DDCFB4"/>
+          </a:solidFill>
+          <a:ln>
+            <a:noFill/>
+          </a:ln>
+          <a:effectLst/>
+        </p:spPr>
+        <p:style>
+          <a:lnRef idx="1">
+            <a:schemeClr val="accent1"/>
+          </a:lnRef>
+          <a:fillRef idx="3">
+            <a:schemeClr val="accent1"/>
+          </a:fillRef>
+          <a:effectRef idx="2">
+            <a:schemeClr val="accent1"/>
+          </a:effectRef>
+          <a:fontRef idx="minor">
+            <a:schemeClr val="lt1"/>
+          </a:fontRef>
+        </p:style>
+        <p:txBody>
+          <a:bodyPr rtlCol="0" anchor="ctr"/>
+          <a:lstStyle/>
+          <a:p>
+            <a:pPr algn="ctr"/>
+          </a:p>
+        </p:txBody>
+      </p:sp>
+      <p:sp>
+        <p:nvSpPr>
+          <p:cNvPr id="9" name="Rounded Rectangle 8"/>
+          <p:cNvSpPr/>
+          <p:nvPr/>
+        </p:nvSpPr>
+        <p:spPr>
+          <a:xfrm>
+            <a:off x="4114800" y="1417320"/>
+            <a:ext cx="7571231" cy="4206240"/>
+          </a:xfrm>
+          <a:prstGeom prst="roundRect">
+            <a:avLst>
+              <a:gd name="adj" fmla="val 5500"/>
+            </a:avLst>
+          </a:prstGeom>
+          <a:solidFill>
+            <a:srgbClr val="F8F2E4"/>
+          </a:solidFill>
+          <a:ln>
+            <a:noFill/>
+          </a:ln>
+          <a:effectLst/>
+        </p:spPr>
+        <p:style>
+          <a:lnRef idx="1">
+            <a:schemeClr val="accent1"/>
+          </a:lnRef>
+          <a:fillRef idx="3">
+            <a:schemeClr val="accent1"/>
+          </a:fillRef>
+          <a:effectRef idx="2">
+            <a:schemeClr val="accent1"/>
+          </a:effectRef>
+          <a:fontRef idx="minor">
+            <a:schemeClr val="lt1"/>
+          </a:fontRef>
+        </p:style>
+        <p:txBody>
+          <a:bodyPr rtlCol="0" anchor="ctr"/>
+          <a:lstStyle/>
+          <a:p>
+            <a:pPr algn="ctr"/>
+          </a:p>
+        </p:txBody>
+      </p:sp>
+      <p:sp>
+        <p:nvSpPr>
+          <p:cNvPr id="10" name="TextBox 9"/>
+          <p:cNvSpPr txBox="1"/>
+          <p:nvPr/>
+        </p:nvSpPr>
+        <p:spPr>
+          <a:xfrm>
+            <a:off x="4480560" y="1755648"/>
+            <a:ext cx="6858000" cy="3611880"/>
+          </a:xfrm>
+          <a:prstGeom prst="rect">
+            <a:avLst/>
+          </a:prstGeom>
+          <a:noFill/>
+        </p:spPr>
+        <p:txBody>
+          <a:bodyPr wrap="square" anchor="t" lIns="0" rIns="0" tIns="0" bIns="0">
+            <a:spAutoFit/>
+          </a:bodyPr>
+          <a:lstStyle/>
+          <a:p>
+            <a:pPr>
+              <a:lnSpc>
+                <a:spcPct val="113000"/>
+              </a:lnSpc>
+              <a:spcBef>
+                <a:spcPts val="0"/>
               </a:spcBef>
               <a:spcAft>
                 <a:spcPts val="1000"/>
               </a:spcAft>
-              <a:buChar char="•"/>
             </a:pPr>
             <a:r>
-              <a:rPr sz="1600" b="0" i="0">
+              <a:rPr sz="1500" b="0">
                 <a:solidFill>
                   <a:srgbClr val="2A1E33"/>
                 </a:solidFill>
                 <a:latin typeface="Noto Sans"/>
               </a:rPr>
-              <a:t>Dataset KOMPILASI dari angka resmi yang dipublikasikan (Kemenkes, SKDR, ISPU, Dinkes DKI, BPS).</a:t>
-            </a:r>
-          </a:p>
-          <a:p>
-            <a:pPr marL="171450" indent="-171450">
+              <a:t>Dataset ini adalah KOMPILASI dari angka resmi yang dipublikasikan (Kemenkes, SKDR, ISPU, Dinkes DKI, BPS). Tidak ada file CSV mentah ISPA di data.go.id atau Jakarta Open Data, jadi setiap angka dicatat sumber dan tanggal publikasinya.</a:t>
+            </a:r>
+          </a:p>
+          <a:p>
+            <a:pPr>
               <a:lnSpc>
-                <a:spcPct val="112000"/>
+                <a:spcPct val="113000"/>
               </a:lnSpc>
               <a:spcBef>
-                <a:spcPts val="200"/>
+                <a:spcPts val="0"/>
               </a:spcBef>
               <a:spcAft>
                 <a:spcPts val="1000"/>
               </a:spcAft>
-              <a:buChar char="•"/>
             </a:pPr>
             <a:r>
-              <a:rPr sz="1600" b="0" i="0">
+              <a:rPr sz="1500" b="0">
                 <a:solidFill>
                   <a:srgbClr val="2A1E33"/>
                 </a:solidFill>
                 <a:latin typeface="Noto Sans"/>
               </a:rPr>
-              <a:t>Tidak ada file CSV mentah ISPA di data.go.id / Jakarta Open Data - setiap angka dicatat sumber + tanggalnya.</a:t>
-            </a:r>
-          </a:p>
-          <a:p>
-            <a:pPr marL="171450" indent="-171450">
+              <a:t>Dua seri dipisah ketat: seri nasional SKDR dan seri pemantauan karhutla. Cakupan dan periode keduanya berbeda, jadi keduanya tidak pernah dijumlahkan.</a:t>
+            </a:r>
+          </a:p>
+          <a:p>
+            <a:pPr>
               <a:lnSpc>
-                <a:spcPct val="112000"/>
+                <a:spcPct val="113000"/>
               </a:lnSpc>
               <a:spcBef>
-                <a:spcPts val="200"/>
+                <a:spcPts val="0"/>
               </a:spcBef>
               <a:spcAft>
                 <a:spcPts val="1000"/>
               </a:spcAft>
-              <a:buChar char="•"/>
             </a:pPr>
             <a:r>
-              <a:rPr sz="1600" b="0" i="0">
+              <a:rPr sz="1500" b="0">
                 <a:solidFill>
                   <a:srgbClr val="2A1E33"/>
                 </a:solidFill>
                 <a:latin typeface="Noto Sans"/>
               </a:rPr>
-              <a:t>Dua seri dipisah ketat: seri nasional SKDR vs seri pemantauan karhutla (cakupan dan tanggal berbeda).</a:t>
-            </a:r>
-          </a:p>
-          <a:p>
-            <a:pPr marL="171450" indent="-171450">
+              <a:t>Angka per kapita memakai populasi BPS 2026 satu vintage agar antarprovinsi dapat dibandingkan dengan adil.</a:t>
+            </a:r>
+          </a:p>
+          <a:p>
+            <a:pPr>
               <a:lnSpc>
-                <a:spcPct val="112000"/>
+                <a:spcPct val="113000"/>
               </a:lnSpc>
               <a:spcBef>
-                <a:spcPts val="200"/>
+                <a:spcPts val="0"/>
               </a:spcBef>
               <a:spcAft>
                 <a:spcPts val="1000"/>
               </a:spcAft>
-              <a:buChar char="•"/>
             </a:pPr>
             <a:r>
-              <a:rPr sz="1600" b="0" i="0">
+              <a:rPr sz="1500" b="0">
                 <a:solidFill>
                   <a:srgbClr val="2A1E33"/>
                 </a:solidFill>
                 <a:latin typeface="Noto Sans"/>
               </a:rPr>
-              <a:t>Pipeline: kompilasi CSV → SQLite → query SQL → chart Python → interpretasi.</a:t>
-            </a:r>
-          </a:p>
-          <a:p>
-            <a:pPr marL="171450" indent="-171450">
-              <a:lnSpc>
-                <a:spcPct val="112000"/>
-              </a:lnSpc>
-              <a:spcBef>
-                <a:spcPts val="200"/>
-              </a:spcBef>
-              <a:spcAft>
-                <a:spcPts val="1000"/>
-              </a:spcAft>
-              <a:buChar char="•"/>
-            </a:pPr>
-            <a:r>
-              <a:rPr sz="1600" b="0" i="0">
-                <a:solidFill>
-                  <a:srgbClr val="2A1E33"/>
-                </a:solidFill>
-                <a:latin typeface="Noto Sans"/>
-              </a:rPr>
-              <a:t>Perbandingan antarprovinsi dinormalisasi per 1.000 penduduk (BPS 2026).</a:t>
-            </a:r>
-          </a:p>
-        </p:txBody>
-      </p:sp>
-      <p:pic>
-        <p:nvPicPr>
-          <p:cNvPr id="5" name="Picture 4" descr="02_pangsa_top10.png"/>
-          <p:cNvPicPr>
-            <a:picLocks noChangeAspect="1"/>
-          </p:cNvPicPr>
-          <p:nvPr/>
-        </p:nvPicPr>
-        <p:blipFill>
-          <a:blip r:embed="rId2"/>
-          <a:stretch>
-            <a:fillRect/>
-          </a:stretch>
-        </p:blipFill>
-        <p:spPr>
-          <a:xfrm>
-            <a:off x="685800" y="1600200"/>
-            <a:ext cx="4846320" cy="3465576"/>
-          </a:xfrm>
-          <a:prstGeom prst="rect">
-            <a:avLst/>
-          </a:prstGeom>
-        </p:spPr>
-      </p:pic>
-      <p:sp>
-        <p:nvSpPr>
-          <p:cNvPr id="6" name="TextBox 5"/>
-          <p:cNvSpPr txBox="1"/>
-          <p:nvPr/>
-        </p:nvSpPr>
-        <p:spPr>
-          <a:xfrm>
-            <a:off x="685800" y="5230368"/>
-            <a:ext cx="4846320" cy="365760"/>
-          </a:xfrm>
-          <a:prstGeom prst="rect">
-            <a:avLst/>
-          </a:prstGeom>
-          <a:noFill/>
-        </p:spPr>
-        <p:txBody>
-          <a:bodyPr wrap="square">
-            <a:spAutoFit/>
-          </a:bodyPr>
-          <a:lstStyle/>
-          <a:p>
-            <a:pPr>
-              <a:spcAft>
-                <a:spcPts val="0"/>
-              </a:spcAft>
-            </a:pPr>
-            <a:r>
-              <a:rPr sz="1200" b="0" i="1">
-                <a:solidFill>
-                  <a:srgbClr val="6B5B74"/>
-                </a:solidFill>
-                <a:latin typeface="Noto Sans"/>
-              </a:rPr>
-              <a:t>10 provinsi teratas = 74,7% laporan nasional.</a:t>
+              <a:t>Grain seri mingguan adalah periode laporan, mengikuti rentang minggu yang dipublikasikan sumber, bukan minggu individu.</a:t>
             </a:r>
           </a:p>
         </p:txBody>
@@ -4366,17 +5517,64 @@
       <p:grpSpPr/>
       <p:sp>
         <p:nvSpPr>
-          <p:cNvPr id="2" name="Rectangle 1"/>
-          <p:cNvSpPr/>
-          <p:nvPr/>
-        </p:nvSpPr>
-        <p:spPr>
-          <a:xfrm>
-            <a:off x="685800" y="566928"/>
-            <a:ext cx="146304" cy="146304"/>
+          <p:cNvPr id="2" name="TextBox 1"/>
+          <p:cNvSpPr txBox="1"/>
+          <p:nvPr/>
+        </p:nvSpPr>
+        <p:spPr>
+          <a:xfrm>
+            <a:off x="502920" y="384048"/>
+            <a:ext cx="11155680" cy="914400"/>
           </a:xfrm>
           <a:prstGeom prst="rect">
             <a:avLst/>
+          </a:prstGeom>
+          <a:noFill/>
+        </p:spPr>
+        <p:txBody>
+          <a:bodyPr wrap="square" anchor="t" lIns="0" rIns="0" tIns="0" bIns="0">
+            <a:spAutoFit/>
+          </a:bodyPr>
+          <a:lstStyle/>
+          <a:p>
+            <a:pPr>
+              <a:lnSpc>
+                <a:spcPct val="113000"/>
+              </a:lnSpc>
+              <a:spcBef>
+                <a:spcPts val="0"/>
+              </a:spcBef>
+              <a:spcAft>
+                <a:spcPts val="0"/>
+              </a:spcAft>
+            </a:pPr>
+            <a:r>
+              <a:rPr sz="3100" b="1">
+                <a:solidFill>
+                  <a:srgbClr val="2A1E33"/>
+                </a:solidFill>
+                <a:latin typeface="Noto Sans"/>
+              </a:rPr>
+              <a:t>Temuan 1: Kasus Sangat Terkonsentrasi</a:t>
+            </a:r>
+          </a:p>
+        </p:txBody>
+      </p:sp>
+      <p:sp>
+        <p:nvSpPr>
+          <p:cNvPr id="3" name="Rounded Rectangle 2"/>
+          <p:cNvSpPr/>
+          <p:nvPr/>
+        </p:nvSpPr>
+        <p:spPr>
+          <a:xfrm>
+            <a:off x="521207" y="1097280"/>
+            <a:ext cx="777240" cy="82296"/>
+          </a:xfrm>
+          <a:prstGeom prst="roundRect">
+            <a:avLst>
+              <a:gd name="adj" fmla="val 5500"/>
+            </a:avLst>
           </a:prstGeom>
           <a:solidFill>
             <a:srgbClr val="EF7D1A"/>
@@ -4410,14 +5608,14 @@
       </p:sp>
       <p:sp>
         <p:nvSpPr>
-          <p:cNvPr id="3" name="TextBox 2"/>
+          <p:cNvPr id="4" name="TextBox 3"/>
           <p:cNvSpPr txBox="1"/>
           <p:nvPr/>
         </p:nvSpPr>
         <p:spPr>
           <a:xfrm>
-            <a:off x="1005840" y="347472"/>
-            <a:ext cx="10607040" cy="777240"/>
+            <a:off x="502920" y="1463040"/>
+            <a:ext cx="4526280" cy="3291840"/>
           </a:xfrm>
           <a:prstGeom prst="rect">
             <a:avLst/>
@@ -4425,130 +5623,134 @@
           <a:noFill/>
         </p:spPr>
         <p:txBody>
-          <a:bodyPr wrap="square">
+          <a:bodyPr wrap="square" anchor="t" lIns="0" rIns="0" tIns="0" bIns="0">
             <a:spAutoFit/>
           </a:bodyPr>
           <a:lstStyle/>
           <a:p>
             <a:pPr>
-              <a:spcAft>
-                <a:spcPts val="0"/>
-              </a:spcAft>
-            </a:pPr>
-            <a:r>
-              <a:rPr sz="3200" b="1" i="0">
-                <a:solidFill>
-                  <a:srgbClr val="2A1E33"/>
-                </a:solidFill>
-                <a:latin typeface="Noto Sans"/>
-              </a:rPr>
-              <a:t>Temuan 1: Kasus Sangat Terkonsentrasi</a:t>
-            </a:r>
-          </a:p>
-        </p:txBody>
-      </p:sp>
-      <p:sp>
-        <p:nvSpPr>
-          <p:cNvPr id="4" name="TextBox 3"/>
-          <p:cNvSpPr txBox="1"/>
-          <p:nvPr/>
-        </p:nvSpPr>
-        <p:spPr>
-          <a:xfrm>
-            <a:off x="685800" y="1371600"/>
-            <a:ext cx="5394960" cy="1691640"/>
-          </a:xfrm>
-          <a:prstGeom prst="rect">
-            <a:avLst/>
-          </a:prstGeom>
-          <a:noFill/>
-        </p:spPr>
-        <p:txBody>
-          <a:bodyPr wrap="square">
-            <a:spAutoFit/>
-          </a:bodyPr>
-          <a:lstStyle/>
-          <a:p>
-            <a:pPr marL="171450" indent="-171450">
               <a:lnSpc>
-                <a:spcPct val="112000"/>
+                <a:spcPct val="113000"/>
               </a:lnSpc>
               <a:spcBef>
-                <a:spcPts val="200"/>
+                <a:spcPts val="0"/>
               </a:spcBef>
               <a:spcAft>
                 <a:spcPts val="1000"/>
               </a:spcAft>
-              <a:buChar char="•"/>
             </a:pPr>
             <a:r>
-              <a:rPr sz="1500" b="0" i="0">
+              <a:rPr sz="1550" b="0">
                 <a:solidFill>
                   <a:srgbClr val="2A1E33"/>
                 </a:solidFill>
                 <a:latin typeface="Noto Sans"/>
               </a:rPr>
-              <a:t>10 provinsi teratas mencatat 10.530.385 laporan = 74,7% total nasional.</a:t>
-            </a:r>
-          </a:p>
-          <a:p>
-            <a:pPr marL="171450" indent="-171450">
+              <a:t>10 provinsi teratas mencatat 10.530.385 laporan, setara 74,7% dari total nasional.</a:t>
+            </a:r>
+          </a:p>
+          <a:p>
+            <a:pPr>
               <a:lnSpc>
-                <a:spcPct val="112000"/>
+                <a:spcPct val="113000"/>
               </a:lnSpc>
               <a:spcBef>
-                <a:spcPts val="200"/>
+                <a:spcPts val="0"/>
               </a:spcBef>
               <a:spcAft>
                 <a:spcPts val="1000"/>
               </a:spcAft>
-              <a:buChar char="•"/>
             </a:pPr>
             <a:r>
-              <a:rPr sz="1500" b="0" i="0">
+              <a:rPr sz="1550" b="0">
                 <a:solidFill>
                   <a:srgbClr val="2A1E33"/>
                 </a:solidFill>
                 <a:latin typeface="Noto Sans"/>
               </a:rPr>
-              <a:t>4 provinsi teratas saja (Jabar, Jateng, Jakarta, Jatim) = 55,8% nasional.</a:t>
-            </a:r>
-          </a:p>
-          <a:p>
-            <a:pPr marL="171450" indent="-171450">
+              <a:t>Empat provinsi teratas saja (Jawa Barat, Jawa Tengah, Jakarta, Jawa Timur) menyumbang 55,8% nasional. Jawa Barat tertinggi: 2.533.888 laporan (17,98%).</a:t>
+            </a:r>
+          </a:p>
+          <a:p>
+            <a:pPr>
               <a:lnSpc>
-                <a:spcPct val="112000"/>
+                <a:spcPct val="113000"/>
               </a:lnSpc>
               <a:spcBef>
-                <a:spcPts val="200"/>
+                <a:spcPts val="0"/>
               </a:spcBef>
               <a:spcAft>
                 <a:spcPts val="1000"/>
               </a:spcAft>
-              <a:buChar char="•"/>
             </a:pPr>
             <a:r>
-              <a:rPr sz="1500" b="0" i="0">
+              <a:rPr sz="1550" b="0">
                 <a:solidFill>
                   <a:srgbClr val="2A1E33"/>
                 </a:solidFill>
                 <a:latin typeface="Noto Sans"/>
               </a:rPr>
-              <a:t>Jawa Barat tertinggi: 2.533.888 laporan (17,98% nasional).</a:t>
-            </a:r>
-          </a:p>
-        </p:txBody>
-      </p:sp>
-      <p:sp>
-        <p:nvSpPr>
-          <p:cNvPr id="5" name="TextBox 4"/>
+              <a:t>Sebanyak 86,3% laporan top-10 berasal dari Pulau Jawa. Catatan: dominasi Jawa ikut dipengaruhi jumlah penduduk dan kelengkapan pelaporan.</a:t>
+            </a:r>
+          </a:p>
+        </p:txBody>
+      </p:sp>
+      <p:sp>
+        <p:nvSpPr>
+          <p:cNvPr id="5" name="Rounded Rectangle 4"/>
+          <p:cNvSpPr/>
+          <p:nvPr/>
+        </p:nvSpPr>
+        <p:spPr>
+          <a:xfrm>
+            <a:off x="502920" y="4846320"/>
+            <a:ext cx="4526280" cy="1170432"/>
+          </a:xfrm>
+          <a:prstGeom prst="roundRect">
+            <a:avLst>
+              <a:gd name="adj" fmla="val 5500"/>
+            </a:avLst>
+          </a:prstGeom>
+          <a:solidFill>
+            <a:srgbClr val="5E2A72"/>
+          </a:solidFill>
+          <a:ln>
+            <a:noFill/>
+          </a:ln>
+          <a:effectLst/>
+        </p:spPr>
+        <p:style>
+          <a:lnRef idx="1">
+            <a:schemeClr val="accent1"/>
+          </a:lnRef>
+          <a:fillRef idx="3">
+            <a:schemeClr val="accent1"/>
+          </a:fillRef>
+          <a:effectRef idx="2">
+            <a:schemeClr val="accent1"/>
+          </a:effectRef>
+          <a:fontRef idx="minor">
+            <a:schemeClr val="lt1"/>
+          </a:fontRef>
+        </p:style>
+        <p:txBody>
+          <a:bodyPr rtlCol="0" anchor="ctr"/>
+          <a:lstStyle/>
+          <a:p>
+            <a:pPr algn="ctr"/>
+          </a:p>
+        </p:txBody>
+      </p:sp>
+      <p:sp>
+        <p:nvSpPr>
+          <p:cNvPr id="6" name="TextBox 5"/>
           <p:cNvSpPr txBox="1"/>
           <p:nvPr/>
         </p:nvSpPr>
         <p:spPr>
           <a:xfrm>
-            <a:off x="6355080" y="1371600"/>
-            <a:ext cx="5166360" cy="1691640"/>
+            <a:off x="777240" y="5010912"/>
+            <a:ext cx="4023360" cy="896112"/>
           </a:xfrm>
           <a:prstGeom prst="rect">
             <a:avLst/>
@@ -4556,61 +5758,151 @@
           <a:noFill/>
         </p:spPr>
         <p:txBody>
-          <a:bodyPr wrap="square">
+          <a:bodyPr wrap="square" anchor="t" lIns="0" rIns="0" tIns="0" bIns="0">
             <a:spAutoFit/>
           </a:bodyPr>
           <a:lstStyle/>
           <a:p>
-            <a:pPr marL="171450" indent="-171450">
+            <a:pPr>
               <a:lnSpc>
-                <a:spcPct val="112000"/>
+                <a:spcPct val="113000"/>
               </a:lnSpc>
               <a:spcBef>
-                <a:spcPts val="200"/>
+                <a:spcPts val="0"/>
               </a:spcBef>
               <a:spcAft>
-                <a:spcPts val="1000"/>
+                <a:spcPts val="200"/>
               </a:spcAft>
-              <a:buChar char="•"/>
             </a:pPr>
             <a:r>
-              <a:rPr sz="1500" b="0" i="0">
-                <a:solidFill>
-                  <a:srgbClr val="2A1E33"/>
+              <a:rPr sz="2700" b="1">
+                <a:solidFill>
+                  <a:srgbClr val="EF7D1A"/>
                 </a:solidFill>
                 <a:latin typeface="Noto Sans"/>
               </a:rPr>
-              <a:t>86,3% laporan top-10 berasal dari Pulau Jawa.</a:t>
-            </a:r>
-          </a:p>
-          <a:p>
-            <a:pPr marL="171450" indent="-171450">
+              <a:t>74,7%</a:t>
+            </a:r>
+          </a:p>
+          <a:p>
+            <a:pPr>
               <a:lnSpc>
-                <a:spcPct val="112000"/>
+                <a:spcPct val="113000"/>
               </a:lnSpc>
               <a:spcBef>
-                <a:spcPts val="200"/>
+                <a:spcPts val="0"/>
               </a:spcBef>
               <a:spcAft>
-                <a:spcPts val="1000"/>
+                <a:spcPts val="0"/>
               </a:spcAft>
-              <a:buChar char="•"/>
             </a:pPr>
             <a:r>
-              <a:rPr sz="1500" b="0" i="0">
-                <a:solidFill>
-                  <a:srgbClr val="2A1E33"/>
+              <a:rPr sz="1250" b="0">
+                <a:solidFill>
+                  <a:srgbClr val="F8F2E4"/>
                 </a:solidFill>
                 <a:latin typeface="Noto Sans"/>
               </a:rPr>
-              <a:t>Peringatan: dominasi Jawa ikut dipengaruhi jumlah penduduk dan kelengkapan pelaporan.</a:t>
-            </a:r>
+              <a:t>dari seluruh laporan nasional terkumpul di 10 provinsi saja</a:t>
+            </a:r>
+          </a:p>
+        </p:txBody>
+      </p:sp>
+      <p:sp>
+        <p:nvSpPr>
+          <p:cNvPr id="7" name="Rounded Rectangle 6"/>
+          <p:cNvSpPr/>
+          <p:nvPr/>
+        </p:nvSpPr>
+        <p:spPr>
+          <a:xfrm>
+            <a:off x="5413248" y="1481328"/>
+            <a:ext cx="6336792" cy="3977639"/>
+          </a:xfrm>
+          <a:prstGeom prst="roundRect">
+            <a:avLst>
+              <a:gd name="adj" fmla="val 5500"/>
+            </a:avLst>
+          </a:prstGeom>
+          <a:solidFill>
+            <a:srgbClr val="DDCFB4"/>
+          </a:solidFill>
+          <a:ln>
+            <a:noFill/>
+          </a:ln>
+          <a:effectLst/>
+        </p:spPr>
+        <p:style>
+          <a:lnRef idx="1">
+            <a:schemeClr val="accent1"/>
+          </a:lnRef>
+          <a:fillRef idx="3">
+            <a:schemeClr val="accent1"/>
+          </a:fillRef>
+          <a:effectRef idx="2">
+            <a:schemeClr val="accent1"/>
+          </a:effectRef>
+          <a:fontRef idx="minor">
+            <a:schemeClr val="lt1"/>
+          </a:fontRef>
+        </p:style>
+        <p:txBody>
+          <a:bodyPr rtlCol="0" anchor="ctr"/>
+          <a:lstStyle/>
+          <a:p>
+            <a:pPr algn="ctr"/>
+          </a:p>
+        </p:txBody>
+      </p:sp>
+      <p:sp>
+        <p:nvSpPr>
+          <p:cNvPr id="8" name="Rounded Rectangle 7"/>
+          <p:cNvSpPr/>
+          <p:nvPr/>
+        </p:nvSpPr>
+        <p:spPr>
+          <a:xfrm>
+            <a:off x="5349240" y="1417320"/>
+            <a:ext cx="6336792" cy="3977639"/>
+          </a:xfrm>
+          <a:prstGeom prst="roundRect">
+            <a:avLst>
+              <a:gd name="adj" fmla="val 5500"/>
+            </a:avLst>
+          </a:prstGeom>
+          <a:solidFill>
+            <a:srgbClr val="F8F2E4"/>
+          </a:solidFill>
+          <a:ln>
+            <a:noFill/>
+          </a:ln>
+          <a:effectLst/>
+        </p:spPr>
+        <p:style>
+          <a:lnRef idx="1">
+            <a:schemeClr val="accent1"/>
+          </a:lnRef>
+          <a:fillRef idx="3">
+            <a:schemeClr val="accent1"/>
+          </a:fillRef>
+          <a:effectRef idx="2">
+            <a:schemeClr val="accent1"/>
+          </a:effectRef>
+          <a:fontRef idx="minor">
+            <a:schemeClr val="lt1"/>
+          </a:fontRef>
+        </p:style>
+        <p:txBody>
+          <a:bodyPr rtlCol="0" anchor="ctr"/>
+          <a:lstStyle/>
+          <a:p>
+            <a:pPr algn="ctr"/>
           </a:p>
         </p:txBody>
       </p:sp>
       <p:pic>
         <p:nvPicPr>
-          <p:cNvPr id="6" name="Picture 5" descr="01_top10_absolut.png"/>
+          <p:cNvPr id="9" name="Picture 8" descr="01_top10_absolut.png"/>
           <p:cNvPicPr>
             <a:picLocks noChangeAspect="1"/>
           </p:cNvPicPr>
@@ -4624,8 +5916,8 @@
         </p:blipFill>
         <p:spPr>
           <a:xfrm>
-            <a:off x="685800" y="3063240"/>
-            <a:ext cx="6858000" cy="3520440"/>
+            <a:off x="5592387" y="1618488"/>
+            <a:ext cx="5850497" cy="3575303"/>
           </a:xfrm>
           <a:prstGeom prst="rect">
             <a:avLst/>
@@ -4634,14 +5926,14 @@
       </p:pic>
       <p:sp>
         <p:nvSpPr>
-          <p:cNvPr id="7" name="TextBox 6"/>
+          <p:cNvPr id="10" name="TextBox 9"/>
           <p:cNvSpPr txBox="1"/>
           <p:nvPr/>
         </p:nvSpPr>
         <p:spPr>
           <a:xfrm>
-            <a:off x="7863840" y="3977639"/>
-            <a:ext cx="3657600" cy="1463040"/>
+            <a:off x="5349240" y="5486399"/>
+            <a:ext cx="6336792" cy="274320"/>
           </a:xfrm>
           <a:prstGeom prst="rect">
             <a:avLst/>
@@ -4649,82 +5941,30 @@
           <a:noFill/>
         </p:spPr>
         <p:txBody>
-          <a:bodyPr wrap="square">
+          <a:bodyPr wrap="square" anchor="t" lIns="0" rIns="0" tIns="0" bIns="0">
             <a:spAutoFit/>
           </a:bodyPr>
           <a:lstStyle/>
           <a:p>
             <a:pPr>
+              <a:lnSpc>
+                <a:spcPct val="113000"/>
+              </a:lnSpc>
+              <a:spcBef>
+                <a:spcPts val="0"/>
+              </a:spcBef>
               <a:spcAft>
-                <a:spcPts val="400"/>
+                <a:spcPts val="0"/>
               </a:spcAft>
             </a:pPr>
             <a:r>
-              <a:rPr sz="4400" b="1" i="0">
-                <a:solidFill>
-                  <a:srgbClr val="5E2A72"/>
+              <a:rPr sz="1050" b="0">
+                <a:solidFill>
+                  <a:srgbClr val="8A5CA6"/>
                 </a:solidFill>
                 <a:latin typeface="Noto Sans"/>
               </a:rPr>
-              <a:t>74,7%</a:t>
-            </a:r>
-          </a:p>
-          <a:p>
-            <a:pPr>
-              <a:lnSpc>
-                <a:spcPct val="115000"/>
-              </a:lnSpc>
-              <a:spcAft>
-                <a:spcPts val="0"/>
-              </a:spcAft>
-            </a:pPr>
-            <a:r>
-              <a:rPr sz="1400" b="0" i="0">
-                <a:solidFill>
-                  <a:srgbClr val="6B5B74"/>
-                </a:solidFill>
-                <a:latin typeface="Noto Sans"/>
-              </a:rPr>
-              <a:t>dari seluruh laporan nasional terkumpul di 10 provinsi saja</a:t>
-            </a:r>
-          </a:p>
-        </p:txBody>
-      </p:sp>
-      <p:sp>
-        <p:nvSpPr>
-          <p:cNvPr id="8" name="TextBox 7"/>
-          <p:cNvSpPr txBox="1"/>
-          <p:nvPr/>
-        </p:nvSpPr>
-        <p:spPr>
-          <a:xfrm>
-            <a:off x="685800" y="6473952"/>
-            <a:ext cx="6858000" cy="365760"/>
-          </a:xfrm>
-          <a:prstGeom prst="rect">
-            <a:avLst/>
-          </a:prstGeom>
-          <a:noFill/>
-        </p:spPr>
-        <p:txBody>
-          <a:bodyPr wrap="square">
-            <a:spAutoFit/>
-          </a:bodyPr>
-          <a:lstStyle/>
-          <a:p>
-            <a:pPr>
-              <a:spcAft>
-                <a:spcPts val="0"/>
-              </a:spcAft>
-            </a:pPr>
-            <a:r>
-              <a:rPr sz="1200" b="0" i="1">
-                <a:solidFill>
-                  <a:srgbClr val="6B5B74"/>
-                </a:solidFill>
-                <a:latin typeface="Noto Sans"/>
-              </a:rPr>
-              <a:t>10 provinsi dengan kasus ISPA terbanyak, SKDR 2026.</a:t>
+              <a:t>Chart: 10 provinsi dengan kasus ISPA terbanyak, SKDR 2026.</a:t>
             </a:r>
           </a:p>
         </p:txBody>
@@ -4757,17 +5997,64 @@
       <p:grpSpPr/>
       <p:sp>
         <p:nvSpPr>
-          <p:cNvPr id="2" name="Rectangle 1"/>
-          <p:cNvSpPr/>
-          <p:nvPr/>
-        </p:nvSpPr>
-        <p:spPr>
-          <a:xfrm>
-            <a:off x="685800" y="566928"/>
-            <a:ext cx="146304" cy="146304"/>
+          <p:cNvPr id="2" name="TextBox 1"/>
+          <p:cNvSpPr txBox="1"/>
+          <p:nvPr/>
+        </p:nvSpPr>
+        <p:spPr>
+          <a:xfrm>
+            <a:off x="502920" y="384048"/>
+            <a:ext cx="11155680" cy="914400"/>
           </a:xfrm>
           <a:prstGeom prst="rect">
             <a:avLst/>
+          </a:prstGeom>
+          <a:noFill/>
+        </p:spPr>
+        <p:txBody>
+          <a:bodyPr wrap="square" anchor="t" lIns="0" rIns="0" tIns="0" bIns="0">
+            <a:spAutoFit/>
+          </a:bodyPr>
+          <a:lstStyle/>
+          <a:p>
+            <a:pPr>
+              <a:lnSpc>
+                <a:spcPct val="113000"/>
+              </a:lnSpc>
+              <a:spcBef>
+                <a:spcPts val="0"/>
+              </a:spcBef>
+              <a:spcAft>
+                <a:spcPts val="0"/>
+              </a:spcAft>
+            </a:pPr>
+            <a:r>
+              <a:rPr sz="3100" b="1">
+                <a:solidFill>
+                  <a:srgbClr val="2A1E33"/>
+                </a:solidFill>
+                <a:latin typeface="Noto Sans"/>
+              </a:rPr>
+              <a:t>Temuan 2: Per Kapita, Jakarta Beban Terberat</a:t>
+            </a:r>
+          </a:p>
+        </p:txBody>
+      </p:sp>
+      <p:sp>
+        <p:nvSpPr>
+          <p:cNvPr id="3" name="Rounded Rectangle 2"/>
+          <p:cNvSpPr/>
+          <p:nvPr/>
+        </p:nvSpPr>
+        <p:spPr>
+          <a:xfrm>
+            <a:off x="521207" y="1097280"/>
+            <a:ext cx="777240" cy="82296"/>
+          </a:xfrm>
+          <a:prstGeom prst="roundRect">
+            <a:avLst>
+              <a:gd name="adj" fmla="val 5500"/>
+            </a:avLst>
           </a:prstGeom>
           <a:solidFill>
             <a:srgbClr val="EF7D1A"/>
@@ -4801,184 +6088,99 @@
       </p:sp>
       <p:sp>
         <p:nvSpPr>
-          <p:cNvPr id="3" name="TextBox 2"/>
-          <p:cNvSpPr txBox="1"/>
-          <p:nvPr/>
-        </p:nvSpPr>
-        <p:spPr>
-          <a:xfrm>
-            <a:off x="1005840" y="347472"/>
-            <a:ext cx="10607040" cy="777240"/>
-          </a:xfrm>
-          <a:prstGeom prst="rect">
-            <a:avLst/>
-          </a:prstGeom>
-          <a:noFill/>
-        </p:spPr>
-        <p:txBody>
-          <a:bodyPr wrap="square">
-            <a:spAutoFit/>
-          </a:bodyPr>
-          <a:lstStyle/>
-          <a:p>
-            <a:pPr>
-              <a:spcAft>
-                <a:spcPts val="0"/>
-              </a:spcAft>
-            </a:pPr>
-            <a:r>
-              <a:rPr sz="3200" b="1" i="0">
-                <a:solidFill>
-                  <a:srgbClr val="2A1E33"/>
-                </a:solidFill>
-                <a:latin typeface="Noto Sans"/>
-              </a:rPr>
-              <a:t>Temuan 2: Per Kapita, Jakarta Beban Terberat</a:t>
-            </a:r>
-          </a:p>
-        </p:txBody>
-      </p:sp>
-      <p:sp>
-        <p:nvSpPr>
-          <p:cNvPr id="4" name="TextBox 3"/>
-          <p:cNvSpPr txBox="1"/>
-          <p:nvPr/>
-        </p:nvSpPr>
-        <p:spPr>
-          <a:xfrm>
-            <a:off x="6355080" y="1463040"/>
-            <a:ext cx="5166360" cy="4846320"/>
-          </a:xfrm>
-          <a:prstGeom prst="rect">
-            <a:avLst/>
-          </a:prstGeom>
-          <a:noFill/>
-        </p:spPr>
-        <p:txBody>
-          <a:bodyPr wrap="square">
-            <a:spAutoFit/>
-          </a:bodyPr>
-          <a:lstStyle/>
-          <a:p>
-            <a:pPr marL="171450" indent="-171450">
-              <a:lnSpc>
-                <a:spcPct val="112000"/>
-              </a:lnSpc>
-              <a:spcBef>
-                <a:spcPts val="200"/>
-              </a:spcBef>
-              <a:spcAft>
-                <a:spcPts val="1000"/>
-              </a:spcAft>
-              <a:buChar char="•"/>
-            </a:pPr>
-            <a:r>
-              <a:rPr sz="1600" b="0" i="0">
-                <a:solidFill>
-                  <a:srgbClr val="2A1E33"/>
-                </a:solidFill>
-                <a:latin typeface="Noto Sans"/>
-              </a:rPr>
-              <a:t>Angka absolut menipu: provinsi besar otomatis mencatat kasus lebih banyak.</a:t>
-            </a:r>
-          </a:p>
-          <a:p>
-            <a:pPr marL="171450" indent="-171450">
-              <a:lnSpc>
-                <a:spcPct val="112000"/>
-              </a:lnSpc>
-              <a:spcBef>
-                <a:spcPts val="200"/>
-              </a:spcBef>
-              <a:spcAft>
-                <a:spcPts val="1000"/>
-              </a:spcAft>
-              <a:buChar char="•"/>
-            </a:pPr>
-            <a:r>
-              <a:rPr sz="1600" b="0" i="0">
-                <a:solidFill>
-                  <a:srgbClr val="2A1E33"/>
-                </a:solidFill>
-                <a:latin typeface="Noto Sans"/>
-              </a:rPr>
-              <a:t>Setelah dibagi populasi: Jakarta 150,0 kasus per 1.000 penduduk.</a:t>
-            </a:r>
-          </a:p>
-          <a:p>
-            <a:pPr marL="171450" indent="-171450">
-              <a:lnSpc>
-                <a:spcPct val="112000"/>
-              </a:lnSpc>
-              <a:spcBef>
-                <a:spcPts val="200"/>
-              </a:spcBef>
-              <a:spcAft>
-                <a:spcPts val="1000"/>
-              </a:spcAft>
-              <a:buChar char="•"/>
-            </a:pPr>
-            <a:r>
-              <a:rPr sz="1600" b="0" i="0">
-                <a:solidFill>
-                  <a:srgbClr val="2A1E33"/>
-                </a:solidFill>
-                <a:latin typeface="Noto Sans"/>
-              </a:rPr>
-              <a:t>Itu ~3x Jawa Barat (49,5) dan ~2,3x Banten (65,8).</a:t>
-            </a:r>
-          </a:p>
-          <a:p>
-            <a:pPr marL="171450" indent="-171450">
-              <a:lnSpc>
-                <a:spcPct val="112000"/>
-              </a:lnSpc>
-              <a:spcBef>
-                <a:spcPts val="200"/>
-              </a:spcBef>
-              <a:spcAft>
-                <a:spcPts val="1000"/>
-              </a:spcAft>
-              <a:buChar char="•"/>
-            </a:pPr>
-            <a:r>
-              <a:rPr sz="1600" b="0" i="0">
-                <a:solidFill>
-                  <a:srgbClr val="2A1E33"/>
-                </a:solidFill>
-                <a:latin typeface="Noto Sans"/>
-              </a:rPr>
-              <a:t>Jakarta mencatat kasus 1,16x Jawa Timur dengan penduduk hanya seperempatnya.</a:t>
-            </a:r>
-          </a:p>
-          <a:p>
-            <a:pPr marL="171450" indent="-171450">
-              <a:lnSpc>
-                <a:spcPct val="112000"/>
-              </a:lnSpc>
-              <a:spcBef>
-                <a:spcPts val="200"/>
-              </a:spcBef>
-              <a:spcAft>
-                <a:spcPts val="1000"/>
-              </a:spcAft>
-              <a:buChar char="•"/>
-            </a:pPr>
-            <a:r>
-              <a:rPr sz="1600" b="0" i="0">
-                <a:solidFill>
-                  <a:srgbClr val="2A1E33"/>
-                </a:solidFill>
-                <a:latin typeface="Noto Sans"/>
-              </a:rPr>
-              <a:t>Implikasi: surveilans dan kesiapan RS Jakarta perlu prioritas pada puncak kemarau.</a:t>
-            </a:r>
+          <p:cNvPr id="4" name="Rounded Rectangle 3"/>
+          <p:cNvSpPr/>
+          <p:nvPr/>
+        </p:nvSpPr>
+        <p:spPr>
+          <a:xfrm>
+            <a:off x="566928" y="1481328"/>
+            <a:ext cx="5120640" cy="3520440"/>
+          </a:xfrm>
+          <a:prstGeom prst="roundRect">
+            <a:avLst>
+              <a:gd name="adj" fmla="val 5500"/>
+            </a:avLst>
+          </a:prstGeom>
+          <a:solidFill>
+            <a:srgbClr val="DDCFB4"/>
+          </a:solidFill>
+          <a:ln>
+            <a:noFill/>
+          </a:ln>
+          <a:effectLst/>
+        </p:spPr>
+        <p:style>
+          <a:lnRef idx="1">
+            <a:schemeClr val="accent1"/>
+          </a:lnRef>
+          <a:fillRef idx="3">
+            <a:schemeClr val="accent1"/>
+          </a:fillRef>
+          <a:effectRef idx="2">
+            <a:schemeClr val="accent1"/>
+          </a:effectRef>
+          <a:fontRef idx="minor">
+            <a:schemeClr val="lt1"/>
+          </a:fontRef>
+        </p:style>
+        <p:txBody>
+          <a:bodyPr rtlCol="0" anchor="ctr"/>
+          <a:lstStyle/>
+          <a:p>
+            <a:pPr algn="ctr"/>
+          </a:p>
+        </p:txBody>
+      </p:sp>
+      <p:sp>
+        <p:nvSpPr>
+          <p:cNvPr id="5" name="Rounded Rectangle 4"/>
+          <p:cNvSpPr/>
+          <p:nvPr/>
+        </p:nvSpPr>
+        <p:spPr>
+          <a:xfrm>
+            <a:off x="502920" y="1417320"/>
+            <a:ext cx="5120640" cy="3520440"/>
+          </a:xfrm>
+          <a:prstGeom prst="roundRect">
+            <a:avLst>
+              <a:gd name="adj" fmla="val 5500"/>
+            </a:avLst>
+          </a:prstGeom>
+          <a:solidFill>
+            <a:srgbClr val="F8F2E4"/>
+          </a:solidFill>
+          <a:ln>
+            <a:noFill/>
+          </a:ln>
+          <a:effectLst/>
+        </p:spPr>
+        <p:style>
+          <a:lnRef idx="1">
+            <a:schemeClr val="accent1"/>
+          </a:lnRef>
+          <a:fillRef idx="3">
+            <a:schemeClr val="accent1"/>
+          </a:fillRef>
+          <a:effectRef idx="2">
+            <a:schemeClr val="accent1"/>
+          </a:effectRef>
+          <a:fontRef idx="minor">
+            <a:schemeClr val="lt1"/>
+          </a:fontRef>
+        </p:style>
+        <p:txBody>
+          <a:bodyPr rtlCol="0" anchor="ctr"/>
+          <a:lstStyle/>
+          <a:p>
+            <a:pPr algn="ctr"/>
           </a:p>
         </p:txBody>
       </p:sp>
       <p:pic>
         <p:nvPicPr>
-          <p:cNvPr id="5" name="Picture 4" descr="03_per_kapita.png"/>
+          <p:cNvPr id="6" name="Picture 5" descr="03_per_kapita.png"/>
           <p:cNvPicPr>
             <a:picLocks noChangeAspect="1"/>
           </p:cNvPicPr>
@@ -4992,8 +6194,8 @@
         </p:blipFill>
         <p:spPr>
           <a:xfrm>
-            <a:off x="685800" y="1600200"/>
-            <a:ext cx="5394960" cy="2999232"/>
+            <a:off x="704088" y="1866900"/>
+            <a:ext cx="4718303" cy="2621279"/>
           </a:xfrm>
           <a:prstGeom prst="rect">
             <a:avLst/>
@@ -5002,14 +6204,14 @@
       </p:pic>
       <p:sp>
         <p:nvSpPr>
-          <p:cNvPr id="6" name="TextBox 5"/>
+          <p:cNvPr id="7" name="TextBox 6"/>
           <p:cNvSpPr txBox="1"/>
           <p:nvPr/>
         </p:nvSpPr>
         <p:spPr>
           <a:xfrm>
-            <a:off x="685800" y="4764023"/>
-            <a:ext cx="5394960" cy="365760"/>
+            <a:off x="502920" y="5029200"/>
+            <a:ext cx="5120640" cy="274320"/>
           </a:xfrm>
           <a:prstGeom prst="rect">
             <a:avLst/>
@@ -5017,24 +6219,210 @@
           <a:noFill/>
         </p:spPr>
         <p:txBody>
-          <a:bodyPr wrap="square">
+          <a:bodyPr wrap="square" anchor="t" lIns="0" rIns="0" tIns="0" bIns="0">
             <a:spAutoFit/>
           </a:bodyPr>
           <a:lstStyle/>
           <a:p>
             <a:pPr>
+              <a:lnSpc>
+                <a:spcPct val="113000"/>
+              </a:lnSpc>
+              <a:spcBef>
+                <a:spcPts val="0"/>
+              </a:spcBef>
               <a:spcAft>
                 <a:spcPts val="0"/>
               </a:spcAft>
             </a:pPr>
             <a:r>
-              <a:rPr sz="1200" b="0" i="1">
-                <a:solidFill>
-                  <a:srgbClr val="6B5B74"/>
+              <a:rPr sz="1050" b="0">
+                <a:solidFill>
+                  <a:srgbClr val="8A5CA6"/>
                 </a:solidFill>
                 <a:latin typeface="Noto Sans"/>
               </a:rPr>
-              <a:t>Kasus per 1.000 penduduk (populasi BPS 2026).</a:t>
+              <a:t>Chart: kasus per 1.000 penduduk (populasi BPS 2026).</a:t>
+            </a:r>
+          </a:p>
+        </p:txBody>
+      </p:sp>
+      <p:sp>
+        <p:nvSpPr>
+          <p:cNvPr id="8" name="TextBox 7"/>
+          <p:cNvSpPr txBox="1"/>
+          <p:nvPr/>
+        </p:nvSpPr>
+        <p:spPr>
+          <a:xfrm>
+            <a:off x="5989320" y="1481328"/>
+            <a:ext cx="5715000" cy="3474720"/>
+          </a:xfrm>
+          <a:prstGeom prst="rect">
+            <a:avLst/>
+          </a:prstGeom>
+          <a:noFill/>
+        </p:spPr>
+        <p:txBody>
+          <a:bodyPr wrap="square" anchor="t" lIns="0" rIns="0" tIns="0" bIns="0">
+            <a:spAutoFit/>
+          </a:bodyPr>
+          <a:lstStyle/>
+          <a:p>
+            <a:pPr>
+              <a:lnSpc>
+                <a:spcPct val="113000"/>
+              </a:lnSpc>
+              <a:spcBef>
+                <a:spcPts val="0"/>
+              </a:spcBef>
+              <a:spcAft>
+                <a:spcPts val="1000"/>
+              </a:spcAft>
+            </a:pPr>
+            <a:r>
+              <a:rPr sz="1550" b="0">
+                <a:solidFill>
+                  <a:srgbClr val="2A1E33"/>
+                </a:solidFill>
+                <a:latin typeface="Noto Sans"/>
+              </a:rPr>
+              <a:t>Angka absolut menipu: provinsi besar otomatis mencatat kasus lebih banyak. Setelah dibagi populasi, Jakarta mencatat 150,0 kasus per 1.000 penduduk.</a:t>
+            </a:r>
+          </a:p>
+          <a:p>
+            <a:pPr>
+              <a:lnSpc>
+                <a:spcPct val="113000"/>
+              </a:lnSpc>
+              <a:spcBef>
+                <a:spcPts val="0"/>
+              </a:spcBef>
+              <a:spcAft>
+                <a:spcPts val="1000"/>
+              </a:spcAft>
+            </a:pPr>
+            <a:r>
+              <a:rPr sz="1550" b="0">
+                <a:solidFill>
+                  <a:srgbClr val="2A1E33"/>
+                </a:solidFill>
+                <a:latin typeface="Noto Sans"/>
+              </a:rPr>
+              <a:t>Itu sekitar 3 kali Jawa Barat (49,5) dan 2,3 kali Banten (65,8). Jakarta mencatat kasus 1,16 kali Jawa Timur dengan penduduk hanya seperempatnya.</a:t>
+            </a:r>
+          </a:p>
+          <a:p>
+            <a:pPr>
+              <a:lnSpc>
+                <a:spcPct val="113000"/>
+              </a:lnSpc>
+              <a:spcBef>
+                <a:spcPts val="0"/>
+              </a:spcBef>
+              <a:spcAft>
+                <a:spcPts val="1000"/>
+              </a:spcAft>
+            </a:pPr>
+            <a:r>
+              <a:rPr sz="1550" b="0">
+                <a:solidFill>
+                  <a:srgbClr val="2A1E33"/>
+                </a:solidFill>
+                <a:latin typeface="Noto Sans"/>
+              </a:rPr>
+              <a:t>Implikasi: surveilans dan kesiapan layanan Jakarta perlu dibaca per kapita, bukan dari angka absolut saja.</a:t>
+            </a:r>
+          </a:p>
+        </p:txBody>
+      </p:sp>
+      <p:sp>
+        <p:nvSpPr>
+          <p:cNvPr id="9" name="Rounded Rectangle 8"/>
+          <p:cNvSpPr/>
+          <p:nvPr/>
+        </p:nvSpPr>
+        <p:spPr>
+          <a:xfrm>
+            <a:off x="502920" y="5193792"/>
+            <a:ext cx="11183112" cy="932688"/>
+          </a:xfrm>
+          <a:prstGeom prst="roundRect">
+            <a:avLst>
+              <a:gd name="adj" fmla="val 5500"/>
+            </a:avLst>
+          </a:prstGeom>
+          <a:solidFill>
+            <a:srgbClr val="F8F2E4"/>
+          </a:solidFill>
+          <a:ln>
+            <a:noFill/>
+          </a:ln>
+          <a:effectLst/>
+        </p:spPr>
+        <p:style>
+          <a:lnRef idx="1">
+            <a:schemeClr val="accent1"/>
+          </a:lnRef>
+          <a:fillRef idx="3">
+            <a:schemeClr val="accent1"/>
+          </a:fillRef>
+          <a:effectRef idx="2">
+            <a:schemeClr val="accent1"/>
+          </a:effectRef>
+          <a:fontRef idx="minor">
+            <a:schemeClr val="lt1"/>
+          </a:fontRef>
+        </p:style>
+        <p:txBody>
+          <a:bodyPr rtlCol="0" anchor="ctr"/>
+          <a:lstStyle/>
+          <a:p>
+            <a:pPr algn="ctr"/>
+          </a:p>
+        </p:txBody>
+      </p:sp>
+      <p:sp>
+        <p:nvSpPr>
+          <p:cNvPr id="10" name="TextBox 9"/>
+          <p:cNvSpPr txBox="1"/>
+          <p:nvPr/>
+        </p:nvSpPr>
+        <p:spPr>
+          <a:xfrm>
+            <a:off x="960120" y="5394960"/>
+            <a:ext cx="10424160" cy="548640"/>
+          </a:xfrm>
+          <a:prstGeom prst="rect">
+            <a:avLst/>
+          </a:prstGeom>
+          <a:noFill/>
+        </p:spPr>
+        <p:txBody>
+          <a:bodyPr wrap="square" anchor="ctr" lIns="0" rIns="0" tIns="0" bIns="0">
+            <a:spAutoFit/>
+          </a:bodyPr>
+          <a:lstStyle/>
+          <a:p>
+            <a:pPr>
+              <a:lnSpc>
+                <a:spcPct val="113000"/>
+              </a:lnSpc>
+              <a:spcBef>
+                <a:spcPts val="0"/>
+              </a:spcBef>
+              <a:spcAft>
+                <a:spcPts val="0"/>
+              </a:spcAft>
+            </a:pPr>
+            <a:r>
+              <a:rPr sz="1600" b="1">
+                <a:solidFill>
+                  <a:srgbClr val="5E2A72"/>
+                </a:solidFill>
+                <a:latin typeface="Noto Sans"/>
+              </a:rPr>
+              <a:t>Jakarta: 150,0 kasus per 1.000 penduduk, tertinggi di Indonesia</a:t>
             </a:r>
           </a:p>
         </p:txBody>
@@ -5067,17 +6455,64 @@
       <p:grpSpPr/>
       <p:sp>
         <p:nvSpPr>
-          <p:cNvPr id="2" name="Rectangle 1"/>
-          <p:cNvSpPr/>
-          <p:nvPr/>
-        </p:nvSpPr>
-        <p:spPr>
-          <a:xfrm>
-            <a:off x="685800" y="566928"/>
-            <a:ext cx="146304" cy="146304"/>
+          <p:cNvPr id="2" name="TextBox 1"/>
+          <p:cNvSpPr txBox="1"/>
+          <p:nvPr/>
+        </p:nvSpPr>
+        <p:spPr>
+          <a:xfrm>
+            <a:off x="502920" y="384048"/>
+            <a:ext cx="11155680" cy="914400"/>
           </a:xfrm>
           <a:prstGeom prst="rect">
             <a:avLst/>
+          </a:prstGeom>
+          <a:noFill/>
+        </p:spPr>
+        <p:txBody>
+          <a:bodyPr wrap="square" anchor="t" lIns="0" rIns="0" tIns="0" bIns="0">
+            <a:spAutoFit/>
+          </a:bodyPr>
+          <a:lstStyle/>
+          <a:p>
+            <a:pPr>
+              <a:lnSpc>
+                <a:spcPct val="113000"/>
+              </a:lnSpc>
+              <a:spcBef>
+                <a:spcPts val="0"/>
+              </a:spcBef>
+              <a:spcAft>
+                <a:spcPts val="0"/>
+              </a:spcAft>
+            </a:pPr>
+            <a:r>
+              <a:rPr sz="3100" b="1">
+                <a:solidFill>
+                  <a:srgbClr val="2A1E33"/>
+                </a:solidFill>
+                <a:latin typeface="Noto Sans"/>
+              </a:rPr>
+              <a:t>Temuan 3: 283.270 Kasus ISPA Karhutla</a:t>
+            </a:r>
+          </a:p>
+        </p:txBody>
+      </p:sp>
+      <p:sp>
+        <p:nvSpPr>
+          <p:cNvPr id="3" name="Rounded Rectangle 2"/>
+          <p:cNvSpPr/>
+          <p:nvPr/>
+        </p:nvSpPr>
+        <p:spPr>
+          <a:xfrm>
+            <a:off x="521207" y="1097280"/>
+            <a:ext cx="777240" cy="82296"/>
+          </a:xfrm>
+          <a:prstGeom prst="roundRect">
+            <a:avLst>
+              <a:gd name="adj" fmla="val 5500"/>
+            </a:avLst>
           </a:prstGeom>
           <a:solidFill>
             <a:srgbClr val="EF7D1A"/>
@@ -5111,14 +6546,60 @@
       </p:sp>
       <p:sp>
         <p:nvSpPr>
-          <p:cNvPr id="3" name="TextBox 2"/>
+          <p:cNvPr id="4" name="Rounded Rectangle 3"/>
+          <p:cNvSpPr/>
+          <p:nvPr/>
+        </p:nvSpPr>
+        <p:spPr>
+          <a:xfrm>
+            <a:off x="502920" y="1417320"/>
+            <a:ext cx="4572000" cy="1783080"/>
+          </a:xfrm>
+          <a:prstGeom prst="roundRect">
+            <a:avLst>
+              <a:gd name="adj" fmla="val 5500"/>
+            </a:avLst>
+          </a:prstGeom>
+          <a:solidFill>
+            <a:srgbClr val="5E2A72"/>
+          </a:solidFill>
+          <a:ln>
+            <a:noFill/>
+          </a:ln>
+          <a:effectLst/>
+        </p:spPr>
+        <p:style>
+          <a:lnRef idx="1">
+            <a:schemeClr val="accent1"/>
+          </a:lnRef>
+          <a:fillRef idx="3">
+            <a:schemeClr val="accent1"/>
+          </a:fillRef>
+          <a:effectRef idx="2">
+            <a:schemeClr val="accent1"/>
+          </a:effectRef>
+          <a:fontRef idx="minor">
+            <a:schemeClr val="lt1"/>
+          </a:fontRef>
+        </p:style>
+        <p:txBody>
+          <a:bodyPr rtlCol="0" anchor="ctr"/>
+          <a:lstStyle/>
+          <a:p>
+            <a:pPr algn="ctr"/>
+          </a:p>
+        </p:txBody>
+      </p:sp>
+      <p:sp>
+        <p:nvSpPr>
+          <p:cNvPr id="5" name="TextBox 4"/>
           <p:cNvSpPr txBox="1"/>
           <p:nvPr/>
         </p:nvSpPr>
         <p:spPr>
           <a:xfrm>
-            <a:off x="1005840" y="347472"/>
-            <a:ext cx="10607040" cy="777240"/>
+            <a:off x="822960" y="1627632"/>
+            <a:ext cx="3977639" cy="1463040"/>
           </a:xfrm>
           <a:prstGeom prst="rect">
             <a:avLst/>
@@ -5126,77 +6607,66 @@
           <a:noFill/>
         </p:spPr>
         <p:txBody>
-          <a:bodyPr wrap="square">
+          <a:bodyPr wrap="square" anchor="t" lIns="0" rIns="0" tIns="0" bIns="0">
             <a:spAutoFit/>
           </a:bodyPr>
           <a:lstStyle/>
           <a:p>
             <a:pPr>
+              <a:lnSpc>
+                <a:spcPct val="113000"/>
+              </a:lnSpc>
+              <a:spcBef>
+                <a:spcPts val="0"/>
+              </a:spcBef>
               <a:spcAft>
-                <a:spcPts val="0"/>
+                <a:spcPts val="200"/>
               </a:spcAft>
             </a:pPr>
             <a:r>
-              <a:rPr sz="3200" b="1" i="0">
-                <a:solidFill>
-                  <a:srgbClr val="2A1E33"/>
-                </a:solidFill>
-                <a:latin typeface="Noto Sans"/>
-              </a:rPr>
-              <a:t>Temuan 3: 283.270 Kasus ISPA Karhutla</a:t>
-            </a:r>
-          </a:p>
-        </p:txBody>
-      </p:sp>
-      <p:sp>
-        <p:nvSpPr>
-          <p:cNvPr id="4" name="TextBox 3"/>
-          <p:cNvSpPr txBox="1"/>
-          <p:nvPr/>
-        </p:nvSpPr>
-        <p:spPr>
-          <a:xfrm>
-            <a:off x="685800" y="1371600"/>
-            <a:ext cx="3291840" cy="731520"/>
-          </a:xfrm>
-          <a:prstGeom prst="rect">
-            <a:avLst/>
-          </a:prstGeom>
-          <a:noFill/>
-        </p:spPr>
-        <p:txBody>
-          <a:bodyPr wrap="square">
-            <a:spAutoFit/>
-          </a:bodyPr>
-          <a:lstStyle/>
-          <a:p>
-            <a:pPr>
-              <a:spcAft>
-                <a:spcPts val="0"/>
-              </a:spcAft>
-            </a:pPr>
-            <a:r>
-              <a:rPr sz="4400" b="1" i="0">
-                <a:solidFill>
-                  <a:srgbClr val="5E2A72"/>
+              <a:rPr sz="4400" b="1">
+                <a:solidFill>
+                  <a:srgbClr val="EF7D1A"/>
                 </a:solidFill>
                 <a:latin typeface="Noto Sans"/>
               </a:rPr>
               <a:t>283.270</a:t>
             </a:r>
           </a:p>
-        </p:txBody>
-      </p:sp>
-      <p:sp>
-        <p:nvSpPr>
-          <p:cNvPr id="5" name="TextBox 4"/>
+          <a:p>
+            <a:pPr>
+              <a:lnSpc>
+                <a:spcPct val="113000"/>
+              </a:lnSpc>
+              <a:spcBef>
+                <a:spcPts val="0"/>
+              </a:spcBef>
+              <a:spcAft>
+                <a:spcPts val="0"/>
+              </a:spcAft>
+            </a:pPr>
+            <a:r>
+              <a:rPr sz="1250" b="0">
+                <a:solidFill>
+                  <a:srgbClr val="F8F2E4"/>
+                </a:solidFill>
+                <a:latin typeface="Noto Sans"/>
+              </a:rPr>
+              <a:t>kasus seri pemantauan karhutla, terpisah dari seri nasional SKDR</a:t>
+            </a:r>
+          </a:p>
+        </p:txBody>
+      </p:sp>
+      <p:sp>
+        <p:nvSpPr>
+          <p:cNvPr id="6" name="TextBox 5"/>
           <p:cNvSpPr txBox="1"/>
           <p:nvPr/>
         </p:nvSpPr>
         <p:spPr>
           <a:xfrm>
-            <a:off x="3977639" y="1627632"/>
-            <a:ext cx="7223760" cy="457200"/>
+            <a:off x="502920" y="3429000"/>
+            <a:ext cx="4572000" cy="2651760"/>
           </a:xfrm>
           <a:prstGeom prst="rect">
             <a:avLst/>
@@ -5204,169 +6674,173 @@
           <a:noFill/>
         </p:spPr>
         <p:txBody>
-          <a:bodyPr wrap="square">
+          <a:bodyPr wrap="square" anchor="t" lIns="0" rIns="0" tIns="0" bIns="0">
             <a:spAutoFit/>
           </a:bodyPr>
           <a:lstStyle/>
           <a:p>
             <a:pPr>
-              <a:spcAft>
-                <a:spcPts val="0"/>
-              </a:spcAft>
-            </a:pPr>
-            <a:r>
-              <a:rPr sz="1500" b="0" i="0">
-                <a:solidFill>
-                  <a:srgbClr val="2A1E33"/>
-                </a:solidFill>
-                <a:latin typeface="Noto Sans"/>
-              </a:rPr>
-              <a:t>kasus pada seri pemantauan karhutla, terpisah dari seri nasional SKDR</a:t>
-            </a:r>
-          </a:p>
-        </p:txBody>
-      </p:sp>
-      <p:sp>
-        <p:nvSpPr>
-          <p:cNvPr id="6" name="TextBox 5"/>
-          <p:cNvSpPr txBox="1"/>
-          <p:nvPr/>
-        </p:nvSpPr>
-        <p:spPr>
-          <a:xfrm>
-            <a:off x="685800" y="2606040"/>
-            <a:ext cx="5166360" cy="3840480"/>
-          </a:xfrm>
-          <a:prstGeom prst="rect">
-            <a:avLst/>
-          </a:prstGeom>
-          <a:noFill/>
-        </p:spPr>
-        <p:txBody>
-          <a:bodyPr wrap="square">
-            <a:spAutoFit/>
-          </a:bodyPr>
-          <a:lstStyle/>
-          <a:p>
-            <a:pPr marL="171450" indent="-171450">
               <a:lnSpc>
-                <a:spcPct val="112000"/>
+                <a:spcPct val="113000"/>
               </a:lnSpc>
               <a:spcBef>
-                <a:spcPts val="200"/>
+                <a:spcPts val="0"/>
               </a:spcBef>
               <a:spcAft>
                 <a:spcPts val="1000"/>
               </a:spcAft>
-              <a:buChar char="•"/>
             </a:pPr>
             <a:r>
-              <a:rPr sz="1600" b="0" i="0">
+              <a:rPr sz="1450" b="0">
                 <a:solidFill>
                   <a:srgbClr val="2A1E33"/>
                 </a:solidFill>
                 <a:latin typeface="Noto Sans"/>
               </a:rPr>
-              <a:t>Seri pemantauan karhutla (terpisah dari seri nasional): 283.270 kasus, 18 Agt - 13 Okt 2026.</a:t>
-            </a:r>
-          </a:p>
-          <a:p>
-            <a:pPr marL="171450" indent="-171450">
+              <a:t>Seri pemantauan karhutla mencatat 283.270 kasus pada 18 Agustus sampai 13 Oktober 2026, di 63 kabupaten/kota pada 7 provinsi (rata-rata 4.496 kasus per kab/kota).</a:t>
+            </a:r>
+          </a:p>
+          <a:p>
+            <a:pPr>
               <a:lnSpc>
-                <a:spcPct val="112000"/>
+                <a:spcPct val="113000"/>
               </a:lnSpc>
               <a:spcBef>
-                <a:spcPts val="200"/>
+                <a:spcPts val="0"/>
               </a:spcBef>
               <a:spcAft>
                 <a:spcPts val="1000"/>
               </a:spcAft>
-              <a:buChar char="•"/>
             </a:pPr>
             <a:r>
-              <a:rPr sz="1600" b="0" i="0">
+              <a:rPr sz="1450" b="0">
                 <a:solidFill>
                   <a:srgbClr val="2A1E33"/>
                 </a:solidFill>
                 <a:latin typeface="Noto Sans"/>
               </a:rPr>
-              <a:t>Tercatat di 63 kabupaten/kota, 7 provinsi - rata-rata 4.496 kasus per kab/kota.</a:t>
-            </a:r>
-          </a:p>
-          <a:p>
-            <a:pPr marL="171450" indent="-171450">
+              <a:t>Kalimantan Selatan (74.636) dan Sumatera Selatan (74.458) bersama menyumbang 52,6% kasus karhutla; selisih keduanya hanya 178 kasus.</a:t>
+            </a:r>
+          </a:p>
+          <a:p>
+            <a:pPr>
               <a:lnSpc>
-                <a:spcPct val="112000"/>
+                <a:spcPct val="113000"/>
               </a:lnSpc>
               <a:spcBef>
-                <a:spcPts val="200"/>
+                <a:spcPts val="0"/>
               </a:spcBef>
               <a:spcAft>
                 <a:spcPts val="1000"/>
               </a:spcAft>
-              <a:buChar char="•"/>
             </a:pPr>
             <a:r>
-              <a:rPr sz="1600" b="0" i="0">
+              <a:rPr sz="1450" b="0">
                 <a:solidFill>
                   <a:srgbClr val="2A1E33"/>
                 </a:solidFill>
                 <a:latin typeface="Noto Sans"/>
               </a:rPr>
-              <a:t>Kalsel (74.636) dan Sumsel (74.458) bersama = 52,6% kasus karhutla; selisih hanya 178 kasus.</a:t>
-            </a:r>
-          </a:p>
-          <a:p>
-            <a:pPr marL="171450" indent="-171450">
-              <a:lnSpc>
-                <a:spcPct val="112000"/>
-              </a:lnSpc>
-              <a:spcBef>
-                <a:spcPts val="200"/>
-              </a:spcBef>
-              <a:spcAft>
-                <a:spcPts val="1000"/>
-              </a:spcAft>
-              <a:buChar char="•"/>
-            </a:pPr>
-            <a:r>
-              <a:rPr sz="1600" b="0" i="0">
-                <a:solidFill>
-                  <a:srgbClr val="2A1E33"/>
-                </a:solidFill>
-                <a:latin typeface="Noto Sans"/>
-              </a:rPr>
-              <a:t>Kumulatif naik 21,1x dalam 7 minggu: 13.449 (27 Agt) → 283.270 (13 Okt).</a:t>
-            </a:r>
-          </a:p>
-          <a:p>
-            <a:pPr marL="171450" indent="-171450">
-              <a:lnSpc>
-                <a:spcPct val="112000"/>
-              </a:lnSpc>
-              <a:spcBef>
-                <a:spcPts val="200"/>
-              </a:spcBef>
-              <a:spcAft>
-                <a:spcPts val="1000"/>
-              </a:spcAft>
-              <a:buChar char="•"/>
-            </a:pPr>
-            <a:r>
-              <a:rPr sz="1600" b="0" i="0">
-                <a:solidFill>
-                  <a:srgbClr val="2A1E33"/>
-                </a:solidFill>
-                <a:latin typeface="Noto Sans"/>
-              </a:rPr>
-              <a:t>13 Oktober saja: 3.897 kasus baru harian.</a:t>
-            </a:r>
+              <a:t>Kumulatif kasus naik 21,1 kali dalam masa pemantauan: asap menyebar jauh lebih cepat daripada respons awal.</a:t>
+            </a:r>
+          </a:p>
+        </p:txBody>
+      </p:sp>
+      <p:sp>
+        <p:nvSpPr>
+          <p:cNvPr id="7" name="Rounded Rectangle 6"/>
+          <p:cNvSpPr/>
+          <p:nvPr/>
+        </p:nvSpPr>
+        <p:spPr>
+          <a:xfrm>
+            <a:off x="5458968" y="1481328"/>
+            <a:ext cx="6291072" cy="4206240"/>
+          </a:xfrm>
+          <a:prstGeom prst="roundRect">
+            <a:avLst>
+              <a:gd name="adj" fmla="val 5500"/>
+            </a:avLst>
+          </a:prstGeom>
+          <a:solidFill>
+            <a:srgbClr val="DDCFB4"/>
+          </a:solidFill>
+          <a:ln>
+            <a:noFill/>
+          </a:ln>
+          <a:effectLst/>
+        </p:spPr>
+        <p:style>
+          <a:lnRef idx="1">
+            <a:schemeClr val="accent1"/>
+          </a:lnRef>
+          <a:fillRef idx="3">
+            <a:schemeClr val="accent1"/>
+          </a:fillRef>
+          <a:effectRef idx="2">
+            <a:schemeClr val="accent1"/>
+          </a:effectRef>
+          <a:fontRef idx="minor">
+            <a:schemeClr val="lt1"/>
+          </a:fontRef>
+        </p:style>
+        <p:txBody>
+          <a:bodyPr rtlCol="0" anchor="ctr"/>
+          <a:lstStyle/>
+          <a:p>
+            <a:pPr algn="ctr"/>
+          </a:p>
+        </p:txBody>
+      </p:sp>
+      <p:sp>
+        <p:nvSpPr>
+          <p:cNvPr id="8" name="Rounded Rectangle 7"/>
+          <p:cNvSpPr/>
+          <p:nvPr/>
+        </p:nvSpPr>
+        <p:spPr>
+          <a:xfrm>
+            <a:off x="5394960" y="1417320"/>
+            <a:ext cx="6291072" cy="4206240"/>
+          </a:xfrm>
+          <a:prstGeom prst="roundRect">
+            <a:avLst>
+              <a:gd name="adj" fmla="val 5500"/>
+            </a:avLst>
+          </a:prstGeom>
+          <a:solidFill>
+            <a:srgbClr val="F8F2E4"/>
+          </a:solidFill>
+          <a:ln>
+            <a:noFill/>
+          </a:ln>
+          <a:effectLst/>
+        </p:spPr>
+        <p:style>
+          <a:lnRef idx="1">
+            <a:schemeClr val="accent1"/>
+          </a:lnRef>
+          <a:fillRef idx="3">
+            <a:schemeClr val="accent1"/>
+          </a:fillRef>
+          <a:effectRef idx="2">
+            <a:schemeClr val="accent1"/>
+          </a:effectRef>
+          <a:fontRef idx="minor">
+            <a:schemeClr val="lt1"/>
+          </a:fontRef>
+        </p:style>
+        <p:txBody>
+          <a:bodyPr rtlCol="0" anchor="ctr"/>
+          <a:lstStyle/>
+          <a:p>
+            <a:pPr algn="ctr"/>
           </a:p>
         </p:txBody>
       </p:sp>
       <p:pic>
         <p:nvPicPr>
-          <p:cNvPr id="7" name="Picture 6" descr="06_karhutla_pertumbuhan.png"/>
+          <p:cNvPr id="9" name="Picture 8" descr="04_karhutla_provinsi.png"/>
           <p:cNvPicPr>
             <a:picLocks noChangeAspect="1"/>
           </p:cNvPicPr>
@@ -5380,8 +6854,8 @@
         </p:blipFill>
         <p:spPr>
           <a:xfrm>
-            <a:off x="6126480" y="2606040"/>
-            <a:ext cx="5394960" cy="3374136"/>
+            <a:off x="5596128" y="2211832"/>
+            <a:ext cx="5888736" cy="2617216"/>
           </a:xfrm>
           <a:prstGeom prst="rect">
             <a:avLst/>
@@ -5390,14 +6864,14 @@
       </p:pic>
       <p:sp>
         <p:nvSpPr>
-          <p:cNvPr id="8" name="TextBox 7"/>
+          <p:cNvPr id="10" name="TextBox 9"/>
           <p:cNvSpPr txBox="1"/>
           <p:nvPr/>
         </p:nvSpPr>
         <p:spPr>
           <a:xfrm>
-            <a:off x="6126480" y="6144768"/>
-            <a:ext cx="5394960" cy="365760"/>
+            <a:off x="5394960" y="5714999"/>
+            <a:ext cx="6291072" cy="274320"/>
           </a:xfrm>
           <a:prstGeom prst="rect">
             <a:avLst/>
@@ -5405,24 +6879,30 @@
           <a:noFill/>
         </p:spPr>
         <p:txBody>
-          <a:bodyPr wrap="square">
+          <a:bodyPr wrap="square" anchor="t" lIns="0" rIns="0" tIns="0" bIns="0">
             <a:spAutoFit/>
           </a:bodyPr>
           <a:lstStyle/>
           <a:p>
             <a:pPr>
+              <a:lnSpc>
+                <a:spcPct val="113000"/>
+              </a:lnSpc>
+              <a:spcBef>
+                <a:spcPts val="0"/>
+              </a:spcBef>
               <a:spcAft>
                 <a:spcPts val="0"/>
               </a:spcAft>
             </a:pPr>
             <a:r>
-              <a:rPr sz="1200" b="0" i="1">
-                <a:solidFill>
-                  <a:srgbClr val="6B5B74"/>
+              <a:rPr sz="1050" b="0">
+                <a:solidFill>
+                  <a:srgbClr val="8A5CA6"/>
                 </a:solidFill>
                 <a:latin typeface="Noto Sans"/>
               </a:rPr>
-              <a:t>Pertumbuhan kumulatif seri karhutla.</a:t>
+              <a:t>Chart: kasus karhutla per provinsi, seri pemantauan Kemenkes.</a:t>
             </a:r>
           </a:p>
         </p:txBody>
@@ -5455,17 +6935,64 @@
       <p:grpSpPr/>
       <p:sp>
         <p:nvSpPr>
-          <p:cNvPr id="2" name="Rectangle 1"/>
-          <p:cNvSpPr/>
-          <p:nvPr/>
-        </p:nvSpPr>
-        <p:spPr>
-          <a:xfrm>
-            <a:off x="685800" y="566928"/>
-            <a:ext cx="146304" cy="146304"/>
+          <p:cNvPr id="2" name="TextBox 1"/>
+          <p:cNvSpPr txBox="1"/>
+          <p:nvPr/>
+        </p:nvSpPr>
+        <p:spPr>
+          <a:xfrm>
+            <a:off x="502920" y="384048"/>
+            <a:ext cx="11155680" cy="914400"/>
           </a:xfrm>
           <a:prstGeom prst="rect">
             <a:avLst/>
+          </a:prstGeom>
+          <a:noFill/>
+        </p:spPr>
+        <p:txBody>
+          <a:bodyPr wrap="square" anchor="t" lIns="0" rIns="0" tIns="0" bIns="0">
+            <a:spAutoFit/>
+          </a:bodyPr>
+          <a:lstStyle/>
+          <a:p>
+            <a:pPr>
+              <a:lnSpc>
+                <a:spcPct val="113000"/>
+              </a:lnSpc>
+              <a:spcBef>
+                <a:spcPts val="0"/>
+              </a:spcBef>
+              <a:spcAft>
+                <a:spcPts val="0"/>
+              </a:spcAft>
+            </a:pPr>
+            <a:r>
+              <a:rPr sz="3100" b="1">
+                <a:solidFill>
+                  <a:srgbClr val="2A1E33"/>
+                </a:solidFill>
+                <a:latin typeface="Noto Sans"/>
+              </a:rPr>
+              <a:t>Temuan 4: Hampir 1 dari 4 Kasus Karhutla adalah Balita</a:t>
+            </a:r>
+          </a:p>
+        </p:txBody>
+      </p:sp>
+      <p:sp>
+        <p:nvSpPr>
+          <p:cNvPr id="3" name="Rounded Rectangle 2"/>
+          <p:cNvSpPr/>
+          <p:nvPr/>
+        </p:nvSpPr>
+        <p:spPr>
+          <a:xfrm>
+            <a:off x="521207" y="1097280"/>
+            <a:ext cx="777240" cy="82296"/>
+          </a:xfrm>
+          <a:prstGeom prst="roundRect">
+            <a:avLst>
+              <a:gd name="adj" fmla="val 5500"/>
+            </a:avLst>
           </a:prstGeom>
           <a:solidFill>
             <a:srgbClr val="EF7D1A"/>
@@ -5499,14 +7026,14 @@
       </p:sp>
       <p:sp>
         <p:nvSpPr>
-          <p:cNvPr id="3" name="TextBox 2"/>
+          <p:cNvPr id="4" name="TextBox 3"/>
           <p:cNvSpPr txBox="1"/>
           <p:nvPr/>
         </p:nvSpPr>
         <p:spPr>
           <a:xfrm>
-            <a:off x="1005840" y="347472"/>
-            <a:ext cx="10607040" cy="777240"/>
+            <a:off x="502920" y="1463040"/>
+            <a:ext cx="4526280" cy="3291840"/>
           </a:xfrm>
           <a:prstGeom prst="rect">
             <a:avLst/>
@@ -5514,169 +7041,286 @@
           <a:noFill/>
         </p:spPr>
         <p:txBody>
-          <a:bodyPr wrap="square">
+          <a:bodyPr wrap="square" anchor="t" lIns="0" rIns="0" tIns="0" bIns="0">
             <a:spAutoFit/>
           </a:bodyPr>
           <a:lstStyle/>
           <a:p>
             <a:pPr>
-              <a:spcAft>
-                <a:spcPts val="0"/>
-              </a:spcAft>
-            </a:pPr>
-            <a:r>
-              <a:rPr sz="3200" b="1" i="0">
-                <a:solidFill>
-                  <a:srgbClr val="2A1E33"/>
-                </a:solidFill>
-                <a:latin typeface="Noto Sans"/>
-              </a:rPr>
-              <a:t>Temuan 4: Hampir 1 dari 4 Kasus Karhutla adalah Balita</a:t>
-            </a:r>
-          </a:p>
-        </p:txBody>
-      </p:sp>
-      <p:sp>
-        <p:nvSpPr>
-          <p:cNvPr id="4" name="TextBox 3"/>
-          <p:cNvSpPr txBox="1"/>
-          <p:nvPr/>
-        </p:nvSpPr>
-        <p:spPr>
-          <a:xfrm>
-            <a:off x="6355080" y="1463040"/>
-            <a:ext cx="5166360" cy="4846320"/>
-          </a:xfrm>
-          <a:prstGeom prst="rect">
-            <a:avLst/>
-          </a:prstGeom>
-          <a:noFill/>
-        </p:spPr>
-        <p:txBody>
-          <a:bodyPr wrap="square">
-            <a:spAutoFit/>
-          </a:bodyPr>
-          <a:lstStyle/>
-          <a:p>
-            <a:pPr marL="171450" indent="-171450">
               <a:lnSpc>
-                <a:spcPct val="112000"/>
+                <a:spcPct val="113000"/>
               </a:lnSpc>
               <a:spcBef>
-                <a:spcPts val="200"/>
+                <a:spcPts val="0"/>
               </a:spcBef>
               <a:spcAft>
                 <a:spcPts val="1000"/>
               </a:spcAft>
-              <a:buChar char="•"/>
             </a:pPr>
             <a:r>
-              <a:rPr sz="1600" b="0" i="0">
+              <a:rPr sz="1550" b="0">
                 <a:solidFill>
                   <a:srgbClr val="2A1E33"/>
                 </a:solidFill>
                 <a:latin typeface="Noto Sans"/>
               </a:rPr>
-              <a:t>Balita (0-5 tahun): 63.711 kasus = 22,5% dari total seri karhutla.</a:t>
-            </a:r>
-          </a:p>
-          <a:p>
-            <a:pPr marL="171450" indent="-171450">
+              <a:t>Balita (0-5 tahun) mencatat 63.711 kasus, setara 22,5% dari total seri karhutla. Kelompok di atas 5 tahun: 219.559 kasus (77,5%).</a:t>
+            </a:r>
+          </a:p>
+          <a:p>
+            <a:pPr>
               <a:lnSpc>
-                <a:spcPct val="112000"/>
+                <a:spcPct val="113000"/>
               </a:lnSpc>
               <a:spcBef>
-                <a:spcPts val="200"/>
+                <a:spcPts val="0"/>
               </a:spcBef>
               <a:spcAft>
                 <a:spcPts val="1000"/>
               </a:spcAft>
-              <a:buChar char="•"/>
             </a:pPr>
             <a:r>
-              <a:rPr sz="1600" b="0" i="0">
+              <a:rPr sz="1550" b="0">
                 <a:solidFill>
                   <a:srgbClr val="2A1E33"/>
                 </a:solidFill>
                 <a:latin typeface="Noto Sans"/>
               </a:rPr>
-              <a:t>Usia di atas 5 tahun: 219.559 kasus (77,5%).</a:t>
-            </a:r>
-          </a:p>
-          <a:p>
-            <a:pPr marL="171450" indent="-171450">
+              <a:t>Porsinya stabil: 23,1% pada 21 September menjadi 22,5% pada 13 Oktober. Anak adalah kelompok rentan utama paparan asap: saluran napas lebih kecil, frekuensi napas lebih tinggi.</a:t>
+            </a:r>
+          </a:p>
+          <a:p>
+            <a:pPr>
               <a:lnSpc>
-                <a:spcPct val="112000"/>
+                <a:spcPct val="113000"/>
               </a:lnSpc>
               <a:spcBef>
-                <a:spcPts val="200"/>
+                <a:spcPts val="0"/>
               </a:spcBef>
               <a:spcAft>
                 <a:spcPts val="1000"/>
               </a:spcAft>
-              <a:buChar char="•"/>
             </a:pPr>
             <a:r>
-              <a:rPr sz="1600" b="0" i="0">
+              <a:rPr sz="1550" b="0">
                 <a:solidFill>
                   <a:srgbClr val="2A1E33"/>
                 </a:solidFill>
                 <a:latin typeface="Noto Sans"/>
               </a:rPr>
-              <a:t>Porsi balita stabil: 23,1% (21 Sep) → 22,5% (13 Okt).</a:t>
-            </a:r>
-          </a:p>
-          <a:p>
-            <a:pPr marL="171450" indent="-171450">
+              <a:t>Respons pemerintah: 2.106 tenaga kesehatan dimobilisasi dan lebih dari 2,8 juta masker didistribusikan.</a:t>
+            </a:r>
+          </a:p>
+        </p:txBody>
+      </p:sp>
+      <p:sp>
+        <p:nvSpPr>
+          <p:cNvPr id="5" name="Rounded Rectangle 4"/>
+          <p:cNvSpPr/>
+          <p:nvPr/>
+        </p:nvSpPr>
+        <p:spPr>
+          <a:xfrm>
+            <a:off x="502920" y="4846320"/>
+            <a:ext cx="4526280" cy="1170432"/>
+          </a:xfrm>
+          <a:prstGeom prst="roundRect">
+            <a:avLst>
+              <a:gd name="adj" fmla="val 5500"/>
+            </a:avLst>
+          </a:prstGeom>
+          <a:solidFill>
+            <a:srgbClr val="5E2A72"/>
+          </a:solidFill>
+          <a:ln>
+            <a:noFill/>
+          </a:ln>
+          <a:effectLst/>
+        </p:spPr>
+        <p:style>
+          <a:lnRef idx="1">
+            <a:schemeClr val="accent1"/>
+          </a:lnRef>
+          <a:fillRef idx="3">
+            <a:schemeClr val="accent1"/>
+          </a:fillRef>
+          <a:effectRef idx="2">
+            <a:schemeClr val="accent1"/>
+          </a:effectRef>
+          <a:fontRef idx="minor">
+            <a:schemeClr val="lt1"/>
+          </a:fontRef>
+        </p:style>
+        <p:txBody>
+          <a:bodyPr rtlCol="0" anchor="ctr"/>
+          <a:lstStyle/>
+          <a:p>
+            <a:pPr algn="ctr"/>
+          </a:p>
+        </p:txBody>
+      </p:sp>
+      <p:sp>
+        <p:nvSpPr>
+          <p:cNvPr id="6" name="TextBox 5"/>
+          <p:cNvSpPr txBox="1"/>
+          <p:nvPr/>
+        </p:nvSpPr>
+        <p:spPr>
+          <a:xfrm>
+            <a:off x="777240" y="5010912"/>
+            <a:ext cx="4023360" cy="896112"/>
+          </a:xfrm>
+          <a:prstGeom prst="rect">
+            <a:avLst/>
+          </a:prstGeom>
+          <a:noFill/>
+        </p:spPr>
+        <p:txBody>
+          <a:bodyPr wrap="square" anchor="t" lIns="0" rIns="0" tIns="0" bIns="0">
+            <a:spAutoFit/>
+          </a:bodyPr>
+          <a:lstStyle/>
+          <a:p>
+            <a:pPr>
               <a:lnSpc>
-                <a:spcPct val="112000"/>
+                <a:spcPct val="113000"/>
               </a:lnSpc>
               <a:spcBef>
-                <a:spcPts val="200"/>
+                <a:spcPts val="0"/>
               </a:spcBef>
               <a:spcAft>
-                <a:spcPts val="1000"/>
+                <a:spcPts val="200"/>
               </a:spcAft>
-              <a:buChar char="•"/>
             </a:pPr>
             <a:r>
-              <a:rPr sz="1600" b="0" i="0">
-                <a:solidFill>
-                  <a:srgbClr val="2A1E33"/>
+              <a:rPr sz="2700" b="1">
+                <a:solidFill>
+                  <a:srgbClr val="EF7D1A"/>
                 </a:solidFill>
                 <a:latin typeface="Noto Sans"/>
               </a:rPr>
-              <a:t>Anak adalah kelompok rentan utama paparan asap: saluran napas lebih kecil, frekuensi napas lebih tinggi.</a:t>
-            </a:r>
-          </a:p>
-          <a:p>
-            <a:pPr marL="171450" indent="-171450">
+              <a:t>22,5%</a:t>
+            </a:r>
+          </a:p>
+          <a:p>
+            <a:pPr>
               <a:lnSpc>
-                <a:spcPct val="112000"/>
+                <a:spcPct val="113000"/>
               </a:lnSpc>
               <a:spcBef>
-                <a:spcPts val="200"/>
+                <a:spcPts val="0"/>
               </a:spcBef>
               <a:spcAft>
-                <a:spcPts val="1000"/>
+                <a:spcPts val="0"/>
               </a:spcAft>
-              <a:buChar char="•"/>
             </a:pPr>
             <a:r>
-              <a:rPr sz="1600" b="0" i="0">
-                <a:solidFill>
-                  <a:srgbClr val="2A1E33"/>
+              <a:rPr sz="1250" b="0">
+                <a:solidFill>
+                  <a:srgbClr val="F8F2E4"/>
                 </a:solidFill>
                 <a:latin typeface="Noto Sans"/>
               </a:rPr>
-              <a:t>Respons: 2.106 tenaga kesehatan dimobilisasi; &gt;2,8 juta masker didistribusikan.</a:t>
-            </a:r>
+              <a:t>kasus karhutla adalah balita usia 0-5 tahun</a:t>
+            </a:r>
+          </a:p>
+        </p:txBody>
+      </p:sp>
+      <p:sp>
+        <p:nvSpPr>
+          <p:cNvPr id="7" name="Rounded Rectangle 6"/>
+          <p:cNvSpPr/>
+          <p:nvPr/>
+        </p:nvSpPr>
+        <p:spPr>
+          <a:xfrm>
+            <a:off x="5413248" y="1481328"/>
+            <a:ext cx="6336792" cy="3977639"/>
+          </a:xfrm>
+          <a:prstGeom prst="roundRect">
+            <a:avLst>
+              <a:gd name="adj" fmla="val 5500"/>
+            </a:avLst>
+          </a:prstGeom>
+          <a:solidFill>
+            <a:srgbClr val="DDCFB4"/>
+          </a:solidFill>
+          <a:ln>
+            <a:noFill/>
+          </a:ln>
+          <a:effectLst/>
+        </p:spPr>
+        <p:style>
+          <a:lnRef idx="1">
+            <a:schemeClr val="accent1"/>
+          </a:lnRef>
+          <a:fillRef idx="3">
+            <a:schemeClr val="accent1"/>
+          </a:fillRef>
+          <a:effectRef idx="2">
+            <a:schemeClr val="accent1"/>
+          </a:effectRef>
+          <a:fontRef idx="minor">
+            <a:schemeClr val="lt1"/>
+          </a:fontRef>
+        </p:style>
+        <p:txBody>
+          <a:bodyPr rtlCol="0" anchor="ctr"/>
+          <a:lstStyle/>
+          <a:p>
+            <a:pPr algn="ctr"/>
+          </a:p>
+        </p:txBody>
+      </p:sp>
+      <p:sp>
+        <p:nvSpPr>
+          <p:cNvPr id="8" name="Rounded Rectangle 7"/>
+          <p:cNvSpPr/>
+          <p:nvPr/>
+        </p:nvSpPr>
+        <p:spPr>
+          <a:xfrm>
+            <a:off x="5349240" y="1417320"/>
+            <a:ext cx="6336792" cy="3977639"/>
+          </a:xfrm>
+          <a:prstGeom prst="roundRect">
+            <a:avLst>
+              <a:gd name="adj" fmla="val 5500"/>
+            </a:avLst>
+          </a:prstGeom>
+          <a:solidFill>
+            <a:srgbClr val="F8F2E4"/>
+          </a:solidFill>
+          <a:ln>
+            <a:noFill/>
+          </a:ln>
+          <a:effectLst/>
+        </p:spPr>
+        <p:style>
+          <a:lnRef idx="1">
+            <a:schemeClr val="accent1"/>
+          </a:lnRef>
+          <a:fillRef idx="3">
+            <a:schemeClr val="accent1"/>
+          </a:fillRef>
+          <a:effectRef idx="2">
+            <a:schemeClr val="accent1"/>
+          </a:effectRef>
+          <a:fontRef idx="minor">
+            <a:schemeClr val="lt1"/>
+          </a:fontRef>
+        </p:style>
+        <p:txBody>
+          <a:bodyPr rtlCol="0" anchor="ctr"/>
+          <a:lstStyle/>
+          <a:p>
+            <a:pPr algn="ctr"/>
           </a:p>
         </p:txBody>
       </p:sp>
       <p:pic>
         <p:nvPicPr>
-          <p:cNvPr id="5" name="Picture 4" descr="05_karhutla_usia.png"/>
+          <p:cNvPr id="9" name="Picture 8" descr="05_karhutla_usia.png"/>
           <p:cNvPicPr>
             <a:picLocks noChangeAspect="1"/>
           </p:cNvPicPr>
@@ -5690,8 +7334,8 @@
         </p:blipFill>
         <p:spPr>
           <a:xfrm>
-            <a:off x="685800" y="1600200"/>
-            <a:ext cx="4846320" cy="3465576"/>
+            <a:off x="6014923" y="1618488"/>
+            <a:ext cx="5005425" cy="3575303"/>
           </a:xfrm>
           <a:prstGeom prst="rect">
             <a:avLst/>
@@ -5700,14 +7344,14 @@
       </p:pic>
       <p:sp>
         <p:nvSpPr>
-          <p:cNvPr id="6" name="TextBox 5"/>
+          <p:cNvPr id="10" name="TextBox 9"/>
           <p:cNvSpPr txBox="1"/>
           <p:nvPr/>
         </p:nvSpPr>
         <p:spPr>
           <a:xfrm>
-            <a:off x="685800" y="5230368"/>
-            <a:ext cx="4846320" cy="365760"/>
+            <a:off x="5349240" y="5486399"/>
+            <a:ext cx="6336792" cy="274320"/>
           </a:xfrm>
           <a:prstGeom prst="rect">
             <a:avLst/>
@@ -5715,24 +7359,30 @@
           <a:noFill/>
         </p:spPr>
         <p:txBody>
-          <a:bodyPr wrap="square">
+          <a:bodyPr wrap="square" anchor="t" lIns="0" rIns="0" tIns="0" bIns="0">
             <a:spAutoFit/>
           </a:bodyPr>
           <a:lstStyle/>
           <a:p>
             <a:pPr>
+              <a:lnSpc>
+                <a:spcPct val="113000"/>
+              </a:lnSpc>
+              <a:spcBef>
+                <a:spcPts val="0"/>
+              </a:spcBef>
               <a:spcAft>
                 <a:spcPts val="0"/>
               </a:spcAft>
             </a:pPr>
             <a:r>
-              <a:rPr sz="1200" b="0" i="1">
-                <a:solidFill>
-                  <a:srgbClr val="6B5B74"/>
+              <a:rPr sz="1050" b="0">
+                <a:solidFill>
+                  <a:srgbClr val="8A5CA6"/>
                 </a:solidFill>
                 <a:latin typeface="Noto Sans"/>
               </a:rPr>
-              <a:t>Kasus ISPA karhutla menurut usia.</a:t>
+              <a:t>Chart: kasus ISPA karhutla menurut kelompok usia.</a:t>
             </a:r>
           </a:p>
         </p:txBody>
@@ -5765,17 +7415,64 @@
       <p:grpSpPr/>
       <p:sp>
         <p:nvSpPr>
-          <p:cNvPr id="2" name="Rectangle 1"/>
-          <p:cNvSpPr/>
-          <p:nvPr/>
-        </p:nvSpPr>
-        <p:spPr>
-          <a:xfrm>
-            <a:off x="685800" y="566928"/>
-            <a:ext cx="146304" cy="146304"/>
+          <p:cNvPr id="2" name="TextBox 1"/>
+          <p:cNvSpPr txBox="1"/>
+          <p:nvPr/>
+        </p:nvSpPr>
+        <p:spPr>
+          <a:xfrm>
+            <a:off x="502920" y="384048"/>
+            <a:ext cx="11155680" cy="914400"/>
           </a:xfrm>
           <a:prstGeom prst="rect">
             <a:avLst/>
+          </a:prstGeom>
+          <a:noFill/>
+        </p:spPr>
+        <p:txBody>
+          <a:bodyPr wrap="square" anchor="t" lIns="0" rIns="0" tIns="0" bIns="0">
+            <a:spAutoFit/>
+          </a:bodyPr>
+          <a:lstStyle/>
+          <a:p>
+            <a:pPr>
+              <a:lnSpc>
+                <a:spcPct val="113000"/>
+              </a:lnSpc>
+              <a:spcBef>
+                <a:spcPts val="0"/>
+              </a:spcBef>
+              <a:spcAft>
+                <a:spcPts val="0"/>
+              </a:spcAft>
+            </a:pPr>
+            <a:r>
+              <a:rPr sz="3100" b="1">
+                <a:solidFill>
+                  <a:srgbClr val="2A1E33"/>
+                </a:solidFill>
+                <a:latin typeface="Noto Sans"/>
+              </a:rPr>
+              <a:t>Temuan 5: Udara Jauh di Atas Ambang Berbahaya</a:t>
+            </a:r>
+          </a:p>
+        </p:txBody>
+      </p:sp>
+      <p:sp>
+        <p:nvSpPr>
+          <p:cNvPr id="3" name="Rounded Rectangle 2"/>
+          <p:cNvSpPr/>
+          <p:nvPr/>
+        </p:nvSpPr>
+        <p:spPr>
+          <a:xfrm>
+            <a:off x="521207" y="1097280"/>
+            <a:ext cx="777240" cy="82296"/>
+          </a:xfrm>
+          <a:prstGeom prst="roundRect">
+            <a:avLst>
+              <a:gd name="adj" fmla="val 5500"/>
+            </a:avLst>
           </a:prstGeom>
           <a:solidFill>
             <a:srgbClr val="EF7D1A"/>
@@ -5809,184 +7506,99 @@
       </p:sp>
       <p:sp>
         <p:nvSpPr>
-          <p:cNvPr id="3" name="TextBox 2"/>
-          <p:cNvSpPr txBox="1"/>
-          <p:nvPr/>
-        </p:nvSpPr>
-        <p:spPr>
-          <a:xfrm>
-            <a:off x="1005840" y="347472"/>
-            <a:ext cx="10607040" cy="777240"/>
-          </a:xfrm>
-          <a:prstGeom prst="rect">
-            <a:avLst/>
-          </a:prstGeom>
-          <a:noFill/>
-        </p:spPr>
-        <p:txBody>
-          <a:bodyPr wrap="square">
-            <a:spAutoFit/>
-          </a:bodyPr>
-          <a:lstStyle/>
-          <a:p>
-            <a:pPr>
-              <a:spcAft>
-                <a:spcPts val="0"/>
-              </a:spcAft>
-            </a:pPr>
-            <a:r>
-              <a:rPr sz="3200" b="1" i="0">
-                <a:solidFill>
-                  <a:srgbClr val="2A1E33"/>
-                </a:solidFill>
-                <a:latin typeface="Noto Sans"/>
-              </a:rPr>
-              <a:t>Temuan 5: Udara Jauh di Atas Ambang Berbahaya</a:t>
-            </a:r>
-          </a:p>
-        </p:txBody>
-      </p:sp>
-      <p:sp>
-        <p:nvSpPr>
-          <p:cNvPr id="4" name="TextBox 3"/>
-          <p:cNvSpPr txBox="1"/>
-          <p:nvPr/>
-        </p:nvSpPr>
-        <p:spPr>
-          <a:xfrm>
-            <a:off x="685800" y="1463040"/>
-            <a:ext cx="5166360" cy="4846320"/>
-          </a:xfrm>
-          <a:prstGeom prst="rect">
-            <a:avLst/>
-          </a:prstGeom>
-          <a:noFill/>
-        </p:spPr>
-        <p:txBody>
-          <a:bodyPr wrap="square">
-            <a:spAutoFit/>
-          </a:bodyPr>
-          <a:lstStyle/>
-          <a:p>
-            <a:pPr marL="171450" indent="-171450">
-              <a:lnSpc>
-                <a:spcPct val="112000"/>
-              </a:lnSpc>
-              <a:spcBef>
-                <a:spcPts val="200"/>
-              </a:spcBef>
-              <a:spcAft>
-                <a:spcPts val="1000"/>
-              </a:spcAft>
-              <a:buChar char="•"/>
-            </a:pPr>
-            <a:r>
-              <a:rPr sz="1600" b="0" i="0">
-                <a:solidFill>
-                  <a:srgbClr val="2A1E33"/>
-                </a:solidFill>
-                <a:latin typeface="Noto Sans"/>
-              </a:rPr>
-              <a:t>PM2,5 di 10 wilayah terburuk: 507-1.837 (12 Okt 2026, 15:00 WIB).</a:t>
-            </a:r>
-          </a:p>
-          <a:p>
-            <a:pPr marL="171450" indent="-171450">
-              <a:lnSpc>
-                <a:spcPct val="112000"/>
-              </a:lnSpc>
-              <a:spcBef>
-                <a:spcPts val="200"/>
-              </a:spcBef>
-              <a:spcAft>
-                <a:spcPts val="1000"/>
-              </a:spcAft>
-              <a:buChar char="•"/>
-            </a:pPr>
-            <a:r>
-              <a:rPr sz="1600" b="0" i="0">
-                <a:solidFill>
-                  <a:srgbClr val="2A1E33"/>
-                </a:solidFill>
-                <a:latin typeface="Noto Sans"/>
-              </a:rPr>
-              <a:t>Barito Kuala 1.837 = 6,1 kali ambang ISPU 'berbahaya' (&gt;300).</a:t>
-            </a:r>
-          </a:p>
-          <a:p>
-            <a:pPr marL="171450" indent="-171450">
-              <a:lnSpc>
-                <a:spcPct val="112000"/>
-              </a:lnSpc>
-              <a:spcBef>
-                <a:spcPts val="200"/>
-              </a:spcBef>
-              <a:spcAft>
-                <a:spcPts val="1000"/>
-              </a:spcAft>
-              <a:buChar char="•"/>
-            </a:pPr>
-            <a:r>
-              <a:rPr sz="1600" b="0" i="0">
-                <a:solidFill>
-                  <a:srgbClr val="2A1E33"/>
-                </a:solidFill>
-                <a:latin typeface="Noto Sans"/>
-              </a:rPr>
-              <a:t>7 dari 10 wilayah terburuk berada di Kalimantan Tengah.</a:t>
-            </a:r>
-          </a:p>
-          <a:p>
-            <a:pPr marL="171450" indent="-171450">
-              <a:lnSpc>
-                <a:spcPct val="112000"/>
-              </a:lnSpc>
-              <a:spcBef>
-                <a:spcPts val="200"/>
-              </a:spcBef>
-              <a:spcAft>
-                <a:spcPts val="1000"/>
-              </a:spcAft>
-              <a:buChar char="•"/>
-            </a:pPr>
-            <a:r>
-              <a:rPr sz="1600" b="0" i="0">
-                <a:solidFill>
-                  <a:srgbClr val="2A1E33"/>
-                </a:solidFill>
-                <a:latin typeface="Noto Sans"/>
-              </a:rPr>
-              <a:t>Kemenkes: 12 kab/kota berkategori berbahaya, 9 wilayah sangat tidak sehat.</a:t>
-            </a:r>
-          </a:p>
-          <a:p>
-            <a:pPr marL="171450" indent="-171450">
-              <a:lnSpc>
-                <a:spcPct val="112000"/>
-              </a:lnSpc>
-              <a:spcBef>
-                <a:spcPts val="200"/>
-              </a:spcBef>
-              <a:spcAft>
-                <a:spcPts val="1000"/>
-              </a:spcAft>
-              <a:buChar char="•"/>
-            </a:pPr>
-            <a:r>
-              <a:rPr sz="1600" b="0" i="0">
-                <a:solidFill>
-                  <a:srgbClr val="2A1E33"/>
-                </a:solidFill>
-                <a:latin typeface="Noto Sans"/>
-              </a:rPr>
-              <a:t>Asap karhutla mengandung PM2,5 yang masuk jauh ke saluran pernapasan (WHO).</a:t>
-            </a:r>
+          <p:cNvPr id="4" name="Rounded Rectangle 3"/>
+          <p:cNvSpPr/>
+          <p:nvPr/>
+        </p:nvSpPr>
+        <p:spPr>
+          <a:xfrm>
+            <a:off x="566928" y="1481328"/>
+            <a:ext cx="5120640" cy="3520440"/>
+          </a:xfrm>
+          <a:prstGeom prst="roundRect">
+            <a:avLst>
+              <a:gd name="adj" fmla="val 5500"/>
+            </a:avLst>
+          </a:prstGeom>
+          <a:solidFill>
+            <a:srgbClr val="DDCFB4"/>
+          </a:solidFill>
+          <a:ln>
+            <a:noFill/>
+          </a:ln>
+          <a:effectLst/>
+        </p:spPr>
+        <p:style>
+          <a:lnRef idx="1">
+            <a:schemeClr val="accent1"/>
+          </a:lnRef>
+          <a:fillRef idx="3">
+            <a:schemeClr val="accent1"/>
+          </a:fillRef>
+          <a:effectRef idx="2">
+            <a:schemeClr val="accent1"/>
+          </a:effectRef>
+          <a:fontRef idx="minor">
+            <a:schemeClr val="lt1"/>
+          </a:fontRef>
+        </p:style>
+        <p:txBody>
+          <a:bodyPr rtlCol="0" anchor="ctr"/>
+          <a:lstStyle/>
+          <a:p>
+            <a:pPr algn="ctr"/>
+          </a:p>
+        </p:txBody>
+      </p:sp>
+      <p:sp>
+        <p:nvSpPr>
+          <p:cNvPr id="5" name="Rounded Rectangle 4"/>
+          <p:cNvSpPr/>
+          <p:nvPr/>
+        </p:nvSpPr>
+        <p:spPr>
+          <a:xfrm>
+            <a:off x="502920" y="1417320"/>
+            <a:ext cx="5120640" cy="3520440"/>
+          </a:xfrm>
+          <a:prstGeom prst="roundRect">
+            <a:avLst>
+              <a:gd name="adj" fmla="val 5500"/>
+            </a:avLst>
+          </a:prstGeom>
+          <a:solidFill>
+            <a:srgbClr val="F8F2E4"/>
+          </a:solidFill>
+          <a:ln>
+            <a:noFill/>
+          </a:ln>
+          <a:effectLst/>
+        </p:spPr>
+        <p:style>
+          <a:lnRef idx="1">
+            <a:schemeClr val="accent1"/>
+          </a:lnRef>
+          <a:fillRef idx="3">
+            <a:schemeClr val="accent1"/>
+          </a:fillRef>
+          <a:effectRef idx="2">
+            <a:schemeClr val="accent1"/>
+          </a:effectRef>
+          <a:fontRef idx="minor">
+            <a:schemeClr val="lt1"/>
+          </a:fontRef>
+        </p:style>
+        <p:txBody>
+          <a:bodyPr rtlCol="0" anchor="ctr"/>
+          <a:lstStyle/>
+          <a:p>
+            <a:pPr algn="ctr"/>
           </a:p>
         </p:txBody>
       </p:sp>
       <p:pic>
         <p:nvPicPr>
-          <p:cNvPr id="5" name="Picture 4" descr="07_ispu.png"/>
+          <p:cNvPr id="6" name="Picture 5" descr="07_ispu.png"/>
           <p:cNvPicPr>
             <a:picLocks noChangeAspect="1"/>
           </p:cNvPicPr>
@@ -6000,8 +7612,8 @@
         </p:blipFill>
         <p:spPr>
           <a:xfrm>
-            <a:off x="6126480" y="1600200"/>
-            <a:ext cx="5394960" cy="3300984"/>
+            <a:off x="704088" y="1735836"/>
+            <a:ext cx="4718303" cy="2883407"/>
           </a:xfrm>
           <a:prstGeom prst="rect">
             <a:avLst/>
@@ -6010,14 +7622,14 @@
       </p:pic>
       <p:sp>
         <p:nvSpPr>
-          <p:cNvPr id="6" name="TextBox 5"/>
+          <p:cNvPr id="7" name="TextBox 6"/>
           <p:cNvSpPr txBox="1"/>
           <p:nvPr/>
         </p:nvSpPr>
         <p:spPr>
           <a:xfrm>
-            <a:off x="6126480" y="5065775"/>
-            <a:ext cx="5394960" cy="365760"/>
+            <a:off x="502920" y="5029200"/>
+            <a:ext cx="5120640" cy="274320"/>
           </a:xfrm>
           <a:prstGeom prst="rect">
             <a:avLst/>
@@ -6025,24 +7637,210 @@
           <a:noFill/>
         </p:spPr>
         <p:txBody>
-          <a:bodyPr wrap="square">
+          <a:bodyPr wrap="square" anchor="t" lIns="0" rIns="0" tIns="0" bIns="0">
             <a:spAutoFit/>
           </a:bodyPr>
           <a:lstStyle/>
           <a:p>
             <a:pPr>
+              <a:lnSpc>
+                <a:spcPct val="113000"/>
+              </a:lnSpc>
+              <a:spcBef>
+                <a:spcPts val="0"/>
+              </a:spcBef>
               <a:spcAft>
                 <a:spcPts val="0"/>
               </a:spcAft>
             </a:pPr>
             <a:r>
-              <a:rPr sz="1200" b="0" i="1">
-                <a:solidFill>
-                  <a:srgbClr val="6B5B74"/>
+              <a:rPr sz="1050" b="0">
+                <a:solidFill>
+                  <a:srgbClr val="8A5CA6"/>
                 </a:solidFill>
                 <a:latin typeface="Noto Sans"/>
               </a:rPr>
-              <a:t>Konsentrasi PM2,5, 10 wilayah terburuk.</a:t>
+              <a:t>Chart: konsentrasi PM2.5, 10 wilayah terburuk.</a:t>
+            </a:r>
+          </a:p>
+        </p:txBody>
+      </p:sp>
+      <p:sp>
+        <p:nvSpPr>
+          <p:cNvPr id="8" name="TextBox 7"/>
+          <p:cNvSpPr txBox="1"/>
+          <p:nvPr/>
+        </p:nvSpPr>
+        <p:spPr>
+          <a:xfrm>
+            <a:off x="5989320" y="1481328"/>
+            <a:ext cx="5715000" cy="3474720"/>
+          </a:xfrm>
+          <a:prstGeom prst="rect">
+            <a:avLst/>
+          </a:prstGeom>
+          <a:noFill/>
+        </p:spPr>
+        <p:txBody>
+          <a:bodyPr wrap="square" anchor="t" lIns="0" rIns="0" tIns="0" bIns="0">
+            <a:spAutoFit/>
+          </a:bodyPr>
+          <a:lstStyle/>
+          <a:p>
+            <a:pPr>
+              <a:lnSpc>
+                <a:spcPct val="113000"/>
+              </a:lnSpc>
+              <a:spcBef>
+                <a:spcPts val="0"/>
+              </a:spcBef>
+              <a:spcAft>
+                <a:spcPts val="1000"/>
+              </a:spcAft>
+            </a:pPr>
+            <a:r>
+              <a:rPr sz="1550" b="0">
+                <a:solidFill>
+                  <a:srgbClr val="2A1E33"/>
+                </a:solidFill>
+                <a:latin typeface="Noto Sans"/>
+              </a:rPr>
+              <a:t>PM2.5 di 10 wilayah terburuk berkisar 507 sampai 1.837 (12 Oktober 2026, 15:00 WIB). Barito Kuala tertinggi: 1.837, setara 6,1 kali ambang ISPU berbahaya (di atas 300).</a:t>
+            </a:r>
+          </a:p>
+          <a:p>
+            <a:pPr>
+              <a:lnSpc>
+                <a:spcPct val="113000"/>
+              </a:lnSpc>
+              <a:spcBef>
+                <a:spcPts val="0"/>
+              </a:spcBef>
+              <a:spcAft>
+                <a:spcPts val="1000"/>
+              </a:spcAft>
+            </a:pPr>
+            <a:r>
+              <a:rPr sz="1550" b="0">
+                <a:solidFill>
+                  <a:srgbClr val="2A1E33"/>
+                </a:solidFill>
+                <a:latin typeface="Noto Sans"/>
+              </a:rPr>
+              <a:t>Sebanyak 7 dari 10 wilayah terburuk berada di Kalimantan Tengah. Kemenkes mencatat 12 kab/kota berkategori berbahaya dan 9 wilayah sangat tidak sehat.</a:t>
+            </a:r>
+          </a:p>
+          <a:p>
+            <a:pPr>
+              <a:lnSpc>
+                <a:spcPct val="113000"/>
+              </a:lnSpc>
+              <a:spcBef>
+                <a:spcPts val="0"/>
+              </a:spcBef>
+              <a:spcAft>
+                <a:spcPts val="1000"/>
+              </a:spcAft>
+            </a:pPr>
+            <a:r>
+              <a:rPr sz="1550" b="0">
+                <a:solidFill>
+                  <a:srgbClr val="2A1E33"/>
+                </a:solidFill>
+                <a:latin typeface="Noto Sans"/>
+              </a:rPr>
+              <a:t>Asap karhutla membawa PM2.5 yang masuk jauh ke paru-paru: kualitas udara adalah penghubung langsung antara karhutla dan lonjakan ISPA.</a:t>
+            </a:r>
+          </a:p>
+        </p:txBody>
+      </p:sp>
+      <p:sp>
+        <p:nvSpPr>
+          <p:cNvPr id="9" name="Rounded Rectangle 8"/>
+          <p:cNvSpPr/>
+          <p:nvPr/>
+        </p:nvSpPr>
+        <p:spPr>
+          <a:xfrm>
+            <a:off x="502920" y="5193792"/>
+            <a:ext cx="11183112" cy="932688"/>
+          </a:xfrm>
+          <a:prstGeom prst="roundRect">
+            <a:avLst>
+              <a:gd name="adj" fmla="val 5500"/>
+            </a:avLst>
+          </a:prstGeom>
+          <a:solidFill>
+            <a:srgbClr val="F8F2E4"/>
+          </a:solidFill>
+          <a:ln>
+            <a:noFill/>
+          </a:ln>
+          <a:effectLst/>
+        </p:spPr>
+        <p:style>
+          <a:lnRef idx="1">
+            <a:schemeClr val="accent1"/>
+          </a:lnRef>
+          <a:fillRef idx="3">
+            <a:schemeClr val="accent1"/>
+          </a:fillRef>
+          <a:effectRef idx="2">
+            <a:schemeClr val="accent1"/>
+          </a:effectRef>
+          <a:fontRef idx="minor">
+            <a:schemeClr val="lt1"/>
+          </a:fontRef>
+        </p:style>
+        <p:txBody>
+          <a:bodyPr rtlCol="0" anchor="ctr"/>
+          <a:lstStyle/>
+          <a:p>
+            <a:pPr algn="ctr"/>
+          </a:p>
+        </p:txBody>
+      </p:sp>
+      <p:sp>
+        <p:nvSpPr>
+          <p:cNvPr id="10" name="TextBox 9"/>
+          <p:cNvSpPr txBox="1"/>
+          <p:nvPr/>
+        </p:nvSpPr>
+        <p:spPr>
+          <a:xfrm>
+            <a:off x="960120" y="5394960"/>
+            <a:ext cx="10424160" cy="548640"/>
+          </a:xfrm>
+          <a:prstGeom prst="rect">
+            <a:avLst/>
+          </a:prstGeom>
+          <a:noFill/>
+        </p:spPr>
+        <p:txBody>
+          <a:bodyPr wrap="square" anchor="ctr" lIns="0" rIns="0" tIns="0" bIns="0">
+            <a:spAutoFit/>
+          </a:bodyPr>
+          <a:lstStyle/>
+          <a:p>
+            <a:pPr>
+              <a:lnSpc>
+                <a:spcPct val="113000"/>
+              </a:lnSpc>
+              <a:spcBef>
+                <a:spcPts val="0"/>
+              </a:spcBef>
+              <a:spcAft>
+                <a:spcPts val="0"/>
+              </a:spcAft>
+            </a:pPr>
+            <a:r>
+              <a:rPr sz="1600" b="1">
+                <a:solidFill>
+                  <a:srgbClr val="5E2A72"/>
+                </a:solidFill>
+                <a:latin typeface="Noto Sans"/>
+              </a:rPr>
+              <a:t>Barito Kuala 1.837: 6,1 kali ambang berbahaya ISPU</a:t>
             </a:r>
           </a:p>
         </p:txBody>
@@ -6075,17 +7873,64 @@
       <p:grpSpPr/>
       <p:sp>
         <p:nvSpPr>
-          <p:cNvPr id="2" name="Rectangle 1"/>
-          <p:cNvSpPr/>
-          <p:nvPr/>
-        </p:nvSpPr>
-        <p:spPr>
-          <a:xfrm>
-            <a:off x="685800" y="566928"/>
-            <a:ext cx="146304" cy="146304"/>
+          <p:cNvPr id="2" name="TextBox 1"/>
+          <p:cNvSpPr txBox="1"/>
+          <p:nvPr/>
+        </p:nvSpPr>
+        <p:spPr>
+          <a:xfrm>
+            <a:off x="502920" y="384048"/>
+            <a:ext cx="11155680" cy="914400"/>
           </a:xfrm>
           <a:prstGeom prst="rect">
             <a:avLst/>
+          </a:prstGeom>
+          <a:noFill/>
+        </p:spPr>
+        <p:txBody>
+          <a:bodyPr wrap="square" anchor="t" lIns="0" rIns="0" tIns="0" bIns="0">
+            <a:spAutoFit/>
+          </a:bodyPr>
+          <a:lstStyle/>
+          <a:p>
+            <a:pPr>
+              <a:lnSpc>
+                <a:spcPct val="113000"/>
+              </a:lnSpc>
+              <a:spcBef>
+                <a:spcPts val="0"/>
+              </a:spcBef>
+              <a:spcAft>
+                <a:spcPts val="0"/>
+              </a:spcAft>
+            </a:pPr>
+            <a:r>
+              <a:rPr sz="3100" b="1">
+                <a:solidFill>
+                  <a:srgbClr val="2A1E33"/>
+                </a:solidFill>
+                <a:latin typeface="Noto Sans"/>
+              </a:rPr>
+              <a:t>Dashboard Power BI</a:t>
+            </a:r>
+          </a:p>
+        </p:txBody>
+      </p:sp>
+      <p:sp>
+        <p:nvSpPr>
+          <p:cNvPr id="3" name="Rounded Rectangle 2"/>
+          <p:cNvSpPr/>
+          <p:nvPr/>
+        </p:nvSpPr>
+        <p:spPr>
+          <a:xfrm>
+            <a:off x="521207" y="1097280"/>
+            <a:ext cx="777240" cy="82296"/>
+          </a:xfrm>
+          <a:prstGeom prst="roundRect">
+            <a:avLst>
+              <a:gd name="adj" fmla="val 5500"/>
+            </a:avLst>
           </a:prstGeom>
           <a:solidFill>
             <a:srgbClr val="EF7D1A"/>
@@ -6119,53 +7964,175 @@
       </p:sp>
       <p:sp>
         <p:nvSpPr>
-          <p:cNvPr id="3" name="TextBox 2"/>
-          <p:cNvSpPr txBox="1"/>
-          <p:nvPr/>
-        </p:nvSpPr>
-        <p:spPr>
-          <a:xfrm>
-            <a:off x="1005840" y="347472"/>
-            <a:ext cx="10607040" cy="777240"/>
+          <p:cNvPr id="4" name="Rounded Rectangle 3"/>
+          <p:cNvSpPr/>
+          <p:nvPr/>
+        </p:nvSpPr>
+        <p:spPr>
+          <a:xfrm>
+            <a:off x="566928" y="1481328"/>
+            <a:ext cx="6903720" cy="4160520"/>
+          </a:xfrm>
+          <a:prstGeom prst="roundRect">
+            <a:avLst>
+              <a:gd name="adj" fmla="val 5500"/>
+            </a:avLst>
+          </a:prstGeom>
+          <a:solidFill>
+            <a:srgbClr val="DDCFB4"/>
+          </a:solidFill>
+          <a:ln>
+            <a:noFill/>
+          </a:ln>
+          <a:effectLst/>
+        </p:spPr>
+        <p:style>
+          <a:lnRef idx="1">
+            <a:schemeClr val="accent1"/>
+          </a:lnRef>
+          <a:fillRef idx="3">
+            <a:schemeClr val="accent1"/>
+          </a:fillRef>
+          <a:effectRef idx="2">
+            <a:schemeClr val="accent1"/>
+          </a:effectRef>
+          <a:fontRef idx="minor">
+            <a:schemeClr val="lt1"/>
+          </a:fontRef>
+        </p:style>
+        <p:txBody>
+          <a:bodyPr rtlCol="0" anchor="ctr"/>
+          <a:lstStyle/>
+          <a:p>
+            <a:pPr algn="ctr"/>
+          </a:p>
+        </p:txBody>
+      </p:sp>
+      <p:sp>
+        <p:nvSpPr>
+          <p:cNvPr id="5" name="Rounded Rectangle 4"/>
+          <p:cNvSpPr/>
+          <p:nvPr/>
+        </p:nvSpPr>
+        <p:spPr>
+          <a:xfrm>
+            <a:off x="502920" y="1417320"/>
+            <a:ext cx="6903720" cy="4160520"/>
+          </a:xfrm>
+          <a:prstGeom prst="roundRect">
+            <a:avLst>
+              <a:gd name="adj" fmla="val 5500"/>
+            </a:avLst>
+          </a:prstGeom>
+          <a:solidFill>
+            <a:srgbClr val="F8F2E4"/>
+          </a:solidFill>
+          <a:ln>
+            <a:noFill/>
+          </a:ln>
+          <a:effectLst/>
+        </p:spPr>
+        <p:style>
+          <a:lnRef idx="1">
+            <a:schemeClr val="accent1"/>
+          </a:lnRef>
+          <a:fillRef idx="3">
+            <a:schemeClr val="accent1"/>
+          </a:fillRef>
+          <a:effectRef idx="2">
+            <a:schemeClr val="accent1"/>
+          </a:effectRef>
+          <a:fontRef idx="minor">
+            <a:schemeClr val="lt1"/>
+          </a:fontRef>
+        </p:style>
+        <p:txBody>
+          <a:bodyPr rtlCol="0" anchor="ctr"/>
+          <a:lstStyle/>
+          <a:p>
+            <a:pPr algn="ctr"/>
+          </a:p>
+        </p:txBody>
+      </p:sp>
+      <p:pic>
+        <p:nvPicPr>
+          <p:cNvPr id="6" name="Picture 5" descr="dashboard_preview_halaman1.png"/>
+          <p:cNvPicPr>
+            <a:picLocks noChangeAspect="1"/>
+          </p:cNvPicPr>
+          <p:nvPr/>
+        </p:nvPicPr>
+        <p:blipFill>
+          <a:blip r:embed="rId2"/>
+          <a:stretch>
+            <a:fillRect/>
+          </a:stretch>
+        </p:blipFill>
+        <p:spPr>
+          <a:xfrm>
+            <a:off x="704088" y="1669065"/>
+            <a:ext cx="6501383" cy="3657028"/>
           </a:xfrm>
           <a:prstGeom prst="rect">
             <a:avLst/>
           </a:prstGeom>
+        </p:spPr>
+      </p:pic>
+      <p:sp>
+        <p:nvSpPr>
+          <p:cNvPr id="7" name="TextBox 6"/>
+          <p:cNvSpPr txBox="1"/>
+          <p:nvPr/>
+        </p:nvSpPr>
+        <p:spPr>
+          <a:xfrm>
+            <a:off x="502920" y="5669279"/>
+            <a:ext cx="6903720" cy="274320"/>
+          </a:xfrm>
+          <a:prstGeom prst="rect">
+            <a:avLst/>
+          </a:prstGeom>
           <a:noFill/>
         </p:spPr>
         <p:txBody>
-          <a:bodyPr wrap="square">
+          <a:bodyPr wrap="square" anchor="t" lIns="0" rIns="0" tIns="0" bIns="0">
             <a:spAutoFit/>
           </a:bodyPr>
           <a:lstStyle/>
           <a:p>
             <a:pPr>
+              <a:lnSpc>
+                <a:spcPct val="113000"/>
+              </a:lnSpc>
+              <a:spcBef>
+                <a:spcPts val="0"/>
+              </a:spcBef>
               <a:spcAft>
                 <a:spcPts val="0"/>
               </a:spcAft>
             </a:pPr>
             <a:r>
-              <a:rPr sz="3200" b="1" i="0">
-                <a:solidFill>
-                  <a:srgbClr val="2A1E33"/>
+              <a:rPr sz="1050" b="0">
+                <a:solidFill>
+                  <a:srgbClr val="8A5CA6"/>
                 </a:solidFill>
                 <a:latin typeface="Noto Sans"/>
               </a:rPr>
-              <a:t>Rekomendasi</a:t>
-            </a:r>
-          </a:p>
-        </p:txBody>
-      </p:sp>
-      <p:sp>
-        <p:nvSpPr>
-          <p:cNvPr id="4" name="TextBox 3"/>
+              <a:t>Pratinjau halaman 1 dashboard, dirender dari kit Power BI proyek ini.</a:t>
+            </a:r>
+          </a:p>
+        </p:txBody>
+      </p:sp>
+      <p:sp>
+        <p:nvSpPr>
+          <p:cNvPr id="8" name="TextBox 7"/>
           <p:cNvSpPr txBox="1"/>
           <p:nvPr/>
         </p:nvSpPr>
         <p:spPr>
           <a:xfrm>
-            <a:off x="685800" y="1554480"/>
-            <a:ext cx="5394960" cy="4754880"/>
+            <a:off x="7726679" y="1417320"/>
+            <a:ext cx="3959352" cy="365760"/>
           </a:xfrm>
           <a:prstGeom prst="rect">
             <a:avLst/>
@@ -6173,91 +8140,203 @@
           <a:noFill/>
         </p:spPr>
         <p:txBody>
-          <a:bodyPr wrap="square">
+          <a:bodyPr wrap="square" anchor="t" lIns="0" rIns="0" tIns="0" bIns="0">
             <a:spAutoFit/>
           </a:bodyPr>
           <a:lstStyle/>
           <a:p>
-            <a:pPr marL="171450" indent="-171450">
+            <a:pPr>
               <a:lnSpc>
-                <a:spcPct val="112000"/>
+                <a:spcPct val="113000"/>
               </a:lnSpc>
               <a:spcBef>
-                <a:spcPts val="200"/>
+                <a:spcPts val="0"/>
               </a:spcBef>
               <a:spcAft>
-                <a:spcPts val="1000"/>
+                <a:spcPts val="0"/>
               </a:spcAft>
-              <a:buChar char="•"/>
             </a:pPr>
             <a:r>
-              <a:rPr sz="1600" b="0" i="0">
-                <a:solidFill>
-                  <a:srgbClr val="2A1E33"/>
+              <a:rPr sz="1300" b="1">
+                <a:solidFill>
+                  <a:srgbClr val="5E2A72"/>
                 </a:solidFill>
                 <a:latin typeface="Noto Sans"/>
               </a:rPr>
-              <a:t>Lindungi balita di wilayah karhutla: masker anak, pembelajaran jarak jauh saat ISPU berbahaya, posko kesehatan.</a:t>
-            </a:r>
-          </a:p>
-          <a:p>
-            <a:pPr marL="171450" indent="-171450">
+              <a:t>ISI DASHBOARD</a:t>
+            </a:r>
+          </a:p>
+        </p:txBody>
+      </p:sp>
+      <p:sp>
+        <p:nvSpPr>
+          <p:cNvPr id="9" name="Rounded Rectangle 8"/>
+          <p:cNvSpPr/>
+          <p:nvPr/>
+        </p:nvSpPr>
+        <p:spPr>
+          <a:xfrm>
+            <a:off x="7726679" y="1810512"/>
+            <a:ext cx="3959352" cy="731520"/>
+          </a:xfrm>
+          <a:prstGeom prst="roundRect">
+            <a:avLst>
+              <a:gd name="adj" fmla="val 5500"/>
+            </a:avLst>
+          </a:prstGeom>
+          <a:solidFill>
+            <a:srgbClr val="F8F2E4"/>
+          </a:solidFill>
+          <a:ln>
+            <a:noFill/>
+          </a:ln>
+          <a:effectLst/>
+        </p:spPr>
+        <p:style>
+          <a:lnRef idx="1">
+            <a:schemeClr val="accent1"/>
+          </a:lnRef>
+          <a:fillRef idx="3">
+            <a:schemeClr val="accent1"/>
+          </a:fillRef>
+          <a:effectRef idx="2">
+            <a:schemeClr val="accent1"/>
+          </a:effectRef>
+          <a:fontRef idx="minor">
+            <a:schemeClr val="lt1"/>
+          </a:fontRef>
+        </p:style>
+        <p:txBody>
+          <a:bodyPr rtlCol="0" anchor="ctr"/>
+          <a:lstStyle/>
+          <a:p>
+            <a:pPr algn="ctr"/>
+          </a:p>
+        </p:txBody>
+      </p:sp>
+      <p:sp>
+        <p:nvSpPr>
+          <p:cNvPr id="10" name="TextBox 9"/>
+          <p:cNvSpPr txBox="1"/>
+          <p:nvPr/>
+        </p:nvSpPr>
+        <p:spPr>
+          <a:xfrm>
+            <a:off x="7973568" y="1901952"/>
+            <a:ext cx="3520440" cy="566928"/>
+          </a:xfrm>
+          <a:prstGeom prst="rect">
+            <a:avLst/>
+          </a:prstGeom>
+          <a:noFill/>
+        </p:spPr>
+        <p:txBody>
+          <a:bodyPr wrap="square" anchor="t" lIns="0" rIns="0" tIns="0" bIns="0">
+            <a:spAutoFit/>
+          </a:bodyPr>
+          <a:lstStyle/>
+          <a:p>
+            <a:pPr>
               <a:lnSpc>
-                <a:spcPct val="112000"/>
+                <a:spcPct val="113000"/>
               </a:lnSpc>
               <a:spcBef>
-                <a:spcPts val="200"/>
+                <a:spcPts val="0"/>
               </a:spcBef>
               <a:spcAft>
-                <a:spcPts val="1000"/>
+                <a:spcPts val="100"/>
               </a:spcAft>
-              <a:buChar char="•"/>
             </a:pPr>
             <a:r>
-              <a:rPr sz="1600" b="0" i="0">
-                <a:solidFill>
-                  <a:srgbClr val="2A1E33"/>
+              <a:rPr sz="1050" b="1">
+                <a:solidFill>
+                  <a:srgbClr val="EF7D1A"/>
                 </a:solidFill>
                 <a:latin typeface="Noto Sans"/>
               </a:rPr>
-              <a:t>Fokus pada Kalsel dan Sumsel: 52,6% kasus karhutla - pertahankan distribusi masker dan tenaga kesehatan.</a:t>
-            </a:r>
-          </a:p>
-          <a:p>
-            <a:pPr marL="171450" indent="-171450">
+              <a:t>Halaman 1</a:t>
+            </a:r>
+          </a:p>
+          <a:p>
+            <a:pPr>
               <a:lnSpc>
-                <a:spcPct val="112000"/>
+                <a:spcPct val="113000"/>
               </a:lnSpc>
               <a:spcBef>
-                <a:spcPts val="200"/>
+                <a:spcPts val="0"/>
               </a:spcBef>
               <a:spcAft>
-                <a:spcPts val="1000"/>
+                <a:spcPts val="0"/>
               </a:spcAft>
-              <a:buChar char="•"/>
             </a:pPr>
             <a:r>
-              <a:rPr sz="1600" b="0" i="0">
+              <a:rPr sz="1300" b="1">
                 <a:solidFill>
                   <a:srgbClr val="2A1E33"/>
                 </a:solidFill>
                 <a:latin typeface="Noto Sans"/>
               </a:rPr>
-              <a:t>Perhatikan Jakarta: beban per kapita 150,0/1.000 - perkuat surveilans puskesmas dan kesiapan RS saat puncak kemarau.</a:t>
-            </a:r>
-          </a:p>
-        </p:txBody>
-      </p:sp>
-      <p:sp>
-        <p:nvSpPr>
-          <p:cNvPr id="5" name="TextBox 4"/>
+              <a:t>Ringkasan Nasional SKDR</a:t>
+            </a:r>
+          </a:p>
+        </p:txBody>
+      </p:sp>
+      <p:sp>
+        <p:nvSpPr>
+          <p:cNvPr id="11" name="Rounded Rectangle 10"/>
+          <p:cNvSpPr/>
+          <p:nvPr/>
+        </p:nvSpPr>
+        <p:spPr>
+          <a:xfrm>
+            <a:off x="7726679" y="2651760"/>
+            <a:ext cx="3959352" cy="731520"/>
+          </a:xfrm>
+          <a:prstGeom prst="roundRect">
+            <a:avLst>
+              <a:gd name="adj" fmla="val 5500"/>
+            </a:avLst>
+          </a:prstGeom>
+          <a:solidFill>
+            <a:srgbClr val="F8F2E4"/>
+          </a:solidFill>
+          <a:ln>
+            <a:noFill/>
+          </a:ln>
+          <a:effectLst/>
+        </p:spPr>
+        <p:style>
+          <a:lnRef idx="1">
+            <a:schemeClr val="accent1"/>
+          </a:lnRef>
+          <a:fillRef idx="3">
+            <a:schemeClr val="accent1"/>
+          </a:fillRef>
+          <a:effectRef idx="2">
+            <a:schemeClr val="accent1"/>
+          </a:effectRef>
+          <a:fontRef idx="minor">
+            <a:schemeClr val="lt1"/>
+          </a:fontRef>
+        </p:style>
+        <p:txBody>
+          <a:bodyPr rtlCol="0" anchor="ctr"/>
+          <a:lstStyle/>
+          <a:p>
+            <a:pPr algn="ctr"/>
+          </a:p>
+        </p:txBody>
+      </p:sp>
+      <p:sp>
+        <p:nvSpPr>
+          <p:cNvPr id="12" name="TextBox 11"/>
           <p:cNvSpPr txBox="1"/>
           <p:nvPr/>
         </p:nvSpPr>
         <p:spPr>
           <a:xfrm>
-            <a:off x="6355080" y="1554480"/>
-            <a:ext cx="5166360" cy="4754880"/>
+            <a:off x="7973568" y="2743200"/>
+            <a:ext cx="3520440" cy="566928"/>
           </a:xfrm>
           <a:prstGeom prst="rect">
             <a:avLst/>
@@ -6265,54 +8344,423 @@
           <a:noFill/>
         </p:spPr>
         <p:txBody>
-          <a:bodyPr wrap="square">
+          <a:bodyPr wrap="square" anchor="t" lIns="0" rIns="0" tIns="0" bIns="0">
             <a:spAutoFit/>
           </a:bodyPr>
           <a:lstStyle/>
           <a:p>
-            <a:pPr marL="171450" indent="-171450">
+            <a:pPr>
               <a:lnSpc>
-                <a:spcPct val="112000"/>
+                <a:spcPct val="113000"/>
               </a:lnSpc>
               <a:spcBef>
-                <a:spcPts val="200"/>
+                <a:spcPts val="0"/>
               </a:spcBef>
               <a:spcAft>
-                <a:spcPts val="1000"/>
+                <a:spcPts val="100"/>
               </a:spcAft>
-              <a:buChar char="•"/>
             </a:pPr>
             <a:r>
-              <a:rPr sz="1600" b="0" i="0">
-                <a:solidFill>
-                  <a:srgbClr val="2A1E33"/>
+              <a:rPr sz="1050" b="1">
+                <a:solidFill>
+                  <a:srgbClr val="EF7D1A"/>
                 </a:solidFill>
                 <a:latin typeface="Noto Sans"/>
               </a:rPr>
-              <a:t>Mulai sebelum kemarau: laporan sudah &gt;400 ribu/minggu sejak minggu ke-27.</a:t>
-            </a:r>
-          </a:p>
-          <a:p>
-            <a:pPr marL="171450" indent="-171450">
+              <a:t>Halaman 2</a:t>
+            </a:r>
+          </a:p>
+          <a:p>
+            <a:pPr>
               <a:lnSpc>
-                <a:spcPct val="112000"/>
+                <a:spcPct val="113000"/>
               </a:lnSpc>
               <a:spcBef>
-                <a:spcPts val="200"/>
+                <a:spcPts val="0"/>
               </a:spcBef>
               <a:spcAft>
-                <a:spcPts val="1000"/>
+                <a:spcPts val="0"/>
               </a:spcAft>
-              <a:buChar char="•"/>
             </a:pPr>
             <a:r>
-              <a:rPr sz="1600" b="0" i="0">
+              <a:rPr sz="1300" b="1">
                 <a:solidFill>
                   <a:srgbClr val="2A1E33"/>
                 </a:solidFill>
                 <a:latin typeface="Noto Sans"/>
               </a:rPr>
-              <a:t>Perbaiki transparansi data: publikasikan tabel provinsi lengkap dan deret mingguan SKDR dalam format terbuka.</a:t>
+              <a:t>Per Kapita dan Konsentrasi Provinsi</a:t>
+            </a:r>
+          </a:p>
+        </p:txBody>
+      </p:sp>
+      <p:sp>
+        <p:nvSpPr>
+          <p:cNvPr id="13" name="Rounded Rectangle 12"/>
+          <p:cNvSpPr/>
+          <p:nvPr/>
+        </p:nvSpPr>
+        <p:spPr>
+          <a:xfrm>
+            <a:off x="7726679" y="3493008"/>
+            <a:ext cx="3959352" cy="731520"/>
+          </a:xfrm>
+          <a:prstGeom prst="roundRect">
+            <a:avLst>
+              <a:gd name="adj" fmla="val 5500"/>
+            </a:avLst>
+          </a:prstGeom>
+          <a:solidFill>
+            <a:srgbClr val="F8F2E4"/>
+          </a:solidFill>
+          <a:ln>
+            <a:noFill/>
+          </a:ln>
+          <a:effectLst/>
+        </p:spPr>
+        <p:style>
+          <a:lnRef idx="1">
+            <a:schemeClr val="accent1"/>
+          </a:lnRef>
+          <a:fillRef idx="3">
+            <a:schemeClr val="accent1"/>
+          </a:fillRef>
+          <a:effectRef idx="2">
+            <a:schemeClr val="accent1"/>
+          </a:effectRef>
+          <a:fontRef idx="minor">
+            <a:schemeClr val="lt1"/>
+          </a:fontRef>
+        </p:style>
+        <p:txBody>
+          <a:bodyPr rtlCol="0" anchor="ctr"/>
+          <a:lstStyle/>
+          <a:p>
+            <a:pPr algn="ctr"/>
+          </a:p>
+        </p:txBody>
+      </p:sp>
+      <p:sp>
+        <p:nvSpPr>
+          <p:cNvPr id="14" name="TextBox 13"/>
+          <p:cNvSpPr txBox="1"/>
+          <p:nvPr/>
+        </p:nvSpPr>
+        <p:spPr>
+          <a:xfrm>
+            <a:off x="7973568" y="3584448"/>
+            <a:ext cx="3520440" cy="566928"/>
+          </a:xfrm>
+          <a:prstGeom prst="rect">
+            <a:avLst/>
+          </a:prstGeom>
+          <a:noFill/>
+        </p:spPr>
+        <p:txBody>
+          <a:bodyPr wrap="square" anchor="t" lIns="0" rIns="0" tIns="0" bIns="0">
+            <a:spAutoFit/>
+          </a:bodyPr>
+          <a:lstStyle/>
+          <a:p>
+            <a:pPr>
+              <a:lnSpc>
+                <a:spcPct val="113000"/>
+              </a:lnSpc>
+              <a:spcBef>
+                <a:spcPts val="0"/>
+              </a:spcBef>
+              <a:spcAft>
+                <a:spcPts val="100"/>
+              </a:spcAft>
+            </a:pPr>
+            <a:r>
+              <a:rPr sz="1050" b="1">
+                <a:solidFill>
+                  <a:srgbClr val="EF7D1A"/>
+                </a:solidFill>
+                <a:latin typeface="Noto Sans"/>
+              </a:rPr>
+              <a:t>Halaman 3</a:t>
+            </a:r>
+          </a:p>
+          <a:p>
+            <a:pPr>
+              <a:lnSpc>
+                <a:spcPct val="113000"/>
+              </a:lnSpc>
+              <a:spcBef>
+                <a:spcPts val="0"/>
+              </a:spcBef>
+              <a:spcAft>
+                <a:spcPts val="0"/>
+              </a:spcAft>
+            </a:pPr>
+            <a:r>
+              <a:rPr sz="1300" b="1">
+                <a:solidFill>
+                  <a:srgbClr val="2A1E33"/>
+                </a:solidFill>
+                <a:latin typeface="Noto Sans"/>
+              </a:rPr>
+              <a:t>Karhutla: Dampak Kesehatan (Seri Terpisah)</a:t>
+            </a:r>
+          </a:p>
+        </p:txBody>
+      </p:sp>
+      <p:sp>
+        <p:nvSpPr>
+          <p:cNvPr id="15" name="Rounded Rectangle 14"/>
+          <p:cNvSpPr/>
+          <p:nvPr/>
+        </p:nvSpPr>
+        <p:spPr>
+          <a:xfrm>
+            <a:off x="7726679" y="4334256"/>
+            <a:ext cx="3959352" cy="731520"/>
+          </a:xfrm>
+          <a:prstGeom prst="roundRect">
+            <a:avLst>
+              <a:gd name="adj" fmla="val 5500"/>
+            </a:avLst>
+          </a:prstGeom>
+          <a:solidFill>
+            <a:srgbClr val="F8F2E4"/>
+          </a:solidFill>
+          <a:ln>
+            <a:noFill/>
+          </a:ln>
+          <a:effectLst/>
+        </p:spPr>
+        <p:style>
+          <a:lnRef idx="1">
+            <a:schemeClr val="accent1"/>
+          </a:lnRef>
+          <a:fillRef idx="3">
+            <a:schemeClr val="accent1"/>
+          </a:fillRef>
+          <a:effectRef idx="2">
+            <a:schemeClr val="accent1"/>
+          </a:effectRef>
+          <a:fontRef idx="minor">
+            <a:schemeClr val="lt1"/>
+          </a:fontRef>
+        </p:style>
+        <p:txBody>
+          <a:bodyPr rtlCol="0" anchor="ctr"/>
+          <a:lstStyle/>
+          <a:p>
+            <a:pPr algn="ctr"/>
+          </a:p>
+        </p:txBody>
+      </p:sp>
+      <p:sp>
+        <p:nvSpPr>
+          <p:cNvPr id="16" name="TextBox 15"/>
+          <p:cNvSpPr txBox="1"/>
+          <p:nvPr/>
+        </p:nvSpPr>
+        <p:spPr>
+          <a:xfrm>
+            <a:off x="7973568" y="4425696"/>
+            <a:ext cx="3520440" cy="566928"/>
+          </a:xfrm>
+          <a:prstGeom prst="rect">
+            <a:avLst/>
+          </a:prstGeom>
+          <a:noFill/>
+        </p:spPr>
+        <p:txBody>
+          <a:bodyPr wrap="square" anchor="t" lIns="0" rIns="0" tIns="0" bIns="0">
+            <a:spAutoFit/>
+          </a:bodyPr>
+          <a:lstStyle/>
+          <a:p>
+            <a:pPr>
+              <a:lnSpc>
+                <a:spcPct val="113000"/>
+              </a:lnSpc>
+              <a:spcBef>
+                <a:spcPts val="0"/>
+              </a:spcBef>
+              <a:spcAft>
+                <a:spcPts val="100"/>
+              </a:spcAft>
+            </a:pPr>
+            <a:r>
+              <a:rPr sz="1050" b="1">
+                <a:solidFill>
+                  <a:srgbClr val="EF7D1A"/>
+                </a:solidFill>
+                <a:latin typeface="Noto Sans"/>
+              </a:rPr>
+              <a:t>Halaman 4</a:t>
+            </a:r>
+          </a:p>
+          <a:p>
+            <a:pPr>
+              <a:lnSpc>
+                <a:spcPct val="113000"/>
+              </a:lnSpc>
+              <a:spcBef>
+                <a:spcPts val="0"/>
+              </a:spcBef>
+              <a:spcAft>
+                <a:spcPts val="0"/>
+              </a:spcAft>
+            </a:pPr>
+            <a:r>
+              <a:rPr sz="1300" b="1">
+                <a:solidFill>
+                  <a:srgbClr val="2A1E33"/>
+                </a:solidFill>
+                <a:latin typeface="Noto Sans"/>
+              </a:rPr>
+              <a:t>Kualitas Udara dan Konteks Jakarta + Metodologi</a:t>
+            </a:r>
+          </a:p>
+        </p:txBody>
+      </p:sp>
+      <p:sp>
+        <p:nvSpPr>
+          <p:cNvPr id="17" name="TextBox 16"/>
+          <p:cNvSpPr txBox="1"/>
+          <p:nvPr/>
+        </p:nvSpPr>
+        <p:spPr>
+          <a:xfrm>
+            <a:off x="7726679" y="5212080"/>
+            <a:ext cx="3959352" cy="914400"/>
+          </a:xfrm>
+          <a:prstGeom prst="rect">
+            <a:avLst/>
+          </a:prstGeom>
+          <a:noFill/>
+        </p:spPr>
+        <p:txBody>
+          <a:bodyPr wrap="square" anchor="t" lIns="0" rIns="0" tIns="0" bIns="0">
+            <a:spAutoFit/>
+          </a:bodyPr>
+          <a:lstStyle/>
+          <a:p>
+            <a:pPr>
+              <a:lnSpc>
+                <a:spcPct val="113000"/>
+              </a:lnSpc>
+              <a:spcBef>
+                <a:spcPts val="0"/>
+              </a:spcBef>
+              <a:spcAft>
+                <a:spcPts val="0"/>
+              </a:spcAft>
+            </a:pPr>
+            <a:r>
+              <a:rPr sz="1200" b="0">
+                <a:solidFill>
+                  <a:srgbClr val="2A1E33"/>
+                </a:solidFill>
+                <a:latin typeface="Noto Sans"/>
+              </a:rPr>
+              <a:t>Model dashboard menjaga dua seri tetap terpisah: SKDR tidak pernah dicampur dengan karhutla, mengikuti aturan data proyek ini.</a:t>
+            </a:r>
+          </a:p>
+        </p:txBody>
+      </p:sp>
+      <p:sp>
+        <p:nvSpPr>
+          <p:cNvPr id="18" name="Rounded Rectangle 17"/>
+          <p:cNvSpPr/>
+          <p:nvPr/>
+        </p:nvSpPr>
+        <p:spPr>
+          <a:xfrm>
+            <a:off x="502920" y="5961888"/>
+            <a:ext cx="11183112" cy="603504"/>
+          </a:xfrm>
+          <a:prstGeom prst="roundRect">
+            <a:avLst>
+              <a:gd name="adj" fmla="val 5500"/>
+            </a:avLst>
+          </a:prstGeom>
+          <a:solidFill>
+            <a:srgbClr val="5E2A72"/>
+          </a:solidFill>
+          <a:ln>
+            <a:noFill/>
+          </a:ln>
+          <a:effectLst/>
+        </p:spPr>
+        <p:style>
+          <a:lnRef idx="1">
+            <a:schemeClr val="accent1"/>
+          </a:lnRef>
+          <a:fillRef idx="3">
+            <a:schemeClr val="accent1"/>
+          </a:fillRef>
+          <a:effectRef idx="2">
+            <a:schemeClr val="accent1"/>
+          </a:effectRef>
+          <a:fontRef idx="minor">
+            <a:schemeClr val="lt1"/>
+          </a:fontRef>
+        </p:style>
+        <p:txBody>
+          <a:bodyPr rtlCol="0" anchor="ctr"/>
+          <a:lstStyle/>
+          <a:p>
+            <a:pPr algn="ctr"/>
+          </a:p>
+        </p:txBody>
+      </p:sp>
+      <p:sp>
+        <p:nvSpPr>
+          <p:cNvPr id="19" name="TextBox 18"/>
+          <p:cNvSpPr txBox="1"/>
+          <p:nvPr/>
+        </p:nvSpPr>
+        <p:spPr>
+          <a:xfrm>
+            <a:off x="777240" y="5961888"/>
+            <a:ext cx="10698480" cy="603504"/>
+          </a:xfrm>
+          <a:prstGeom prst="rect">
+            <a:avLst/>
+          </a:prstGeom>
+          <a:noFill/>
+        </p:spPr>
+        <p:txBody>
+          <a:bodyPr wrap="square" anchor="ctr" lIns="0" rIns="0" tIns="0" bIns="0">
+            <a:spAutoFit/>
+          </a:bodyPr>
+          <a:lstStyle/>
+          <a:p>
+            <a:pPr>
+              <a:lnSpc>
+                <a:spcPct val="110000"/>
+              </a:lnSpc>
+              <a:spcBef>
+                <a:spcPts val="0"/>
+              </a:spcBef>
+              <a:spcAft>
+                <a:spcPts val="0"/>
+              </a:spcAft>
+            </a:pPr>
+            <a:r>
+              <a:rPr sz="1250" b="1">
+                <a:solidFill>
+                  <a:srgbClr val="FFFFFF"/>
+                </a:solidFill>
+                <a:latin typeface="Noto Sans"/>
+              </a:rPr>
+              <a:t>ISPA-Indonesia-2026.pbix</a:t>
+            </a:r>
+            <a:r>
+              <a:rPr sz="1250" b="0">
+                <a:solidFill>
+                  <a:srgbClr val="F8F2E4"/>
+                </a:solidFill>
+                <a:latin typeface="Noto Sans"/>
+              </a:rPr>
+              <a:t>: star schema, measure DAX terverifikasi, layout 4 halaman, dan panduan rakit ada di folder powerbi pada repo ini.</a:t>
             </a:r>
           </a:p>
         </p:txBody>
